--- a/Cortex-Atlas-Client-Deck.pptx
+++ b/Cortex-Atlas-Client-Deck.pptx
@@ -5205,7 +5205,7 @@
                 <a:solidFill>
                   <a:srgbClr val="F89739"/>
                 </a:solidFill>
-                <a:latin typeface="Inter"/>
+                <a:latin typeface="Calibri"/>
               </a:rPr>
               <a:t>C O R T E X   S U I T E</a:t>
             </a:r>
@@ -5247,7 +5247,7 @@
                 <a:solidFill>
                   <a:srgbClr val="FFFFFF"/>
                 </a:solidFill>
-                <a:latin typeface="Inter"/>
+                <a:latin typeface="Calibri"/>
               </a:rPr>
               <a:t>Cortex Atlas</a:t>
             </a:r>
@@ -5289,7 +5289,7 @@
                 <a:solidFill>
                   <a:srgbClr val="C7CCD3"/>
                 </a:solidFill>
-                <a:latin typeface="Inter"/>
+                <a:latin typeface="Calibri"/>
               </a:rPr>
               <a:t>Commercial data governance, connected.</a:t>
             </a:r>
@@ -5331,7 +5331,7 @@
                 <a:solidFill>
                   <a:srgbClr val="A9AFB6"/>
                 </a:solidFill>
-                <a:latin typeface="Inter"/>
+                <a:latin typeface="Calibri"/>
               </a:rPr>
               <a:t>Five interlinked tools — requests, catalogue, KPIs, vendors and agreements — rebuilt as one decision layer for Commercial Insights &amp; Data Procurement.</a:t>
             </a:r>
@@ -5417,7 +5417,7 @@
                 <a:solidFill>
                   <a:srgbClr val="A9AFB6"/>
                 </a:solidFill>
-                <a:latin typeface="Inter"/>
+                <a:latin typeface="Calibri"/>
               </a:rPr>
               <a:t>Prepared for: NovaCura Pharmaceuticals (illustrative)   ·   Working prototype walkthrough   ·   Synthetic data</a:t>
             </a:r>
@@ -5529,7 +5529,7 @@
                 <a:solidFill>
                   <a:srgbClr val="F89739"/>
                 </a:solidFill>
-                <a:latin typeface="Inter"/>
+                <a:latin typeface="Calibri"/>
               </a:rPr>
               <a:t>TOOL 1 — WORKFLOW</a:t>
             </a:r>
@@ -5571,7 +5571,7 @@
                 <a:solidFill>
                   <a:srgbClr val="09131B"/>
                 </a:solidFill>
-                <a:latin typeface="Inter"/>
+                <a:latin typeface="Calibri"/>
               </a:rPr>
               <a:t>Data Requests (DPRH)</a:t>
             </a:r>
@@ -5613,7 +5613,7 @@
                 <a:solidFill>
                   <a:srgbClr val="595959"/>
                 </a:solidFill>
-                <a:latin typeface="Inter"/>
+                <a:latin typeface="Calibri"/>
               </a:rPr>
               <a:t>One combined, role-gated form governs every data buy before money is committed.</a:t>
             </a:r>
@@ -5749,7 +5749,7 @@
                 <a:solidFill>
                   <a:srgbClr val="09131B"/>
                 </a:solidFill>
-                <a:latin typeface="Inter"/>
+                <a:latin typeface="Calibri"/>
               </a:rPr>
               <a:t>1</a:t>
             </a:r>
@@ -5791,7 +5791,7 @@
                 <a:solidFill>
                   <a:srgbClr val="09131B"/>
                 </a:solidFill>
-                <a:latin typeface="Inter"/>
+                <a:latin typeface="Calibri"/>
               </a:rPr>
               <a:t>Role-gated approval</a:t>
             </a:r>
@@ -5810,7 +5810,7 @@
                 <a:solidFill>
                   <a:srgbClr val="595959"/>
                 </a:solidFill>
-                <a:latin typeface="Inter"/>
+                <a:latin typeface="Calibri"/>
               </a:rPr>
               <a:t>A single form raises the request; reviewers see only their section. Routes Requester → Regional + Admin → Committee → Admin final, by national/sub-national scope and cost threshold.</a:t>
             </a:r>
@@ -5946,7 +5946,7 @@
                 <a:solidFill>
                   <a:srgbClr val="09131B"/>
                 </a:solidFill>
-                <a:latin typeface="Inter"/>
+                <a:latin typeface="Calibri"/>
               </a:rPr>
               <a:t>2</a:t>
             </a:r>
@@ -5988,7 +5988,7 @@
                 <a:solidFill>
                   <a:srgbClr val="09131B"/>
                 </a:solidFill>
-                <a:latin typeface="Inter"/>
+                <a:latin typeface="Calibri"/>
               </a:rPr>
               <a:t>Automation built in</a:t>
             </a:r>
@@ -6007,7 +6007,7 @@
                 <a:solidFill>
                   <a:srgbClr val="595959"/>
                 </a:solidFill>
-                <a:latin typeface="Inter"/>
+                <a:latin typeface="Calibri"/>
               </a:rPr>
               <a:t>On renewal the form pre-fills from the catalogue; once purchased, one click writes every field back into the catalogue — no re-keying, no drift.</a:t>
             </a:r>
@@ -6143,7 +6143,7 @@
                 <a:solidFill>
                   <a:srgbClr val="09131B"/>
                 </a:solidFill>
-                <a:latin typeface="Inter"/>
+                <a:latin typeface="Calibri"/>
               </a:rPr>
               <a:t>3</a:t>
             </a:r>
@@ -6185,7 +6185,7 @@
                 <a:solidFill>
                   <a:srgbClr val="09131B"/>
                 </a:solidFill>
-                <a:latin typeface="Inter"/>
+                <a:latin typeface="Calibri"/>
               </a:rPr>
               <a:t>Duplicate-buy detection</a:t>
             </a:r>
@@ -6204,7 +6204,7 @@
                 <a:solidFill>
                   <a:srgbClr val="595959"/>
                 </a:solidFill>
-                <a:latin typeface="Inter"/>
+                <a:latin typeface="Calibri"/>
               </a:rPr>
               <a:t>At intake, Atlas matches the request against the catalogue on vendor, therapeutic area and data type — and flags overlap before spend.</a:t>
             </a:r>
@@ -6246,7 +6246,7 @@
                 <a:solidFill>
                   <a:srgbClr val="F89739"/>
                 </a:solidFill>
-                <a:latin typeface="Inter"/>
+                <a:latin typeface="Calibri"/>
               </a:rPr>
               <a:t>WHAT THE PROTOTYPE SURFACES</a:t>
             </a:r>
@@ -6288,7 +6288,7 @@
                 <a:solidFill>
                   <a:srgbClr val="09131B"/>
                 </a:solidFill>
-                <a:latin typeface="Inter"/>
+                <a:latin typeface="Calibri"/>
               </a:rPr>
               <a:t>2 in-flight requests flagged as overlapping data already owned — roughly $1.09M of exposure to review before approval.</a:t>
             </a:r>
@@ -6330,7 +6330,7 @@
                 <a:solidFill>
                   <a:srgbClr val="595959"/>
                 </a:solidFill>
-                <a:latin typeface="Inter"/>
+                <a:latin typeface="Calibri"/>
               </a:rPr>
               <a:t>Production feeds:</a:t>
             </a:r>
@@ -6420,7 +6420,7 @@
                 <a:solidFill>
                   <a:srgbClr val="595959"/>
                 </a:solidFill>
-                <a:latin typeface="Inter"/>
+                <a:latin typeface="Calibri"/>
               </a:rPr>
               <a:t>SharePoint</a:t>
             </a:r>
@@ -6510,7 +6510,7 @@
                 <a:solidFill>
                   <a:srgbClr val="595959"/>
                 </a:solidFill>
-                <a:latin typeface="Inter"/>
+                <a:latin typeface="Calibri"/>
               </a:rPr>
               <a:t>Power Automate</a:t>
             </a:r>
@@ -6600,7 +6600,7 @@
                 <a:solidFill>
                   <a:srgbClr val="595959"/>
                 </a:solidFill>
-                <a:latin typeface="Inter"/>
+                <a:latin typeface="Calibri"/>
               </a:rPr>
               <a:t>Veeva CRM</a:t>
             </a:r>
@@ -6686,7 +6686,7 @@
                 <a:solidFill>
                   <a:srgbClr val="A9AFB6"/>
                 </a:solidFill>
-                <a:latin typeface="Inter"/>
+                <a:latin typeface="Calibri"/>
               </a:rPr>
               <a:t>Cortex Atlas  ·  Illustrative prototype, synthetic data  ·  Confidential</a:t>
             </a:r>
@@ -6728,7 +6728,7 @@
                 <a:solidFill>
                   <a:srgbClr val="A9AFB6"/>
                 </a:solidFill>
-                <a:latin typeface="Inter"/>
+                <a:latin typeface="Calibri"/>
               </a:rPr>
               <a:t>6</a:t>
             </a:r>
@@ -6840,7 +6840,7 @@
                 <a:solidFill>
                   <a:srgbClr val="F89739"/>
                 </a:solidFill>
-                <a:latin typeface="Inter"/>
+                <a:latin typeface="Calibri"/>
               </a:rPr>
               <a:t>TOOL 2 — SYSTEM OF RECORD</a:t>
             </a:r>
@@ -6882,7 +6882,7 @@
                 <a:solidFill>
                   <a:srgbClr val="09131B"/>
                 </a:solidFill>
-                <a:latin typeface="Inter"/>
+                <a:latin typeface="Calibri"/>
               </a:rPr>
               <a:t>Data Catalogue</a:t>
             </a:r>
@@ -6924,7 +6924,7 @@
                 <a:solidFill>
                   <a:srgbClr val="595959"/>
                 </a:solidFill>
-                <a:latin typeface="Inter"/>
+                <a:latin typeface="Calibri"/>
               </a:rPr>
               <a:t>The central record of every asset purchased — the single source everything links to.</a:t>
             </a:r>
@@ -7060,7 +7060,7 @@
                 <a:solidFill>
                   <a:srgbClr val="09131B"/>
                 </a:solidFill>
-                <a:latin typeface="Inter"/>
+                <a:latin typeface="Calibri"/>
               </a:rPr>
               <a:t>1</a:t>
             </a:r>
@@ -7102,7 +7102,7 @@
                 <a:solidFill>
                   <a:srgbClr val="09131B"/>
                 </a:solidFill>
-                <a:latin typeface="Inter"/>
+                <a:latin typeface="Calibri"/>
               </a:rPr>
               <a:t>One rich record</a:t>
             </a:r>
@@ -7121,7 +7121,7 @@
                 <a:solidFill>
                   <a:srgbClr val="595959"/>
                 </a:solidFill>
-                <a:latin typeface="Inter"/>
+                <a:latin typeface="Calibri"/>
               </a:rPr>
               <a:t>The full asset profile — identity, classification, coverage, quality, commercials, access — with Gold / Silver / Bronze quality and PII / PHI flags.</a:t>
             </a:r>
@@ -7257,7 +7257,7 @@
                 <a:solidFill>
                   <a:srgbClr val="09131B"/>
                 </a:solidFill>
-                <a:latin typeface="Inter"/>
+                <a:latin typeface="Calibri"/>
               </a:rPr>
               <a:t>2</a:t>
             </a:r>
@@ -7299,7 +7299,7 @@
                 <a:solidFill>
                   <a:srgbClr val="09131B"/>
                 </a:solidFill>
-                <a:latin typeface="Inter"/>
+                <a:latin typeface="Calibri"/>
               </a:rPr>
               <a:t>Auto-classification</a:t>
             </a:r>
@@ -7318,7 +7318,7 @@
                 <a:solidFill>
                   <a:srgbClr val="595959"/>
                 </a:solidFill>
-                <a:latin typeface="Inter"/>
+                <a:latin typeface="Calibri"/>
               </a:rPr>
               <a:t>On a new entry, granularity and archetype drive automatic PII/PHI detection and a suggested quality tier — governance by default, not by afterthought.</a:t>
             </a:r>
@@ -7454,7 +7454,7 @@
                 <a:solidFill>
                   <a:srgbClr val="09131B"/>
                 </a:solidFill>
-                <a:latin typeface="Inter"/>
+                <a:latin typeface="Calibri"/>
               </a:rPr>
               <a:t>3</a:t>
             </a:r>
@@ -7496,7 +7496,7 @@
                 <a:solidFill>
                   <a:srgbClr val="09131B"/>
                 </a:solidFill>
-                <a:latin typeface="Inter"/>
+                <a:latin typeface="Calibri"/>
               </a:rPr>
               <a:t>Three ways in</a:t>
             </a:r>
@@ -7515,7 +7515,7 @@
                 <a:solidFill>
                   <a:srgbClr val="595959"/>
                 </a:solidFill>
-                <a:latin typeface="Inter"/>
+                <a:latin typeface="Calibri"/>
               </a:rPr>
               <a:t>An approved request, a renewal read-back, or a manual entry — all land in the same trusted record. 'Do we already own this?' finally has one answer.</a:t>
             </a:r>
@@ -7557,7 +7557,7 @@
                 <a:solidFill>
                   <a:srgbClr val="F89739"/>
                 </a:solidFill>
-                <a:latin typeface="Inter"/>
+                <a:latin typeface="Calibri"/>
               </a:rPr>
               <a:t>WHAT THE PROTOTYPE SURFACES</a:t>
             </a:r>
@@ -7599,7 +7599,7 @@
                 <a:solidFill>
                   <a:srgbClr val="09131B"/>
                 </a:solidFill>
-                <a:latin typeface="Inter"/>
+                <a:latin typeface="Calibri"/>
               </a:rPr>
               <a:t>A Bronze-tier asset is feeding a Global, strategic KPI — surfaced as a quality flag before the number is used externally.</a:t>
             </a:r>
@@ -7641,7 +7641,7 @@
                 <a:solidFill>
                   <a:srgbClr val="595959"/>
                 </a:solidFill>
-                <a:latin typeface="Inter"/>
+                <a:latin typeface="Calibri"/>
               </a:rPr>
               <a:t>Production feeds:</a:t>
             </a:r>
@@ -7731,7 +7731,7 @@
                 <a:solidFill>
                   <a:srgbClr val="595959"/>
                 </a:solidFill>
-                <a:latin typeface="Inter"/>
+                <a:latin typeface="Calibri"/>
               </a:rPr>
               <a:t>SharePoint</a:t>
             </a:r>
@@ -7821,7 +7821,7 @@
                 <a:solidFill>
                   <a:srgbClr val="595959"/>
                 </a:solidFill>
-                <a:latin typeface="Inter"/>
+                <a:latin typeface="Calibri"/>
               </a:rPr>
               <a:t>Microsoft Purview</a:t>
             </a:r>
@@ -7911,7 +7911,7 @@
                 <a:solidFill>
                   <a:srgbClr val="595959"/>
                 </a:solidFill>
-                <a:latin typeface="Inter"/>
+                <a:latin typeface="Calibri"/>
               </a:rPr>
               <a:t>Databricks</a:t>
             </a:r>
@@ -8001,7 +8001,7 @@
                 <a:solidFill>
                   <a:srgbClr val="595959"/>
                 </a:solidFill>
-                <a:latin typeface="Inter"/>
+                <a:latin typeface="Calibri"/>
               </a:rPr>
               <a:t>Model N</a:t>
             </a:r>
@@ -8087,7 +8087,7 @@
                 <a:solidFill>
                   <a:srgbClr val="A9AFB6"/>
                 </a:solidFill>
-                <a:latin typeface="Inter"/>
+                <a:latin typeface="Calibri"/>
               </a:rPr>
               <a:t>Cortex Atlas  ·  Illustrative prototype, synthetic data  ·  Confidential</a:t>
             </a:r>
@@ -8129,7 +8129,7 @@
                 <a:solidFill>
                   <a:srgbClr val="A9AFB6"/>
                 </a:solidFill>
-                <a:latin typeface="Inter"/>
+                <a:latin typeface="Calibri"/>
               </a:rPr>
               <a:t>7</a:t>
             </a:r>
@@ -8241,7 +8241,7 @@
                 <a:solidFill>
                   <a:srgbClr val="F89739"/>
                 </a:solidFill>
-                <a:latin typeface="Inter"/>
+                <a:latin typeface="Calibri"/>
               </a:rPr>
               <a:t>TOOL 3 — LINEAGE</a:t>
             </a:r>
@@ -8283,7 +8283,7 @@
                 <a:solidFill>
                   <a:srgbClr val="09131B"/>
                 </a:solidFill>
-                <a:latin typeface="Inter"/>
+                <a:latin typeface="Calibri"/>
               </a:rPr>
               <a:t>KPI Catalogue</a:t>
             </a:r>
@@ -8325,7 +8325,7 @@
                 <a:solidFill>
                   <a:srgbClr val="595959"/>
                 </a:solidFill>
-                <a:latin typeface="Inter"/>
+                <a:latin typeface="Calibri"/>
               </a:rPr>
               <a:t>The registry of metrics built on the data — each tied back to its source.</a:t>
             </a:r>
@@ -8461,7 +8461,7 @@
                 <a:solidFill>
                   <a:srgbClr val="09131B"/>
                 </a:solidFill>
-                <a:latin typeface="Inter"/>
+                <a:latin typeface="Calibri"/>
               </a:rPr>
               <a:t>1</a:t>
             </a:r>
@@ -8503,7 +8503,7 @@
                 <a:solidFill>
                   <a:srgbClr val="09131B"/>
                 </a:solidFill>
-                <a:latin typeface="Inter"/>
+                <a:latin typeface="Calibri"/>
               </a:rPr>
               <a:t>Full KPI metadata</a:t>
             </a:r>
@@ -8522,7 +8522,7 @@
                 <a:solidFill>
                   <a:srgbClr val="595959"/>
                 </a:solidFill>
-                <a:latin typeface="Inter"/>
+                <a:latin typeface="Calibri"/>
               </a:rPr>
               <a:t>Definition, methodology, market definition, cadence, deliverables and contacts — the institutional memory of every metric, in one place.</a:t>
             </a:r>
@@ -8658,7 +8658,7 @@
                 <a:solidFill>
                   <a:srgbClr val="09131B"/>
                 </a:solidFill>
-                <a:latin typeface="Inter"/>
+                <a:latin typeface="Calibri"/>
               </a:rPr>
               <a:t>2</a:t>
             </a:r>
@@ -8700,7 +8700,7 @@
                 <a:solidFill>
                   <a:srgbClr val="09131B"/>
                 </a:solidFill>
-                <a:latin typeface="Inter"/>
+                <a:latin typeface="Calibri"/>
               </a:rPr>
               <a:t>Lineage to source</a:t>
             </a:r>
@@ -8719,7 +8719,7 @@
                 <a:solidFill>
                   <a:srgbClr val="595959"/>
                 </a:solidFill>
-                <a:latin typeface="Inter"/>
+                <a:latin typeface="Calibri"/>
               </a:rPr>
               <a:t>Every KPI links to the catalogue asset (and therefore the vendor) that feeds it — so you can trace any number to its origin.</a:t>
             </a:r>
@@ -8855,7 +8855,7 @@
                 <a:solidFill>
                   <a:srgbClr val="09131B"/>
                 </a:solidFill>
-                <a:latin typeface="Inter"/>
+                <a:latin typeface="Calibri"/>
               </a:rPr>
               <a:t>3</a:t>
             </a:r>
@@ -8897,7 +8897,7 @@
                 <a:solidFill>
                   <a:srgbClr val="09131B"/>
                 </a:solidFill>
-                <a:latin typeface="Inter"/>
+                <a:latin typeface="Calibri"/>
               </a:rPr>
               <a:t>Quality risk, visible</a:t>
             </a:r>
@@ -8916,7 +8916,7 @@
                 <a:solidFill>
                   <a:srgbClr val="595959"/>
                 </a:solidFill>
-                <a:latin typeface="Inter"/>
+                <a:latin typeface="Calibri"/>
               </a:rPr>
               <a:t>When a strategic KPI rests on a low-tier asset, Atlas flags it — you learn how trustworthy a metric is, not just what it says.</a:t>
             </a:r>
@@ -8958,7 +8958,7 @@
                 <a:solidFill>
                   <a:srgbClr val="F89739"/>
                 </a:solidFill>
-                <a:latin typeface="Inter"/>
+                <a:latin typeface="Calibri"/>
               </a:rPr>
               <a:t>WHAT THE PROTOTYPE SURFACES</a:t>
             </a:r>
@@ -9000,7 +9000,7 @@
                 <a:solidFill>
                   <a:srgbClr val="09131B"/>
                 </a:solidFill>
-                <a:latin typeface="Inter"/>
+                <a:latin typeface="Calibri"/>
               </a:rPr>
               <a:t>Trace 'Diagnosed-but-Untreated Funnel' in two clicks: KPI → Bronze registry asset → vendor Quanta — with the quality caveat attached.</a:t>
             </a:r>
@@ -9042,7 +9042,7 @@
                 <a:solidFill>
                   <a:srgbClr val="595959"/>
                 </a:solidFill>
-                <a:latin typeface="Inter"/>
+                <a:latin typeface="Calibri"/>
               </a:rPr>
               <a:t>Production feeds:</a:t>
             </a:r>
@@ -9132,7 +9132,7 @@
                 <a:solidFill>
                   <a:srgbClr val="595959"/>
                 </a:solidFill>
-                <a:latin typeface="Inter"/>
+                <a:latin typeface="Calibri"/>
               </a:rPr>
               <a:t>SharePoint</a:t>
             </a:r>
@@ -9222,7 +9222,7 @@
                 <a:solidFill>
                   <a:srgbClr val="595959"/>
                 </a:solidFill>
-                <a:latin typeface="Inter"/>
+                <a:latin typeface="Calibri"/>
               </a:rPr>
               <a:t>KPI Catalogue</a:t>
             </a:r>
@@ -9312,7 +9312,7 @@
                 <a:solidFill>
                   <a:srgbClr val="595959"/>
                 </a:solidFill>
-                <a:latin typeface="Inter"/>
+                <a:latin typeface="Calibri"/>
               </a:rPr>
               <a:t>Microsoft Purview</a:t>
             </a:r>
@@ -9398,7 +9398,7 @@
                 <a:solidFill>
                   <a:srgbClr val="A9AFB6"/>
                 </a:solidFill>
-                <a:latin typeface="Inter"/>
+                <a:latin typeface="Calibri"/>
               </a:rPr>
               <a:t>Cortex Atlas  ·  Illustrative prototype, synthetic data  ·  Confidential</a:t>
             </a:r>
@@ -9440,7 +9440,7 @@
                 <a:solidFill>
                   <a:srgbClr val="A9AFB6"/>
                 </a:solidFill>
-                <a:latin typeface="Inter"/>
+                <a:latin typeface="Calibri"/>
               </a:rPr>
               <a:t>8</a:t>
             </a:r>
@@ -9552,7 +9552,7 @@
                 <a:solidFill>
                   <a:srgbClr val="F89739"/>
                 </a:solidFill>
-                <a:latin typeface="Inter"/>
+                <a:latin typeface="Calibri"/>
               </a:rPr>
               <a:t>TOOL 4 — INVENTORY</a:t>
             </a:r>
@@ -9594,7 +9594,7 @@
                 <a:solidFill>
                   <a:srgbClr val="09131B"/>
                 </a:solidFill>
-                <a:latin typeface="Inter"/>
+                <a:latin typeface="Calibri"/>
               </a:rPr>
               <a:t>Vendor Hub</a:t>
             </a:r>
@@ -9636,7 +9636,7 @@
                 <a:solidFill>
                   <a:srgbClr val="595959"/>
                 </a:solidFill>
-                <a:latin typeface="Inter"/>
+                <a:latin typeface="Calibri"/>
               </a:rPr>
               <a:t>The vendor-centric view: who they are, what they hold, and what we actually buy.</a:t>
             </a:r>
@@ -9772,7 +9772,7 @@
                 <a:solidFill>
                   <a:srgbClr val="09131B"/>
                 </a:solidFill>
-                <a:latin typeface="Inter"/>
+                <a:latin typeface="Calibri"/>
               </a:rPr>
               <a:t>1</a:t>
             </a:r>
@@ -9814,7 +9814,7 @@
                 <a:solidFill>
                   <a:srgbClr val="09131B"/>
                 </a:solidFill>
-                <a:latin typeface="Inter"/>
+                <a:latin typeface="Calibri"/>
               </a:rPr>
               <a:t>Vendor inventory</a:t>
             </a:r>
@@ -9833,7 +9833,7 @@
                 <a:solidFill>
                   <a:srgbClr val="595959"/>
                 </a:solidFill>
-                <a:latin typeface="Inter"/>
+                <a:latin typeface="Calibri"/>
               </a:rPr>
               <a:t>Each vendor as a first-class record — the data they offer, how to access it, contacts and guidance, in one place.</a:t>
             </a:r>
@@ -9969,7 +9969,7 @@
                 <a:solidFill>
                   <a:srgbClr val="09131B"/>
                 </a:solidFill>
-                <a:latin typeface="Inter"/>
+                <a:latin typeface="Calibri"/>
               </a:rPr>
               <a:t>2</a:t>
             </a:r>
@@ -10011,7 +10011,7 @@
                 <a:solidFill>
                   <a:srgbClr val="09131B"/>
                 </a:solidFill>
-                <a:latin typeface="Inter"/>
+                <a:latin typeface="Calibri"/>
               </a:rPr>
               <a:t>Purchased vs available</a:t>
             </a:r>
@@ -10030,7 +10030,7 @@
                 <a:solidFill>
                   <a:srgbClr val="595959"/>
                 </a:solidFill>
-                <a:latin typeface="Inter"/>
+                <a:latin typeface="Calibri"/>
               </a:rPr>
               <a:t>For every vendor, what we buy versus everything they offer — turning coverage into a negotiating fact.</a:t>
             </a:r>
@@ -10166,7 +10166,7 @@
                 <a:solidFill>
                   <a:srgbClr val="09131B"/>
                 </a:solidFill>
-                <a:latin typeface="Inter"/>
+                <a:latin typeface="Calibri"/>
               </a:rPr>
               <a:t>3</a:t>
             </a:r>
@@ -10208,7 +10208,7 @@
                 <a:solidFill>
                   <a:srgbClr val="09131B"/>
                 </a:solidFill>
-                <a:latin typeface="Inter"/>
+                <a:latin typeface="Calibri"/>
               </a:rPr>
               <a:t>Built to roll up</a:t>
             </a:r>
@@ -10227,7 +10227,7 @@
                 <a:solidFill>
                   <a:srgbClr val="595959"/>
                 </a:solidFill>
-                <a:latin typeface="Inter"/>
+                <a:latin typeface="Calibri"/>
               </a:rPr>
               <a:t>Assets link up to the vendor, so quality, spend and dependency aggregate cleanly — the foundation for the value layer next.</a:t>
             </a:r>
@@ -10269,7 +10269,7 @@
                 <a:solidFill>
                   <a:srgbClr val="F89739"/>
                 </a:solidFill>
-                <a:latin typeface="Inter"/>
+                <a:latin typeface="Calibri"/>
               </a:rPr>
               <a:t>WHAT THE PROTOTYPE SURFACES</a:t>
             </a:r>
@@ -10311,7 +10311,7 @@
                 <a:solidFill>
                   <a:srgbClr val="09131B"/>
                 </a:solidFill>
-                <a:latin typeface="Inter"/>
+                <a:latin typeface="Calibri"/>
               </a:rPr>
               <a:t>8 vendors supplying 12 assets — and a clear read on how much of each vendor's catalogue we've actually licensed.</a:t>
             </a:r>
@@ -10353,7 +10353,7 @@
                 <a:solidFill>
                   <a:srgbClr val="595959"/>
                 </a:solidFill>
-                <a:latin typeface="Inter"/>
+                <a:latin typeface="Calibri"/>
               </a:rPr>
               <a:t>Production feeds:</a:t>
             </a:r>
@@ -10443,7 +10443,7 @@
                 <a:solidFill>
                   <a:srgbClr val="595959"/>
                 </a:solidFill>
-                <a:latin typeface="Inter"/>
+                <a:latin typeface="Calibri"/>
               </a:rPr>
               <a:t>SharePoint</a:t>
             </a:r>
@@ -10533,7 +10533,7 @@
                 <a:solidFill>
                   <a:srgbClr val="595959"/>
                 </a:solidFill>
-                <a:latin typeface="Inter"/>
+                <a:latin typeface="Calibri"/>
               </a:rPr>
               <a:t>Vendor Hub</a:t>
             </a:r>
@@ -10623,7 +10623,7 @@
                 <a:solidFill>
                   <a:srgbClr val="595959"/>
                 </a:solidFill>
-                <a:latin typeface="Inter"/>
+                <a:latin typeface="Calibri"/>
               </a:rPr>
               <a:t>Veeva CRM</a:t>
             </a:r>
@@ -10709,7 +10709,7 @@
                 <a:solidFill>
                   <a:srgbClr val="A9AFB6"/>
                 </a:solidFill>
-                <a:latin typeface="Inter"/>
+                <a:latin typeface="Calibri"/>
               </a:rPr>
               <a:t>Cortex Atlas  ·  Illustrative prototype, synthetic data  ·  Confidential</a:t>
             </a:r>
@@ -10751,7 +10751,7 @@
                 <a:solidFill>
                   <a:srgbClr val="A9AFB6"/>
                 </a:solidFill>
-                <a:latin typeface="Inter"/>
+                <a:latin typeface="Calibri"/>
               </a:rPr>
               <a:t>9</a:t>
             </a:r>
@@ -10863,7 +10863,7 @@
                 <a:solidFill>
                   <a:srgbClr val="F89739"/>
                 </a:solidFill>
-                <a:latin typeface="Inter"/>
+                <a:latin typeface="Calibri"/>
               </a:rPr>
               <a:t>INTELLIGENCE — THE DIFFERENTIATOR</a:t>
             </a:r>
@@ -10905,7 +10905,7 @@
                 <a:solidFill>
                   <a:srgbClr val="FFFFFF"/>
                 </a:solidFill>
-                <a:latin typeface="Inter"/>
+                <a:latin typeface="Calibri"/>
               </a:rPr>
               <a:t>Vendor Hub Plus — the value layer</a:t>
             </a:r>
@@ -10947,7 +10947,7 @@
                 <a:solidFill>
                   <a:srgbClr val="A9AFB6"/>
                 </a:solidFill>
-                <a:latin typeface="Inter"/>
+                <a:latin typeface="Calibri"/>
               </a:rPr>
               <a:t>The same inventory, rolled up into the five things a vendor decision actually needs.</a:t>
             </a:r>
@@ -11083,7 +11083,7 @@
                 <a:solidFill>
                   <a:srgbClr val="09131B"/>
                 </a:solidFill>
-                <a:latin typeface="Inter"/>
+                <a:latin typeface="Calibri"/>
               </a:rPr>
               <a:t>1</a:t>
             </a:r>
@@ -11125,7 +11125,7 @@
                 <a:solidFill>
                   <a:srgbClr val="FFFFFF"/>
                 </a:solidFill>
-                <a:latin typeface="Inter"/>
+                <a:latin typeface="Calibri"/>
               </a:rPr>
               <a:t>Quality score</a:t>
             </a:r>
@@ -11144,7 +11144,7 @@
                 <a:solidFill>
                   <a:srgbClr val="C7CCD3"/>
                 </a:solidFill>
-                <a:latin typeface="Inter"/>
+                <a:latin typeface="Calibri"/>
               </a:rPr>
               <a:t>Asset-level Gold/Silver/Bronze rolled up to a composite vendor grade — who delivers quality, not just who exists.</a:t>
             </a:r>
@@ -11280,7 +11280,7 @@
                 <a:solidFill>
                   <a:srgbClr val="09131B"/>
                 </a:solidFill>
-                <a:latin typeface="Inter"/>
+                <a:latin typeface="Calibri"/>
               </a:rPr>
               <a:t>2</a:t>
             </a:r>
@@ -11322,7 +11322,7 @@
                 <a:solidFill>
                   <a:srgbClr val="FFFFFF"/>
                 </a:solidFill>
-                <a:latin typeface="Inter"/>
+                <a:latin typeface="Calibri"/>
               </a:rPr>
               <a:t>Spend concentration</a:t>
             </a:r>
@@ -11341,7 +11341,7 @@
                 <a:solidFill>
                   <a:srgbClr val="C7CCD3"/>
                 </a:solidFill>
-                <a:latin typeface="Inter"/>
+                <a:latin typeface="Calibri"/>
               </a:rPr>
               <a:t>Each vendor's share of spend, with an estate-wide HHI — single-vendor dependency made measurable.</a:t>
             </a:r>
@@ -11477,7 +11477,7 @@
                 <a:solidFill>
                   <a:srgbClr val="09131B"/>
                 </a:solidFill>
-                <a:latin typeface="Inter"/>
+                <a:latin typeface="Calibri"/>
               </a:rPr>
               <a:t>3</a:t>
             </a:r>
@@ -11519,7 +11519,7 @@
                 <a:solidFill>
                   <a:srgbClr val="FFFFFF"/>
                 </a:solidFill>
-                <a:latin typeface="Inter"/>
+                <a:latin typeface="Calibri"/>
               </a:rPr>
               <a:t>Irreplaceability</a:t>
             </a:r>
@@ -11538,7 +11538,7 @@
                 <a:solidFill>
                   <a:srgbClr val="C7CCD3"/>
                 </a:solidFill>
-                <a:latin typeface="Inter"/>
+                <a:latin typeface="Calibri"/>
               </a:rPr>
               <a:t>What breaks if a vendor walks: assets and downstream KPIs at stake versus available substitutes.</a:t>
             </a:r>
@@ -11674,7 +11674,7 @@
                 <a:solidFill>
                   <a:srgbClr val="09131B"/>
                 </a:solidFill>
-                <a:latin typeface="Inter"/>
+                <a:latin typeface="Calibri"/>
               </a:rPr>
               <a:t>4</a:t>
             </a:r>
@@ -11716,7 +11716,7 @@
                 <a:solidFill>
                   <a:srgbClr val="FFFFFF"/>
                 </a:solidFill>
-                <a:latin typeface="Inter"/>
+                <a:latin typeface="Calibri"/>
               </a:rPr>
               <a:t>Cost-per-quality</a:t>
             </a:r>
@@ -11735,7 +11735,7 @@
                 <a:solidFill>
                   <a:srgbClr val="C7CCD3"/>
                 </a:solidFill>
-                <a:latin typeface="Inter"/>
+                <a:latin typeface="Calibri"/>
               </a:rPr>
               <a:t>Spend normalised against quality — are we overpaying for low-tier data? Renegotiation candidates surface.</a:t>
             </a:r>
@@ -11871,7 +11871,7 @@
                 <a:solidFill>
                   <a:srgbClr val="09131B"/>
                 </a:solidFill>
-                <a:latin typeface="Inter"/>
+                <a:latin typeface="Calibri"/>
               </a:rPr>
               <a:t>5</a:t>
             </a:r>
@@ -11913,7 +11913,7 @@
                 <a:solidFill>
                   <a:srgbClr val="FFFFFF"/>
                 </a:solidFill>
-                <a:latin typeface="Inter"/>
+                <a:latin typeface="Calibri"/>
               </a:rPr>
               <a:t>Leverage</a:t>
             </a:r>
@@ -11932,7 +11932,7 @@
                 <a:solidFill>
                   <a:srgbClr val="C7CCD3"/>
                 </a:solidFill>
-                <a:latin typeface="Inter"/>
+                <a:latin typeface="Calibri"/>
               </a:rPr>
               <a:t>Purchased vs available becomes a negotiation lever — coverage gaps as consolidation opportunities.</a:t>
             </a:r>
@@ -11974,7 +11974,7 @@
                 <a:solidFill>
                   <a:srgbClr val="F89739"/>
                 </a:solidFill>
-                <a:latin typeface="Inter"/>
+                <a:latin typeface="Calibri"/>
               </a:rPr>
               <a:t>Prototype reads: HHI ≈ 1,825 (moderate) · top two vendors hold ~50% of spend · cost-per-quality outlier flagged for renegotiation.</a:t>
             </a:r>
@@ -11993,7 +11993,7 @@
                 <a:solidFill>
                   <a:srgbClr val="A9AFB6"/>
                 </a:solidFill>
-                <a:latin typeface="Inter"/>
+                <a:latin typeface="Calibri"/>
               </a:rPr>
               <a:t>All advisory — it informs the vendor and renewal decision; a human makes the call.</a:t>
             </a:r>
@@ -12079,7 +12079,7 @@
                 <a:solidFill>
                   <a:srgbClr val="A9AFB6"/>
                 </a:solidFill>
-                <a:latin typeface="Inter"/>
+                <a:latin typeface="Calibri"/>
               </a:rPr>
               <a:t>Cortex Atlas  ·  Illustrative prototype, synthetic data  ·  Confidential</a:t>
             </a:r>
@@ -12121,7 +12121,7 @@
                 <a:solidFill>
                   <a:srgbClr val="A9AFB6"/>
                 </a:solidFill>
-                <a:latin typeface="Inter"/>
+                <a:latin typeface="Calibri"/>
               </a:rPr>
               <a:t>10</a:t>
             </a:r>
@@ -12233,7 +12233,7 @@
                 <a:solidFill>
                   <a:srgbClr val="F89739"/>
                 </a:solidFill>
-                <a:latin typeface="Inter"/>
+                <a:latin typeface="Calibri"/>
               </a:rPr>
               <a:t>TOOL 5 — CONTINUOUS CONTROL</a:t>
             </a:r>
@@ -12275,7 +12275,7 @@
                 <a:solidFill>
                   <a:srgbClr val="09131B"/>
                 </a:solidFill>
-                <a:latin typeface="Inter"/>
+                <a:latin typeface="Calibri"/>
               </a:rPr>
               <a:t>TPA Hub</a:t>
             </a:r>
@@ -12317,7 +12317,7 @@
                 <a:solidFill>
                   <a:srgbClr val="595959"/>
                 </a:solidFill>
-                <a:latin typeface="Inter"/>
+                <a:latin typeface="Calibri"/>
               </a:rPr>
               <a:t>The agreement register — and an active reminder engine that already runs.</a:t>
             </a:r>
@@ -12453,7 +12453,7 @@
                 <a:solidFill>
                   <a:srgbClr val="09131B"/>
                 </a:solidFill>
-                <a:latin typeface="Inter"/>
+                <a:latin typeface="Calibri"/>
               </a:rPr>
               <a:t>1</a:t>
             </a:r>
@@ -12495,7 +12495,7 @@
                 <a:solidFill>
                   <a:srgbClr val="09131B"/>
                 </a:solidFill>
-                <a:latin typeface="Inter"/>
+                <a:latin typeface="Calibri"/>
               </a:rPr>
               <a:t>30/60/90 reminders</a:t>
             </a:r>
@@ -12514,7 +12514,7 @@
                 <a:solidFill>
                   <a:srgbClr val="595959"/>
                 </a:solidFill>
-                <a:latin typeface="Inter"/>
+                <a:latin typeface="Calibri"/>
               </a:rPr>
               <a:t>Every agreement is tracked to expiry; reminders fire automatically at 90, 60 and 30 days, escalating to the owner inside 30.</a:t>
             </a:r>
@@ -12650,7 +12650,7 @@
                 <a:solidFill>
                   <a:srgbClr val="09131B"/>
                 </a:solidFill>
-                <a:latin typeface="Inter"/>
+                <a:latin typeface="Calibri"/>
               </a:rPr>
               <a:t>2</a:t>
             </a:r>
@@ -12692,7 +12692,7 @@
                 <a:solidFill>
                   <a:srgbClr val="09131B"/>
                 </a:solidFill>
-                <a:latin typeface="Inter"/>
+                <a:latin typeface="Calibri"/>
               </a:rPr>
               <a:t>Runway at a glance</a:t>
             </a:r>
@@ -12711,7 +12711,7 @@
                 <a:solidFill>
                   <a:srgbClr val="595959"/>
                 </a:solidFill>
-                <a:latin typeface="Inter"/>
+                <a:latin typeface="Calibri"/>
               </a:rPr>
               <a:t>A live view of what's expiring when — moving renewals from reactive scramble to planned, leverage-preserving negotiation.</a:t>
             </a:r>
@@ -12847,7 +12847,7 @@
                 <a:solidFill>
                   <a:srgbClr val="09131B"/>
                 </a:solidFill>
-                <a:latin typeface="Inter"/>
+                <a:latin typeface="Calibri"/>
               </a:rPr>
               <a:t>3</a:t>
             </a:r>
@@ -12889,7 +12889,7 @@
                 <a:solidFill>
                   <a:srgbClr val="09131B"/>
                 </a:solidFill>
-                <a:latin typeface="Inter"/>
+                <a:latin typeface="Calibri"/>
               </a:rPr>
               <a:t>Cross-tool warning</a:t>
             </a:r>
@@ -12908,7 +12908,7 @@
                 <a:solidFill>
                   <a:srgbClr val="595959"/>
                 </a:solidFill>
-                <a:latin typeface="Inter"/>
+                <a:latin typeface="Calibri"/>
               </a:rPr>
               <a:t>Atlas connects expiry to impact: it flags when an expiring agreement sits behind a strategic KPI, and predicts renew vs retire.</a:t>
             </a:r>
@@ -12950,7 +12950,7 @@
                 <a:solidFill>
                   <a:srgbClr val="F89739"/>
                 </a:solidFill>
-                <a:latin typeface="Inter"/>
+                <a:latin typeface="Calibri"/>
               </a:rPr>
               <a:t>WHAT THE PROTOTYPE SURFACES</a:t>
             </a:r>
@@ -12992,7 +12992,7 @@
                 <a:solidFill>
                   <a:srgbClr val="09131B"/>
                 </a:solidFill>
-                <a:latin typeface="Inter"/>
+                <a:latin typeface="Calibri"/>
               </a:rPr>
               <a:t>6 agreements expire within 90 days (3 within 30) — including the sole agreement behind a Tier-1 OncoNova KPI, due in ~3 weeks.</a:t>
             </a:r>
@@ -13034,7 +13034,7 @@
                 <a:solidFill>
                   <a:srgbClr val="595959"/>
                 </a:solidFill>
-                <a:latin typeface="Inter"/>
+                <a:latin typeface="Calibri"/>
               </a:rPr>
               <a:t>Production feeds:</a:t>
             </a:r>
@@ -13124,7 +13124,7 @@
                 <a:solidFill>
                   <a:srgbClr val="595959"/>
                 </a:solidFill>
-                <a:latin typeface="Inter"/>
+                <a:latin typeface="Calibri"/>
               </a:rPr>
               <a:t>SharePoint</a:t>
             </a:r>
@@ -13214,7 +13214,7 @@
                 <a:solidFill>
                   <a:srgbClr val="595959"/>
                 </a:solidFill>
-                <a:latin typeface="Inter"/>
+                <a:latin typeface="Calibri"/>
               </a:rPr>
               <a:t>Power Automate</a:t>
             </a:r>
@@ -13304,7 +13304,7 @@
                 <a:solidFill>
                   <a:srgbClr val="595959"/>
                 </a:solidFill>
-                <a:latin typeface="Inter"/>
+                <a:latin typeface="Calibri"/>
               </a:rPr>
               <a:t>Microsoft Purview</a:t>
             </a:r>
@@ -13390,7 +13390,7 @@
                 <a:solidFill>
                   <a:srgbClr val="A9AFB6"/>
                 </a:solidFill>
-                <a:latin typeface="Inter"/>
+                <a:latin typeface="Calibri"/>
               </a:rPr>
               <a:t>Cortex Atlas  ·  Illustrative prototype, synthetic data  ·  Confidential</a:t>
             </a:r>
@@ -13432,7 +13432,7 @@
                 <a:solidFill>
                   <a:srgbClr val="A9AFB6"/>
                 </a:solidFill>
-                <a:latin typeface="Inter"/>
+                <a:latin typeface="Calibri"/>
               </a:rPr>
               <a:t>11</a:t>
             </a:r>
@@ -13544,7 +13544,7 @@
                 <a:solidFill>
                   <a:srgbClr val="F89739"/>
                 </a:solidFill>
-                <a:latin typeface="Inter"/>
+                <a:latin typeface="Calibri"/>
               </a:rPr>
               <a:t>THE DECISION LAYER</a:t>
             </a:r>
@@ -13586,7 +13586,7 @@
                 <a:solidFill>
                   <a:srgbClr val="09131B"/>
                 </a:solidFill>
-                <a:latin typeface="Inter"/>
+                <a:latin typeface="Calibri"/>
               </a:rPr>
               <a:t>Cross-tool intelligence and a natural-language ask</a:t>
             </a:r>
@@ -13676,7 +13676,7 @@
                 <a:solidFill>
                   <a:srgbClr val="09131B"/>
                 </a:solidFill>
-                <a:latin typeface="Inter"/>
+                <a:latin typeface="Calibri"/>
               </a:rPr>
               <a:t>Cross-tool signals — ranked by what's at stake</a:t>
             </a:r>
@@ -13764,7 +13764,7 @@
                 <a:solidFill>
                   <a:srgbClr val="09131B"/>
                 </a:solidFill>
-                <a:latin typeface="Inter"/>
+                <a:latin typeface="Calibri"/>
               </a:rPr>
               <a:t>Agreement at risk feeds a Tier-1 KPI</a:t>
             </a:r>
@@ -13783,7 +13783,7 @@
                 <a:solidFill>
                   <a:srgbClr val="595959"/>
                 </a:solidFill>
-                <a:latin typeface="Inter"/>
+                <a:latin typeface="Calibri"/>
               </a:rPr>
               <a:t>Helix TPA expires in ~21 days — sole source behind New-to-Brand Rx Share.</a:t>
             </a:r>
@@ -13871,7 +13871,7 @@
                 <a:solidFill>
                   <a:srgbClr val="09131B"/>
                 </a:solidFill>
-                <a:latin typeface="Inter"/>
+                <a:latin typeface="Calibri"/>
               </a:rPr>
               <a:t>Duplicate-buy risk at intake</a:t>
             </a:r>
@@ -13890,7 +13890,7 @@
                 <a:solidFill>
                   <a:srgbClr val="595959"/>
                 </a:solidFill>
-                <a:latin typeface="Inter"/>
+                <a:latin typeface="Calibri"/>
               </a:rPr>
               <a:t>DP-2042 overlaps a catalogued Oncology EMR asset — ~$640K avoidable.</a:t>
             </a:r>
@@ -13978,7 +13978,7 @@
                 <a:solidFill>
                   <a:srgbClr val="09131B"/>
                 </a:solidFill>
-                <a:latin typeface="Inter"/>
+                <a:latin typeface="Calibri"/>
               </a:rPr>
               <a:t>Low-quality asset feeds a strategic KPI</a:t>
             </a:r>
@@ -13997,7 +13997,7 @@
                 <a:solidFill>
                   <a:srgbClr val="595959"/>
                 </a:solidFill>
-                <a:latin typeface="Inter"/>
+                <a:latin typeface="Calibri"/>
               </a:rPr>
               <a:t>Bronze registry data behind the Diagnosed-but-Untreated Funnel.</a:t>
             </a:r>
@@ -14085,7 +14085,7 @@
                 <a:solidFill>
                   <a:srgbClr val="09131B"/>
                 </a:solidFill>
-                <a:latin typeface="Inter"/>
+                <a:latin typeface="Calibri"/>
               </a:rPr>
               <a:t>Vendor concentration</a:t>
             </a:r>
@@ -14104,7 +14104,7 @@
                 <a:solidFill>
                   <a:srgbClr val="595959"/>
                 </a:solidFill>
-                <a:latin typeface="Inter"/>
+                <a:latin typeface="Calibri"/>
               </a:rPr>
               <a:t>Top two vendors hold ~50% of spend; estate HHI ≈ 1,825.</a:t>
             </a:r>
@@ -14192,7 +14192,7 @@
                 <a:solidFill>
                   <a:srgbClr val="F89739"/>
                 </a:solidFill>
-                <a:latin typeface="Inter"/>
+                <a:latin typeface="Calibri"/>
               </a:rPr>
               <a:t>ASK ATLAS</a:t>
             </a:r>
@@ -14282,7 +14282,7 @@
                 <a:solidFill>
                   <a:srgbClr val="C7CCD3"/>
                 </a:solidFill>
-                <a:latin typeface="Inter"/>
+                <a:latin typeface="Calibri"/>
               </a:rPr>
               <a:t>Which agreements expire soon and feed a Tier-1 KPI?</a:t>
             </a:r>
@@ -14324,7 +14324,7 @@
                 <a:solidFill>
                   <a:srgbClr val="E8EAEE"/>
                 </a:solidFill>
-                <a:latin typeface="Inter"/>
+                <a:latin typeface="Calibri"/>
               </a:rPr>
               <a:t>Atlas answers across all five tools — grounded in the catalogue, KPI lineage, vendor spend and agreement dates — and links you straight to the record.</a:t>
             </a:r>
@@ -14343,7 +14343,7 @@
                 <a:solidFill>
                   <a:srgbClr val="A9AFB6"/>
                 </a:solidFill>
-                <a:latin typeface="Inter"/>
+                <a:latin typeface="Calibri"/>
               </a:rPr>
               <a:t>Every answer carries a confidence read and an advisory cue:</a:t>
             </a:r>
@@ -14362,7 +14362,7 @@
                 <a:solidFill>
                   <a:srgbClr val="7FD1A8"/>
                 </a:solidFill>
-                <a:latin typeface="Inter"/>
+                <a:latin typeface="Calibri"/>
               </a:rPr>
               <a:t>"Confidence: High · grounded in source rows · Advisory only — a human approves any action."</a:t>
             </a:r>
@@ -14448,7 +14448,7 @@
                 <a:solidFill>
                   <a:srgbClr val="A9AFB6"/>
                 </a:solidFill>
-                <a:latin typeface="Inter"/>
+                <a:latin typeface="Calibri"/>
               </a:rPr>
               <a:t>Cortex Atlas  ·  Illustrative prototype, synthetic data  ·  Confidential</a:t>
             </a:r>
@@ -14490,7 +14490,7 @@
                 <a:solidFill>
                   <a:srgbClr val="A9AFB6"/>
                 </a:solidFill>
-                <a:latin typeface="Inter"/>
+                <a:latin typeface="Calibri"/>
               </a:rPr>
               <a:t>12</a:t>
             </a:r>
@@ -14602,7 +14602,7 @@
                 <a:solidFill>
                   <a:srgbClr val="F89739"/>
                 </a:solidFill>
-                <a:latin typeface="Inter"/>
+                <a:latin typeface="Calibri"/>
               </a:rPr>
               <a:t>VALUE &amp; DELIVERY</a:t>
             </a:r>
@@ -14644,7 +14644,7 @@
                 <a:solidFill>
                   <a:srgbClr val="FFFFFF"/>
                 </a:solidFill>
-                <a:latin typeface="Inter"/>
+                <a:latin typeface="Calibri"/>
               </a:rPr>
               <a:t>From report to decision layer</a:t>
             </a:r>
@@ -14686,7 +14686,7 @@
                 <a:solidFill>
                   <a:srgbClr val="A9AFB6"/>
                 </a:solidFill>
-                <a:latin typeface="Inter"/>
+                <a:latin typeface="Calibri"/>
               </a:rPr>
               <a:t>What the business gets — and how we build it.</a:t>
             </a:r>
@@ -14728,7 +14728,7 @@
                 <a:solidFill>
                   <a:srgbClr val="3A4A54"/>
                 </a:solidFill>
-                <a:latin typeface="Inter"/>
+                <a:latin typeface="Calibri"/>
               </a:rPr>
               <a:t>04 / 06</a:t>
             </a:r>
@@ -14840,7 +14840,7 @@
                 <a:solidFill>
                   <a:srgbClr val="F89739"/>
                 </a:solidFill>
-                <a:latin typeface="Inter"/>
+                <a:latin typeface="Calibri"/>
               </a:rPr>
               <a:t>BUSINESS VALUE</a:t>
             </a:r>
@@ -14882,7 +14882,7 @@
                 <a:solidFill>
                   <a:srgbClr val="09131B"/>
                 </a:solidFill>
-                <a:latin typeface="Inter"/>
+                <a:latin typeface="Calibri"/>
               </a:rPr>
               <a:t>Five outcomes leadership can point to</a:t>
             </a:r>
@@ -15018,7 +15018,7 @@
                 <a:solidFill>
                   <a:srgbClr val="FFFFFF"/>
                 </a:solidFill>
-                <a:latin typeface="Inter"/>
+                <a:latin typeface="Calibri"/>
               </a:rPr>
               <a:t>1</a:t>
             </a:r>
@@ -15060,7 +15060,7 @@
                 <a:solidFill>
                   <a:srgbClr val="09131B"/>
                 </a:solidFill>
-                <a:latin typeface="Inter"/>
+                <a:latin typeface="Calibri"/>
               </a:rPr>
               <a:t>Stop duplicate spend</a:t>
             </a:r>
@@ -15079,7 +15079,7 @@
                 <a:solidFill>
                   <a:srgbClr val="595959"/>
                 </a:solidFill>
-                <a:latin typeface="Inter"/>
+                <a:latin typeface="Calibri"/>
               </a:rPr>
               <a:t>Overlap is caught at the point of request, before commitment — direct, recurring savings.</a:t>
             </a:r>
@@ -15121,7 +15121,7 @@
                 <a:solidFill>
                   <a:srgbClr val="1E7F4F"/>
                 </a:solidFill>
-                <a:latin typeface="Inter"/>
+                <a:latin typeface="Calibri"/>
               </a:rPr>
               <a:t>PROCUREMENT</a:t>
             </a:r>
@@ -15257,7 +15257,7 @@
                 <a:solidFill>
                   <a:srgbClr val="FFFFFF"/>
                 </a:solidFill>
-                <a:latin typeface="Inter"/>
+                <a:latin typeface="Calibri"/>
               </a:rPr>
               <a:t>2</a:t>
             </a:r>
@@ -15299,7 +15299,7 @@
                 <a:solidFill>
                   <a:srgbClr val="09131B"/>
                 </a:solidFill>
-                <a:latin typeface="Inter"/>
+                <a:latin typeface="Calibri"/>
               </a:rPr>
               <a:t>Never miss a renewal</a:t>
             </a:r>
@@ -15318,7 +15318,7 @@
                 <a:solidFill>
                   <a:srgbClr val="595959"/>
                 </a:solidFill>
-                <a:latin typeface="Inter"/>
+                <a:latin typeface="Calibri"/>
               </a:rPr>
               <a:t>Automated 30/60/90 reminders plus impact-aware warnings end lapses and rushed, low-leverage renewals.</a:t>
             </a:r>
@@ -15360,7 +15360,7 @@
                 <a:solidFill>
                   <a:srgbClr val="1E7F4F"/>
                 </a:solidFill>
-                <a:latin typeface="Inter"/>
+                <a:latin typeface="Calibri"/>
               </a:rPr>
               <a:t>LEGAL / CONTINUITY</a:t>
             </a:r>
@@ -15496,7 +15496,7 @@
                 <a:solidFill>
                   <a:srgbClr val="FFFFFF"/>
                 </a:solidFill>
-                <a:latin typeface="Inter"/>
+                <a:latin typeface="Calibri"/>
               </a:rPr>
               <a:t>3</a:t>
             </a:r>
@@ -15538,7 +15538,7 @@
                 <a:solidFill>
                   <a:srgbClr val="09131B"/>
                 </a:solidFill>
-                <a:latin typeface="Inter"/>
+                <a:latin typeface="Calibri"/>
               </a:rPr>
               <a:t>Negotiate from strength</a:t>
             </a:r>
@@ -15557,7 +15557,7 @@
                 <a:solidFill>
                   <a:srgbClr val="595959"/>
                 </a:solidFill>
-                <a:latin typeface="Inter"/>
+                <a:latin typeface="Calibri"/>
               </a:rPr>
               <a:t>Vendor value, concentration and coverage analytics turn renewals into informed negotiations.</a:t>
             </a:r>
@@ -15599,7 +15599,7 @@
                 <a:solidFill>
                   <a:srgbClr val="1E7F4F"/>
                 </a:solidFill>
-                <a:latin typeface="Inter"/>
+                <a:latin typeface="Calibri"/>
               </a:rPr>
               <a:t>PROCUREMENT / CI</a:t>
             </a:r>
@@ -15735,7 +15735,7 @@
                 <a:solidFill>
                   <a:srgbClr val="FFFFFF"/>
                 </a:solidFill>
-                <a:latin typeface="Inter"/>
+                <a:latin typeface="Calibri"/>
               </a:rPr>
               <a:t>4</a:t>
             </a:r>
@@ -15777,7 +15777,7 @@
                 <a:solidFill>
                   <a:srgbClr val="09131B"/>
                 </a:solidFill>
-                <a:latin typeface="Inter"/>
+                <a:latin typeface="Calibri"/>
               </a:rPr>
               <a:t>Audit-ready by default</a:t>
             </a:r>
@@ -15796,7 +15796,7 @@
                 <a:solidFill>
                   <a:srgbClr val="595959"/>
                 </a:solidFill>
-                <a:latin typeface="Inter"/>
+                <a:latin typeface="Calibri"/>
               </a:rPr>
               <a:t>Automatic PII/PHI classification and full lineage make governance the default, not a project.</a:t>
             </a:r>
@@ -15838,7 +15838,7 @@
                 <a:solidFill>
                   <a:srgbClr val="1E7F4F"/>
                 </a:solidFill>
-                <a:latin typeface="Inter"/>
+                <a:latin typeface="Calibri"/>
               </a:rPr>
               <a:t>COMPLIANCE</a:t>
             </a:r>
@@ -15974,7 +15974,7 @@
                 <a:solidFill>
                   <a:srgbClr val="FFFFFF"/>
                 </a:solidFill>
-                <a:latin typeface="Inter"/>
+                <a:latin typeface="Calibri"/>
               </a:rPr>
               <a:t>5</a:t>
             </a:r>
@@ -16016,7 +16016,7 @@
                 <a:solidFill>
                   <a:srgbClr val="09131B"/>
                 </a:solidFill>
-                <a:latin typeface="Inter"/>
+                <a:latin typeface="Calibri"/>
               </a:rPr>
               <a:t>Faster, confident decisions</a:t>
             </a:r>
@@ -16035,7 +16035,7 @@
                 <a:solidFill>
                   <a:srgbClr val="595959"/>
                 </a:solidFill>
-                <a:latin typeface="Inter"/>
+                <a:latin typeface="Calibri"/>
               </a:rPr>
               <a:t>One source of truth and a natural-language ask cut manual lookups and let teams trust the number.</a:t>
             </a:r>
@@ -16077,7 +16077,7 @@
                 <a:solidFill>
                   <a:srgbClr val="1E7F4F"/>
                 </a:solidFill>
-                <a:latin typeface="Inter"/>
+                <a:latin typeface="Calibri"/>
               </a:rPr>
               <a:t>COMMERCIAL INSIGHTS</a:t>
             </a:r>
@@ -16163,7 +16163,7 @@
                 <a:solidFill>
                   <a:srgbClr val="A9AFB6"/>
                 </a:solidFill>
-                <a:latin typeface="Inter"/>
+                <a:latin typeface="Calibri"/>
               </a:rPr>
               <a:t>Cortex Atlas  ·  Illustrative prototype, synthetic data  ·  Confidential</a:t>
             </a:r>
@@ -16205,7 +16205,7 @@
                 <a:solidFill>
                   <a:srgbClr val="A9AFB6"/>
                 </a:solidFill>
-                <a:latin typeface="Inter"/>
+                <a:latin typeface="Calibri"/>
               </a:rPr>
               <a:t>13</a:t>
             </a:r>
@@ -16317,7 +16317,7 @@
                 <a:solidFill>
                   <a:srgbClr val="F89739"/>
                 </a:solidFill>
-                <a:latin typeface="Inter"/>
+                <a:latin typeface="Calibri"/>
               </a:rPr>
               <a:t>DESIGN &amp; ARCHITECTURE</a:t>
             </a:r>
@@ -16359,7 +16359,7 @@
                 <a:solidFill>
                   <a:srgbClr val="09131B"/>
                 </a:solidFill>
-                <a:latin typeface="Inter"/>
+                <a:latin typeface="Calibri"/>
               </a:rPr>
               <a:t>Built to drop into your Microsoft estate — and the Cortex suite</a:t>
             </a:r>
@@ -16449,7 +16449,7 @@
                 <a:solidFill>
                   <a:srgbClr val="09131B"/>
                 </a:solidFill>
-                <a:latin typeface="Inter"/>
+                <a:latin typeface="Calibri"/>
               </a:rPr>
               <a:t>The prototype you're seeing</a:t>
             </a:r>
@@ -16458,7 +16458,7 @@
                 <a:solidFill>
                   <a:srgbClr val="F89739"/>
                 </a:solidFill>
-                <a:latin typeface="Inter"/>
+                <a:latin typeface="Calibri"/>
               </a:rPr>
               <a:t>—  </a:t>
             </a:r>
@@ -16467,7 +16467,7 @@
                 <a:solidFill>
                   <a:srgbClr val="09131B"/>
                 </a:solidFill>
-                <a:latin typeface="Inter"/>
+                <a:latin typeface="Calibri"/>
               </a:rPr>
               <a:t>One self-contained file.</a:t>
             </a:r>
@@ -16476,7 +16476,7 @@
                 <a:solidFill>
                   <a:srgbClr val="595959"/>
                 </a:solidFill>
-                <a:latin typeface="Inter"/>
+                <a:latin typeface="Calibri"/>
               </a:rPr>
               <a:t> Runs in any browser, fully offline — no install to evaluate it.</a:t>
             </a:r>
@@ -16495,7 +16495,7 @@
                 <a:solidFill>
                   <a:srgbClr val="F89739"/>
                 </a:solidFill>
-                <a:latin typeface="Inter"/>
+                <a:latin typeface="Calibri"/>
               </a:rPr>
               <a:t>—  </a:t>
             </a:r>
@@ -16504,7 +16504,7 @@
                 <a:solidFill>
                   <a:srgbClr val="09131B"/>
                 </a:solidFill>
-                <a:latin typeface="Inter"/>
+                <a:latin typeface="Calibri"/>
               </a:rPr>
               <a:t>Cortex design system.</a:t>
             </a:r>
@@ -16513,7 +16513,7 @@
                 <a:solidFill>
                   <a:srgbClr val="595959"/>
                 </a:solidFill>
-                <a:latin typeface="Inter"/>
+                <a:latin typeface="Calibri"/>
               </a:rPr>
               <a:t> Same look and behaviour as Compass, Vantage and Meridian.</a:t>
             </a:r>
@@ -16532,7 +16532,7 @@
                 <a:solidFill>
                   <a:srgbClr val="F89739"/>
                 </a:solidFill>
-                <a:latin typeface="Inter"/>
+                <a:latin typeface="Calibri"/>
               </a:rPr>
               <a:t>—  </a:t>
             </a:r>
@@ -16541,7 +16541,7 @@
                 <a:solidFill>
                   <a:srgbClr val="09131B"/>
                 </a:solidFill>
-                <a:latin typeface="Inter"/>
+                <a:latin typeface="Calibri"/>
               </a:rPr>
               <a:t>Lift-and-shift ready.</a:t>
             </a:r>
@@ -16550,7 +16550,7 @@
                 <a:solidFill>
                   <a:srgbClr val="595959"/>
                 </a:solidFill>
-                <a:latin typeface="Inter"/>
+                <a:latin typeface="Calibri"/>
               </a:rPr>
               <a:t> Drops into the cortex-commercial-suite with near-zero rework.</a:t>
             </a:r>
@@ -16569,7 +16569,7 @@
                 <a:solidFill>
                   <a:srgbClr val="F89739"/>
                 </a:solidFill>
-                <a:latin typeface="Inter"/>
+                <a:latin typeface="Calibri"/>
               </a:rPr>
               <a:t>—  </a:t>
             </a:r>
@@ -16578,7 +16578,7 @@
                 <a:solidFill>
                   <a:srgbClr val="09131B"/>
                 </a:solidFill>
-                <a:latin typeface="Inter"/>
+                <a:latin typeface="Calibri"/>
               </a:rPr>
               <a:t>Synthetic data only.</a:t>
             </a:r>
@@ -16587,7 +16587,7 @@
                 <a:solidFill>
                   <a:srgbClr val="595959"/>
                 </a:solidFill>
-                <a:latin typeface="Inter"/>
+                <a:latin typeface="Calibri"/>
               </a:rPr>
               <a:t> No real client or patient data anywhere in the prototype.</a:t>
             </a:r>
@@ -16677,7 +16677,7 @@
                 <a:solidFill>
                   <a:srgbClr val="09131B"/>
                 </a:solidFill>
-                <a:latin typeface="Inter"/>
+                <a:latin typeface="Calibri"/>
               </a:rPr>
               <a:t>Target production stack — Microsoft-native</a:t>
             </a:r>
@@ -16765,7 +16765,7 @@
                 <a:solidFill>
                   <a:srgbClr val="09131B"/>
                 </a:solidFill>
-                <a:latin typeface="Inter"/>
+                <a:latin typeface="Calibri"/>
               </a:rPr>
               <a:t>SharePoint</a:t>
             </a:r>
@@ -16784,7 +16784,7 @@
                 <a:solidFill>
                   <a:srgbClr val="595959"/>
                 </a:solidFill>
-                <a:latin typeface="Inter"/>
+                <a:latin typeface="Calibri"/>
               </a:rPr>
               <a:t>Storage &amp; lists — the records system</a:t>
             </a:r>
@@ -16872,7 +16872,7 @@
                 <a:solidFill>
                   <a:srgbClr val="09131B"/>
                 </a:solidFill>
-                <a:latin typeface="Inter"/>
+                <a:latin typeface="Calibri"/>
               </a:rPr>
               <a:t>Power Automate</a:t>
             </a:r>
@@ -16891,7 +16891,7 @@
                 <a:solidFill>
                   <a:srgbClr val="595959"/>
                 </a:solidFill>
-                <a:latin typeface="Inter"/>
+                <a:latin typeface="Calibri"/>
               </a:rPr>
               <a:t>Workflow &amp; the 30/60/90 reminders</a:t>
             </a:r>
@@ -16979,7 +16979,7 @@
                 <a:solidFill>
                   <a:srgbClr val="09131B"/>
                 </a:solidFill>
-                <a:latin typeface="Inter"/>
+                <a:latin typeface="Calibri"/>
               </a:rPr>
               <a:t>Microsoft Purview</a:t>
             </a:r>
@@ -16998,7 +16998,7 @@
                 <a:solidFill>
                   <a:srgbClr val="595959"/>
                 </a:solidFill>
-                <a:latin typeface="Inter"/>
+                <a:latin typeface="Calibri"/>
               </a:rPr>
               <a:t>Catalogue, classification &amp; lineage</a:t>
             </a:r>
@@ -17086,7 +17086,7 @@
                 <a:solidFill>
                   <a:srgbClr val="09131B"/>
                 </a:solidFill>
-                <a:latin typeface="Inter"/>
+                <a:latin typeface="Calibri"/>
               </a:rPr>
               <a:t>Azure OpenAI</a:t>
             </a:r>
@@ -17105,7 +17105,7 @@
                 <a:solidFill>
                   <a:srgbClr val="595959"/>
                 </a:solidFill>
-                <a:latin typeface="Inter"/>
+                <a:latin typeface="Calibri"/>
               </a:rPr>
               <a:t>The intelligence &amp; Ask Atlas layer</a:t>
             </a:r>
@@ -17193,7 +17193,7 @@
                 <a:solidFill>
                   <a:srgbClr val="09131B"/>
                 </a:solidFill>
-                <a:latin typeface="Inter"/>
+                <a:latin typeface="Calibri"/>
               </a:rPr>
               <a:t>Databricks / Model N / SAP</a:t>
             </a:r>
@@ -17212,7 +17212,7 @@
                 <a:solidFill>
                   <a:srgbClr val="595959"/>
                 </a:solidFill>
-                <a:latin typeface="Inter"/>
+                <a:latin typeface="Calibri"/>
               </a:rPr>
               <a:t>Data, spend and contract feeds</a:t>
             </a:r>
@@ -17298,7 +17298,7 @@
                 <a:solidFill>
                   <a:srgbClr val="A9AFB6"/>
                 </a:solidFill>
-                <a:latin typeface="Inter"/>
+                <a:latin typeface="Calibri"/>
               </a:rPr>
               <a:t>Cortex Atlas  ·  Illustrative prototype, synthetic data  ·  Confidential</a:t>
             </a:r>
@@ -17340,7 +17340,7 @@
                 <a:solidFill>
                   <a:srgbClr val="A9AFB6"/>
                 </a:solidFill>
-                <a:latin typeface="Inter"/>
+                <a:latin typeface="Calibri"/>
               </a:rPr>
               <a:t>14</a:t>
             </a:r>
@@ -17452,7 +17452,7 @@
                 <a:solidFill>
                   <a:srgbClr val="F89739"/>
                 </a:solidFill>
-                <a:latin typeface="Inter"/>
+                <a:latin typeface="Calibri"/>
               </a:rPr>
               <a:t>AGENDA</a:t>
             </a:r>
@@ -17494,7 +17494,7 @@
                 <a:solidFill>
                   <a:srgbClr val="09131B"/>
                 </a:solidFill>
-                <a:latin typeface="Inter"/>
+                <a:latin typeface="Calibri"/>
               </a:rPr>
               <a:t>What we'll cover today</a:t>
             </a:r>
@@ -17630,7 +17630,7 @@
                 <a:solidFill>
                   <a:srgbClr val="09131B"/>
                 </a:solidFill>
-                <a:latin typeface="Inter"/>
+                <a:latin typeface="Calibri"/>
               </a:rPr>
               <a:t>01</a:t>
             </a:r>
@@ -17672,7 +17672,7 @@
                 <a:solidFill>
                   <a:srgbClr val="09131B"/>
                 </a:solidFill>
-                <a:latin typeface="Inter"/>
+                <a:latin typeface="Calibri"/>
               </a:rPr>
               <a:t>The challenge</a:t>
             </a:r>
@@ -17691,7 +17691,7 @@
                 <a:solidFill>
                   <a:srgbClr val="595959"/>
                 </a:solidFill>
-                <a:latin typeface="Inter"/>
+                <a:latin typeface="Calibri"/>
               </a:rPr>
               <a:t>Five tools, five silos — and what that costs</a:t>
             </a:r>
@@ -17827,7 +17827,7 @@
                 <a:solidFill>
                   <a:srgbClr val="09131B"/>
                 </a:solidFill>
-                <a:latin typeface="Inter"/>
+                <a:latin typeface="Calibri"/>
               </a:rPr>
               <a:t>02</a:t>
             </a:r>
@@ -17869,7 +17869,7 @@
                 <a:solidFill>
                   <a:srgbClr val="09131B"/>
                 </a:solidFill>
-                <a:latin typeface="Inter"/>
+                <a:latin typeface="Calibri"/>
               </a:rPr>
               <a:t>The solution</a:t>
             </a:r>
@@ -17888,7 +17888,7 @@
                 <a:solidFill>
                   <a:srgbClr val="595959"/>
                 </a:solidFill>
-                <a:latin typeface="Inter"/>
+                <a:latin typeface="Calibri"/>
               </a:rPr>
               <a:t>Cortex Atlas: one connected estate</a:t>
             </a:r>
@@ -18024,7 +18024,7 @@
                 <a:solidFill>
                   <a:srgbClr val="09131B"/>
                 </a:solidFill>
-                <a:latin typeface="Inter"/>
+                <a:latin typeface="Calibri"/>
               </a:rPr>
               <a:t>03</a:t>
             </a:r>
@@ -18066,7 +18066,7 @@
                 <a:solidFill>
                   <a:srgbClr val="09131B"/>
                 </a:solidFill>
-                <a:latin typeface="Inter"/>
+                <a:latin typeface="Calibri"/>
               </a:rPr>
               <a:t>Inside the platform</a:t>
             </a:r>
@@ -18085,7 +18085,7 @@
                 <a:solidFill>
                   <a:srgbClr val="595959"/>
                 </a:solidFill>
-                <a:latin typeface="Inter"/>
+                <a:latin typeface="Calibri"/>
               </a:rPr>
               <a:t>A guided walk through all five tools</a:t>
             </a:r>
@@ -18221,7 +18221,7 @@
                 <a:solidFill>
                   <a:srgbClr val="09131B"/>
                 </a:solidFill>
-                <a:latin typeface="Inter"/>
+                <a:latin typeface="Calibri"/>
               </a:rPr>
               <a:t>04</a:t>
             </a:r>
@@ -18263,7 +18263,7 @@
                 <a:solidFill>
                   <a:srgbClr val="09131B"/>
                 </a:solidFill>
-                <a:latin typeface="Inter"/>
+                <a:latin typeface="Calibri"/>
               </a:rPr>
               <a:t>The decision layer</a:t>
             </a:r>
@@ -18282,7 +18282,7 @@
                 <a:solidFill>
                   <a:srgbClr val="595959"/>
                 </a:solidFill>
-                <a:latin typeface="Inter"/>
+                <a:latin typeface="Calibri"/>
               </a:rPr>
               <a:t>Automation and intelligence built in</a:t>
             </a:r>
@@ -18418,7 +18418,7 @@
                 <a:solidFill>
                   <a:srgbClr val="09131B"/>
                 </a:solidFill>
-                <a:latin typeface="Inter"/>
+                <a:latin typeface="Calibri"/>
               </a:rPr>
               <a:t>05</a:t>
             </a:r>
@@ -18460,7 +18460,7 @@
                 <a:solidFill>
                   <a:srgbClr val="09131B"/>
                 </a:solidFill>
-                <a:latin typeface="Inter"/>
+                <a:latin typeface="Calibri"/>
               </a:rPr>
               <a:t>Value &amp; outcomes</a:t>
             </a:r>
@@ -18479,7 +18479,7 @@
                 <a:solidFill>
                   <a:srgbClr val="595959"/>
                 </a:solidFill>
-                <a:latin typeface="Inter"/>
+                <a:latin typeface="Calibri"/>
               </a:rPr>
               <a:t>What the business gets</a:t>
             </a:r>
@@ -18615,7 +18615,7 @@
                 <a:solidFill>
                   <a:srgbClr val="09131B"/>
                 </a:solidFill>
-                <a:latin typeface="Inter"/>
+                <a:latin typeface="Calibri"/>
               </a:rPr>
               <a:t>06</a:t>
             </a:r>
@@ -18657,7 +18657,7 @@
                 <a:solidFill>
                   <a:srgbClr val="09131B"/>
                 </a:solidFill>
-                <a:latin typeface="Inter"/>
+                <a:latin typeface="Calibri"/>
               </a:rPr>
               <a:t>Delivery &amp; next steps</a:t>
             </a:r>
@@ -18676,7 +18676,7 @@
                 <a:solidFill>
                   <a:srgbClr val="595959"/>
                 </a:solidFill>
-                <a:latin typeface="Inter"/>
+                <a:latin typeface="Calibri"/>
               </a:rPr>
               <a:t>Architecture, roadmap, and how we start</a:t>
             </a:r>
@@ -18762,7 +18762,7 @@
                 <a:solidFill>
                   <a:srgbClr val="A9AFB6"/>
                 </a:solidFill>
-                <a:latin typeface="Inter"/>
+                <a:latin typeface="Calibri"/>
               </a:rPr>
               <a:t>Cortex Atlas  ·  Illustrative prototype, synthetic data  ·  Confidential</a:t>
             </a:r>
@@ -18804,7 +18804,7 @@
                 <a:solidFill>
                   <a:srgbClr val="A9AFB6"/>
                 </a:solidFill>
-                <a:latin typeface="Inter"/>
+                <a:latin typeface="Calibri"/>
               </a:rPr>
               <a:t>1</a:t>
             </a:r>
@@ -18916,7 +18916,7 @@
                 <a:solidFill>
                   <a:srgbClr val="F89739"/>
                 </a:solidFill>
-                <a:latin typeface="Inter"/>
+                <a:latin typeface="Calibri"/>
               </a:rPr>
               <a:t>DELIVERY ROADMAP</a:t>
             </a:r>
@@ -18958,7 +18958,7 @@
                 <a:solidFill>
                   <a:srgbClr val="09131B"/>
                 </a:solidFill>
-                <a:latin typeface="Inter"/>
+                <a:latin typeface="Calibri"/>
               </a:rPr>
               <a:t>A phased rollout — value at every step</a:t>
             </a:r>
@@ -19094,7 +19094,7 @@
                 <a:solidFill>
                   <a:srgbClr val="0563C1"/>
                 </a:solidFill>
-                <a:latin typeface="Inter"/>
+                <a:latin typeface="Calibri"/>
               </a:rPr>
               <a:t>PHASE 1</a:t>
             </a:r>
@@ -19113,7 +19113,7 @@
                 <a:solidFill>
                   <a:srgbClr val="09131B"/>
                 </a:solidFill>
-                <a:latin typeface="Inter"/>
+                <a:latin typeface="Calibri"/>
               </a:rPr>
               <a:t>Foundation</a:t>
             </a:r>
@@ -19132,7 +19132,7 @@
                 <a:solidFill>
                   <a:srgbClr val="595959"/>
                 </a:solidFill>
-                <a:latin typeface="Inter"/>
+                <a:latin typeface="Calibri"/>
               </a:rPr>
               <a:t>Migrate the five tools, the data model and the cross-links onto SharePoint. The as-is estate, connected and trustworthy.</a:t>
             </a:r>
@@ -19174,7 +19174,7 @@
                 <a:solidFill>
                   <a:srgbClr val="A9AFB6"/>
                 </a:solidFill>
-                <a:latin typeface="Inter"/>
+                <a:latin typeface="Calibri"/>
               </a:rPr>
               <a:t>→</a:t>
             </a:r>
@@ -19310,7 +19310,7 @@
                 <a:solidFill>
                   <a:srgbClr val="9A5C12"/>
                 </a:solidFill>
-                <a:latin typeface="Inter"/>
+                <a:latin typeface="Calibri"/>
               </a:rPr>
               <a:t>PHASE 2</a:t>
             </a:r>
@@ -19329,7 +19329,7 @@
                 <a:solidFill>
                   <a:srgbClr val="09131B"/>
                 </a:solidFill>
-                <a:latin typeface="Inter"/>
+                <a:latin typeface="Calibri"/>
               </a:rPr>
               <a:t>Automation</a:t>
             </a:r>
@@ -19348,7 +19348,7 @@
                 <a:solidFill>
                   <a:srgbClr val="595959"/>
                 </a:solidFill>
-                <a:latin typeface="Inter"/>
+                <a:latin typeface="Calibri"/>
               </a:rPr>
               <a:t>Power Automate reminders, approved-request → catalogue sync, renewal pre-fill, Purview PII/PHI classification, duplicate detection.</a:t>
             </a:r>
@@ -19390,7 +19390,7 @@
                 <a:solidFill>
                   <a:srgbClr val="A9AFB6"/>
                 </a:solidFill>
-                <a:latin typeface="Inter"/>
+                <a:latin typeface="Calibri"/>
               </a:rPr>
               <a:t>→</a:t>
             </a:r>
@@ -19526,7 +19526,7 @@
                 <a:solidFill>
                   <a:srgbClr val="1E7F4F"/>
                 </a:solidFill>
-                <a:latin typeface="Inter"/>
+                <a:latin typeface="Calibri"/>
               </a:rPr>
               <a:t>PHASE 3</a:t>
             </a:r>
@@ -19545,7 +19545,7 @@
                 <a:solidFill>
                   <a:srgbClr val="09131B"/>
                 </a:solidFill>
-                <a:latin typeface="Inter"/>
+                <a:latin typeface="Calibri"/>
               </a:rPr>
               <a:t>Intelligence</a:t>
             </a:r>
@@ -19564,7 +19564,7 @@
                 <a:solidFill>
                   <a:srgbClr val="595959"/>
                 </a:solidFill>
-                <a:latin typeface="Inter"/>
+                <a:latin typeface="Calibri"/>
               </a:rPr>
               <a:t>Vendor Hub Plus, renewal prediction, cross-tool signals and Ask Atlas on Azure OpenAI — the full decision layer.</a:t>
             </a:r>
@@ -19606,7 +19606,7 @@
                 <a:solidFill>
                   <a:srgbClr val="09131B"/>
                 </a:solidFill>
-                <a:latin typeface="Inter"/>
+                <a:latin typeface="Calibri"/>
               </a:rPr>
               <a:t>The prototype already demonstrates all three layers — so each phase de-risks the next, and you see working value from Phase 1 onward.</a:t>
             </a:r>
@@ -19692,7 +19692,7 @@
                 <a:solidFill>
                   <a:srgbClr val="A9AFB6"/>
                 </a:solidFill>
-                <a:latin typeface="Inter"/>
+                <a:latin typeface="Calibri"/>
               </a:rPr>
               <a:t>Cortex Atlas  ·  Illustrative prototype, synthetic data  ·  Confidential</a:t>
             </a:r>
@@ -19734,7 +19734,7 @@
                 <a:solidFill>
                   <a:srgbClr val="A9AFB6"/>
                 </a:solidFill>
-                <a:latin typeface="Inter"/>
+                <a:latin typeface="Calibri"/>
               </a:rPr>
               <a:t>15</a:t>
             </a:r>
@@ -19846,7 +19846,7 @@
                 <a:solidFill>
                   <a:srgbClr val="F89739"/>
                 </a:solidFill>
-                <a:latin typeface="Inter"/>
+                <a:latin typeface="Calibri"/>
               </a:rPr>
               <a:t>WHY THIS APPROACH</a:t>
             </a:r>
@@ -19888,7 +19888,7 @@
                 <a:solidFill>
                   <a:srgbClr val="09131B"/>
                 </a:solidFill>
-                <a:latin typeface="Inter"/>
+                <a:latin typeface="Calibri"/>
               </a:rPr>
               <a:t>Lower risk, faster value, proven pattern</a:t>
             </a:r>
@@ -20024,7 +20024,7 @@
                 <a:solidFill>
                   <a:srgbClr val="FFFFFF"/>
                 </a:solidFill>
-                <a:latin typeface="Inter"/>
+                <a:latin typeface="Calibri"/>
               </a:rPr>
               <a:t>✓</a:t>
             </a:r>
@@ -20066,7 +20066,7 @@
                 <a:solidFill>
                   <a:srgbClr val="09131B"/>
                 </a:solidFill>
-                <a:latin typeface="Inter"/>
+                <a:latin typeface="Calibri"/>
               </a:rPr>
               <a:t>Proven in the suite</a:t>
             </a:r>
@@ -20085,7 +20085,7 @@
                 <a:solidFill>
                   <a:srgbClr val="595959"/>
                 </a:solidFill>
-                <a:latin typeface="Inter"/>
+                <a:latin typeface="Calibri"/>
               </a:rPr>
               <a:t>Atlas reuses the exact design and structure as Compass, Vantage and Meridian — a pattern already delivered, not invented here.</a:t>
             </a:r>
@@ -20221,7 +20221,7 @@
                 <a:solidFill>
                   <a:srgbClr val="FFFFFF"/>
                 </a:solidFill>
-                <a:latin typeface="Inter"/>
+                <a:latin typeface="Calibri"/>
               </a:rPr>
               <a:t>✓</a:t>
             </a:r>
@@ -20263,7 +20263,7 @@
                 <a:solidFill>
                   <a:srgbClr val="09131B"/>
                 </a:solidFill>
-                <a:latin typeface="Inter"/>
+                <a:latin typeface="Calibri"/>
               </a:rPr>
               <a:t>Your stack, orchestrated</a:t>
             </a:r>
@@ -20282,7 +20282,7 @@
                 <a:solidFill>
                   <a:srgbClr val="595959"/>
                 </a:solidFill>
-                <a:latin typeface="Inter"/>
+                <a:latin typeface="Calibri"/>
               </a:rPr>
               <a:t>Built on Microsoft tools you already own — minimal new procurement, security or training overhead.</a:t>
             </a:r>
@@ -20418,7 +20418,7 @@
                 <a:solidFill>
                   <a:srgbClr val="FFFFFF"/>
                 </a:solidFill>
-                <a:latin typeface="Inter"/>
+                <a:latin typeface="Calibri"/>
               </a:rPr>
               <a:t>✓</a:t>
             </a:r>
@@ -20460,7 +20460,7 @@
                 <a:solidFill>
                   <a:srgbClr val="09131B"/>
                 </a:solidFill>
-                <a:latin typeface="Inter"/>
+                <a:latin typeface="Calibri"/>
               </a:rPr>
               <a:t>Evaluate it today</a:t>
             </a:r>
@@ -20479,7 +20479,7 @@
                 <a:solidFill>
                   <a:srgbClr val="595959"/>
                 </a:solidFill>
-                <a:latin typeface="Inter"/>
+                <a:latin typeface="Calibri"/>
               </a:rPr>
               <a:t>A working, offline prototype means stakeholders can click through and react now — no leap of faith.</a:t>
             </a:r>
@@ -20615,7 +20615,7 @@
                 <a:solidFill>
                   <a:srgbClr val="FFFFFF"/>
                 </a:solidFill>
-                <a:latin typeface="Inter"/>
+                <a:latin typeface="Calibri"/>
               </a:rPr>
               <a:t>✓</a:t>
             </a:r>
@@ -20657,7 +20657,7 @@
                 <a:solidFill>
                   <a:srgbClr val="09131B"/>
                 </a:solidFill>
-                <a:latin typeface="Inter"/>
+                <a:latin typeface="Calibri"/>
               </a:rPr>
               <a:t>Built to grow</a:t>
             </a:r>
@@ -20676,7 +20676,7 @@
                 <a:solidFill>
                   <a:srgbClr val="595959"/>
                 </a:solidFill>
-                <a:latin typeface="Inter"/>
+                <a:latin typeface="Calibri"/>
               </a:rPr>
               <a:t>Clean module separation means automation and intelligence bolt on without a rewrite.</a:t>
             </a:r>
@@ -20762,7 +20762,7 @@
                 <a:solidFill>
                   <a:srgbClr val="A9AFB6"/>
                 </a:solidFill>
-                <a:latin typeface="Inter"/>
+                <a:latin typeface="Calibri"/>
               </a:rPr>
               <a:t>Cortex Atlas  ·  Illustrative prototype, synthetic data  ·  Confidential</a:t>
             </a:r>
@@ -20804,7 +20804,7 @@
                 <a:solidFill>
                   <a:srgbClr val="A9AFB6"/>
                 </a:solidFill>
-                <a:latin typeface="Inter"/>
+                <a:latin typeface="Calibri"/>
               </a:rPr>
               <a:t>16</a:t>
             </a:r>
@@ -20916,7 +20916,7 @@
                 <a:solidFill>
                   <a:srgbClr val="F89739"/>
                 </a:solidFill>
-                <a:latin typeface="Inter"/>
+                <a:latin typeface="Calibri"/>
               </a:rPr>
               <a:t>NEXT STEPS</a:t>
             </a:r>
@@ -20958,7 +20958,7 @@
                 <a:solidFill>
                   <a:srgbClr val="FFFFFF"/>
                 </a:solidFill>
-                <a:latin typeface="Inter"/>
+                <a:latin typeface="Calibri"/>
               </a:rPr>
               <a:t>How we start</a:t>
             </a:r>
@@ -21046,7 +21046,7 @@
                 <a:solidFill>
                   <a:srgbClr val="09131B"/>
                 </a:solidFill>
-                <a:latin typeface="Inter"/>
+                <a:latin typeface="Calibri"/>
               </a:rPr>
               <a:t>1</a:t>
             </a:r>
@@ -21088,7 +21088,7 @@
                 <a:solidFill>
                   <a:srgbClr val="FFFFFF"/>
                 </a:solidFill>
-                <a:latin typeface="Inter"/>
+                <a:latin typeface="Calibri"/>
               </a:rPr>
               <a:t>Walk the prototype live</a:t>
             </a:r>
@@ -21107,7 +21107,7 @@
                 <a:solidFill>
                   <a:srgbClr val="C7CCD3"/>
                 </a:solidFill>
-                <a:latin typeface="Inter"/>
+                <a:latin typeface="Calibri"/>
               </a:rPr>
               <a:t>A hands-on session with your CI and procurement leads — react to the real thing.</a:t>
             </a:r>
@@ -21195,7 +21195,7 @@
                 <a:solidFill>
                   <a:srgbClr val="09131B"/>
                 </a:solidFill>
-                <a:latin typeface="Inter"/>
+                <a:latin typeface="Calibri"/>
               </a:rPr>
               <a:t>2</a:t>
             </a:r>
@@ -21237,7 +21237,7 @@
                 <a:solidFill>
                   <a:srgbClr val="FFFFFF"/>
                 </a:solidFill>
-                <a:latin typeface="Inter"/>
+                <a:latin typeface="Calibri"/>
               </a:rPr>
               <a:t>Baseline data audit</a:t>
             </a:r>
@@ -21256,7 +21256,7 @@
                 <a:solidFill>
                   <a:srgbClr val="C7CCD3"/>
                 </a:solidFill>
-                <a:latin typeface="Inter"/>
+                <a:latin typeface="Calibri"/>
               </a:rPr>
               <a:t>Point Atlas at your real estate to quantify duplication, renewal risk and concentration — the disclaimer becomes real numbers.</a:t>
             </a:r>
@@ -21344,7 +21344,7 @@
                 <a:solidFill>
                   <a:srgbClr val="09131B"/>
                 </a:solidFill>
-                <a:latin typeface="Inter"/>
+                <a:latin typeface="Calibri"/>
               </a:rPr>
               <a:t>3</a:t>
             </a:r>
@@ -21386,7 +21386,7 @@
                 <a:solidFill>
                   <a:srgbClr val="FFFFFF"/>
                 </a:solidFill>
-                <a:latin typeface="Inter"/>
+                <a:latin typeface="Calibri"/>
               </a:rPr>
               <a:t>Confirm scope &amp; architecture</a:t>
             </a:r>
@@ -21405,7 +21405,7 @@
                 <a:solidFill>
                   <a:srgbClr val="C7CCD3"/>
                 </a:solidFill>
-                <a:latin typeface="Inter"/>
+                <a:latin typeface="Calibri"/>
               </a:rPr>
               <a:t>Agree Phase 1 boundaries and the SharePoint / Power Automate / Purview target with your IT team.</a:t>
             </a:r>
@@ -21493,7 +21493,7 @@
                 <a:solidFill>
                   <a:srgbClr val="09131B"/>
                 </a:solidFill>
-                <a:latin typeface="Inter"/>
+                <a:latin typeface="Calibri"/>
               </a:rPr>
               <a:t>4</a:t>
             </a:r>
@@ -21535,7 +21535,7 @@
                 <a:solidFill>
                   <a:srgbClr val="FFFFFF"/>
                 </a:solidFill>
-                <a:latin typeface="Inter"/>
+                <a:latin typeface="Calibri"/>
               </a:rPr>
               <a:t>Stand up Phase 1</a:t>
             </a:r>
@@ -21554,7 +21554,7 @@
                 <a:solidFill>
                   <a:srgbClr val="C7CCD3"/>
                 </a:solidFill>
-                <a:latin typeface="Inter"/>
+                <a:latin typeface="Calibri"/>
               </a:rPr>
               <a:t>Migrate the connected five-tool foundation — value from day one.</a:t>
             </a:r>
@@ -21596,7 +21596,7 @@
                 <a:solidFill>
                   <a:srgbClr val="F89739"/>
                 </a:solidFill>
-                <a:latin typeface="Inter"/>
+                <a:latin typeface="Calibri"/>
               </a:rPr>
               <a:t>Thank you.  Let's open the prototype.</a:t>
             </a:r>
@@ -21708,7 +21708,7 @@
                 <a:solidFill>
                   <a:srgbClr val="F89739"/>
                 </a:solidFill>
-                <a:latin typeface="Inter"/>
+                <a:latin typeface="Calibri"/>
               </a:rPr>
               <a:t>APPENDIX</a:t>
             </a:r>
@@ -21750,7 +21750,7 @@
                 <a:solidFill>
                   <a:srgbClr val="09131B"/>
                 </a:solidFill>
-                <a:latin typeface="Inter"/>
+                <a:latin typeface="Calibri"/>
               </a:rPr>
               <a:t>Notes, scope and disclaimer</a:t>
             </a:r>
@@ -21792,7 +21792,7 @@
                 <a:solidFill>
                   <a:srgbClr val="09131B"/>
                 </a:solidFill>
-                <a:latin typeface="Inter"/>
+                <a:latin typeface="Calibri"/>
               </a:rPr>
               <a:t>On the data</a:t>
             </a:r>
@@ -21811,7 +21811,7 @@
                 <a:solidFill>
                   <a:srgbClr val="595959"/>
                 </a:solidFill>
-                <a:latin typeface="Inter"/>
+                <a:latin typeface="Calibri"/>
               </a:rPr>
               <a:t>All figures, companies, brands and vendors in this prototype and deck are synthetic and illustrative (NovaCura Pharmaceuticals; brands OncoNova, Immunexa, CardioZen, Neurovia, RareGene; invented vendors such as Helix Health Data and Cardinal Claims Co). Public vendor names (Veeva, IQVIA, Databricks, Model N, SAP, SharePoint, Microsoft Purview) appear only as integration labels.</a:t>
             </a:r>
@@ -21830,7 +21830,7 @@
                 <a:solidFill>
                   <a:srgbClr val="09131B"/>
                 </a:solidFill>
-                <a:latin typeface="Inter"/>
+                <a:latin typeface="Calibri"/>
               </a:rPr>
               <a:t>On the figures</a:t>
             </a:r>
@@ -21849,7 +21849,7 @@
                 <a:solidFill>
                   <a:srgbClr val="595959"/>
                 </a:solidFill>
-                <a:latin typeface="Inter"/>
+                <a:latin typeface="Calibri"/>
               </a:rPr>
               <a:t>Numbers shown — spend, HHI, expiry counts, duplicate exposure — are directional and exist to demonstrate the mechanics. A client baseline audit is required before any figure is used externally or for decisions.</a:t>
             </a:r>
@@ -21868,7 +21868,7 @@
                 <a:solidFill>
                   <a:srgbClr val="09131B"/>
                 </a:solidFill>
-                <a:latin typeface="Inter"/>
+                <a:latin typeface="Calibri"/>
               </a:rPr>
               <a:t>On the intelligence</a:t>
             </a:r>
@@ -21887,7 +21887,7 @@
                 <a:solidFill>
                   <a:srgbClr val="595959"/>
                 </a:solidFill>
-                <a:latin typeface="Inter"/>
+                <a:latin typeface="Calibri"/>
               </a:rPr>
               <a:t>Every AI and analytics output in Atlas is advisory only, carries a confidence read, and requires human approval. There are no autonomous decisions or actions.</a:t>
             </a:r>
@@ -21973,7 +21973,7 @@
                 <a:solidFill>
                   <a:srgbClr val="A9AFB6"/>
                 </a:solidFill>
-                <a:latin typeface="Inter"/>
+                <a:latin typeface="Calibri"/>
               </a:rPr>
               <a:t>Cortex Atlas  ·  Illustrative prototype, synthetic data  ·  Confidential</a:t>
             </a:r>
@@ -22015,7 +22015,7 @@
                 <a:solidFill>
                   <a:srgbClr val="A9AFB6"/>
                 </a:solidFill>
-                <a:latin typeface="Inter"/>
+                <a:latin typeface="Calibri"/>
               </a:rPr>
               <a:t>17</a:t>
             </a:r>
@@ -22127,7 +22127,7 @@
                 <a:solidFill>
                   <a:srgbClr val="F89739"/>
                 </a:solidFill>
-                <a:latin typeface="Inter"/>
+                <a:latin typeface="Calibri"/>
               </a:rPr>
               <a:t>THE CHALLENGE</a:t>
             </a:r>
@@ -22169,7 +22169,7 @@
                 <a:solidFill>
                   <a:srgbClr val="FFFFFF"/>
                 </a:solidFill>
-                <a:latin typeface="Inter"/>
+                <a:latin typeface="Calibri"/>
               </a:rPr>
               <a:t>Five tools. Five silos.</a:t>
             </a:r>
@@ -22211,7 +22211,7 @@
                 <a:solidFill>
                   <a:srgbClr val="A9AFB6"/>
                 </a:solidFill>
-                <a:latin typeface="Inter"/>
+                <a:latin typeface="Calibri"/>
               </a:rPr>
               <a:t>The pieces are all there today — they just don't talk to each other.</a:t>
             </a:r>
@@ -22253,7 +22253,7 @@
                 <a:solidFill>
                   <a:srgbClr val="3A4A54"/>
                 </a:solidFill>
-                <a:latin typeface="Inter"/>
+                <a:latin typeface="Calibri"/>
               </a:rPr>
               <a:t>01 / 06</a:t>
             </a:r>
@@ -22365,7 +22365,7 @@
                 <a:solidFill>
                   <a:srgbClr val="F89739"/>
                 </a:solidFill>
-                <a:latin typeface="Inter"/>
+                <a:latin typeface="Calibri"/>
               </a:rPr>
               <a:t>THE SITUATION TODAY</a:t>
             </a:r>
@@ -22407,7 +22407,7 @@
                 <a:solidFill>
                   <a:srgbClr val="09131B"/>
                 </a:solidFill>
-                <a:latin typeface="Inter"/>
+                <a:latin typeface="Calibri"/>
               </a:rPr>
               <a:t>The estate runs on five disconnected tools</a:t>
             </a:r>
@@ -22497,7 +22497,7 @@
                 <a:solidFill>
                   <a:srgbClr val="F89739"/>
                 </a:solidFill>
-                <a:latin typeface="Inter"/>
+                <a:latin typeface="Calibri"/>
               </a:rPr>
               <a:t>DPRH</a:t>
             </a:r>
@@ -22516,7 +22516,7 @@
                 <a:solidFill>
                   <a:srgbClr val="09131B"/>
                 </a:solidFill>
-                <a:latin typeface="Inter"/>
+                <a:latin typeface="Calibri"/>
               </a:rPr>
               <a:t>Data Purchase Request Hub</a:t>
             </a:r>
@@ -22535,7 +22535,7 @@
                 <a:solidFill>
                   <a:srgbClr val="595959"/>
                 </a:solidFill>
-                <a:latin typeface="Inter"/>
+                <a:latin typeface="Calibri"/>
               </a:rPr>
               <a:t>Where data buys are raised and approved</a:t>
             </a:r>
@@ -22577,7 +22577,7 @@
                 <a:solidFill>
                   <a:srgbClr val="A9AFB6"/>
                 </a:solidFill>
-                <a:latin typeface="Inter"/>
+                <a:latin typeface="Calibri"/>
               </a:rPr>
               <a:t>·</a:t>
             </a:r>
@@ -22667,7 +22667,7 @@
                 <a:solidFill>
                   <a:srgbClr val="F89739"/>
                 </a:solidFill>
-                <a:latin typeface="Inter"/>
+                <a:latin typeface="Calibri"/>
               </a:rPr>
               <a:t>CATALOGUE</a:t>
             </a:r>
@@ -22686,7 +22686,7 @@
                 <a:solidFill>
                   <a:srgbClr val="09131B"/>
                 </a:solidFill>
-                <a:latin typeface="Inter"/>
+                <a:latin typeface="Calibri"/>
               </a:rPr>
               <a:t>Data Catalogue</a:t>
             </a:r>
@@ -22705,7 +22705,7 @@
                 <a:solidFill>
                   <a:srgbClr val="595959"/>
                 </a:solidFill>
-                <a:latin typeface="Inter"/>
+                <a:latin typeface="Calibri"/>
               </a:rPr>
               <a:t>The record of everything purchased</a:t>
             </a:r>
@@ -22747,7 +22747,7 @@
                 <a:solidFill>
                   <a:srgbClr val="A9AFB6"/>
                 </a:solidFill>
-                <a:latin typeface="Inter"/>
+                <a:latin typeface="Calibri"/>
               </a:rPr>
               <a:t>·</a:t>
             </a:r>
@@ -22837,7 +22837,7 @@
                 <a:solidFill>
                   <a:srgbClr val="F89739"/>
                 </a:solidFill>
-                <a:latin typeface="Inter"/>
+                <a:latin typeface="Calibri"/>
               </a:rPr>
               <a:t>KPI</a:t>
             </a:r>
@@ -22856,7 +22856,7 @@
                 <a:solidFill>
                   <a:srgbClr val="09131B"/>
                 </a:solidFill>
-                <a:latin typeface="Inter"/>
+                <a:latin typeface="Calibri"/>
               </a:rPr>
               <a:t>KPI Catalogue</a:t>
             </a:r>
@@ -22875,7 +22875,7 @@
                 <a:solidFill>
                   <a:srgbClr val="595959"/>
                 </a:solidFill>
-                <a:latin typeface="Inter"/>
+                <a:latin typeface="Calibri"/>
               </a:rPr>
               <a:t>The metrics built on that data</a:t>
             </a:r>
@@ -22917,7 +22917,7 @@
                 <a:solidFill>
                   <a:srgbClr val="A9AFB6"/>
                 </a:solidFill>
-                <a:latin typeface="Inter"/>
+                <a:latin typeface="Calibri"/>
               </a:rPr>
               <a:t>·</a:t>
             </a:r>
@@ -23007,7 +23007,7 @@
                 <a:solidFill>
                   <a:srgbClr val="F89739"/>
                 </a:solidFill>
-                <a:latin typeface="Inter"/>
+                <a:latin typeface="Calibri"/>
               </a:rPr>
               <a:t>VENDOR</a:t>
             </a:r>
@@ -23026,7 +23026,7 @@
                 <a:solidFill>
                   <a:srgbClr val="09131B"/>
                 </a:solidFill>
-                <a:latin typeface="Inter"/>
+                <a:latin typeface="Calibri"/>
               </a:rPr>
               <a:t>Vendor Hub</a:t>
             </a:r>
@@ -23045,7 +23045,7 @@
                 <a:solidFill>
                   <a:srgbClr val="595959"/>
                 </a:solidFill>
-                <a:latin typeface="Inter"/>
+                <a:latin typeface="Calibri"/>
               </a:rPr>
               <a:t>Who supplies what</a:t>
             </a:r>
@@ -23087,7 +23087,7 @@
                 <a:solidFill>
                   <a:srgbClr val="A9AFB6"/>
                 </a:solidFill>
-                <a:latin typeface="Inter"/>
+                <a:latin typeface="Calibri"/>
               </a:rPr>
               <a:t>·</a:t>
             </a:r>
@@ -23177,7 +23177,7 @@
                 <a:solidFill>
                   <a:srgbClr val="F89739"/>
                 </a:solidFill>
-                <a:latin typeface="Inter"/>
+                <a:latin typeface="Calibri"/>
               </a:rPr>
               <a:t>TPA</a:t>
             </a:r>
@@ -23196,7 +23196,7 @@
                 <a:solidFill>
                   <a:srgbClr val="09131B"/>
                 </a:solidFill>
-                <a:latin typeface="Inter"/>
+                <a:latin typeface="Calibri"/>
               </a:rPr>
               <a:t>TPA Hub</a:t>
             </a:r>
@@ -23215,7 +23215,7 @@
                 <a:solidFill>
                   <a:srgbClr val="595959"/>
                 </a:solidFill>
-                <a:latin typeface="Inter"/>
+                <a:latin typeface="Calibri"/>
               </a:rPr>
               <a:t>The agreements that govern sharing</a:t>
             </a:r>
@@ -23257,7 +23257,7 @@
                 <a:solidFill>
                   <a:srgbClr val="09131B"/>
                 </a:solidFill>
-                <a:latin typeface="Inter"/>
+                <a:latin typeface="Calibri"/>
               </a:rPr>
               <a:t>The problem isn't the tools — it's the gaps between them</a:t>
             </a:r>
@@ -23266,7 +23266,7 @@
                 <a:solidFill>
                   <a:srgbClr val="F89739"/>
                 </a:solidFill>
-                <a:latin typeface="Inter"/>
+                <a:latin typeface="Calibri"/>
               </a:rPr>
               <a:t>—  </a:t>
             </a:r>
@@ -23275,7 +23275,7 @@
                 <a:solidFill>
                   <a:srgbClr val="09131B"/>
                 </a:solidFill>
-                <a:latin typeface="Inter"/>
+                <a:latin typeface="Calibri"/>
               </a:rPr>
               <a:t>No single line of sight.</a:t>
             </a:r>
@@ -23284,7 +23284,7 @@
                 <a:solidFill>
                   <a:srgbClr val="595959"/>
                 </a:solidFill>
-                <a:latin typeface="Inter"/>
+                <a:latin typeface="Calibri"/>
               </a:rPr>
               <a:t> To answer 'do we already buy this?' someone manually checks the catalogue — if they remember to.</a:t>
             </a:r>
@@ -23303,7 +23303,7 @@
                 <a:solidFill>
                   <a:srgbClr val="F89739"/>
                 </a:solidFill>
-                <a:latin typeface="Inter"/>
+                <a:latin typeface="Calibri"/>
               </a:rPr>
               <a:t>—  </a:t>
             </a:r>
@@ -23312,7 +23312,7 @@
                 <a:solidFill>
                   <a:srgbClr val="09131B"/>
                 </a:solidFill>
-                <a:latin typeface="Inter"/>
+                <a:latin typeface="Calibri"/>
               </a:rPr>
               <a:t>Manual, reactive renewals.</a:t>
             </a:r>
@@ -23321,7 +23321,7 @@
                 <a:solidFill>
                   <a:srgbClr val="595959"/>
                 </a:solidFill>
-                <a:latin typeface="Inter"/>
+                <a:latin typeface="Calibri"/>
               </a:rPr>
               <a:t> Expiry tracking lives in spreadsheets and inboxes; agreements lapse or get renewed in a rush, losing leverage.</a:t>
             </a:r>
@@ -23340,7 +23340,7 @@
                 <a:solidFill>
                   <a:srgbClr val="F89739"/>
                 </a:solidFill>
-                <a:latin typeface="Inter"/>
+                <a:latin typeface="Calibri"/>
               </a:rPr>
               <a:t>—  </a:t>
             </a:r>
@@ -23349,7 +23349,7 @@
                 <a:solidFill>
                   <a:srgbClr val="09131B"/>
                 </a:solidFill>
-                <a:latin typeface="Inter"/>
+                <a:latin typeface="Calibri"/>
               </a:rPr>
               <a:t>Value is invisible.</a:t>
             </a:r>
@@ -23358,7 +23358,7 @@
                 <a:solidFill>
                   <a:srgbClr val="595959"/>
                 </a:solidFill>
-                <a:latin typeface="Inter"/>
+                <a:latin typeface="Calibri"/>
               </a:rPr>
               <a:t> Spend, quality and dependency sit in separate lists, so no one sees vendor concentration or what a metric actually rests on.</a:t>
             </a:r>
@@ -23377,7 +23377,7 @@
                 <a:solidFill>
                   <a:srgbClr val="F89739"/>
                 </a:solidFill>
-                <a:latin typeface="Inter"/>
+                <a:latin typeface="Calibri"/>
               </a:rPr>
               <a:t>—  </a:t>
             </a:r>
@@ -23386,7 +23386,7 @@
                 <a:solidFill>
                   <a:srgbClr val="09131B"/>
                 </a:solidFill>
-                <a:latin typeface="Inter"/>
+                <a:latin typeface="Calibri"/>
               </a:rPr>
               <a:t>Governance is effort, not default.</a:t>
             </a:r>
@@ -23395,7 +23395,7 @@
                 <a:solidFill>
                   <a:srgbClr val="595959"/>
                 </a:solidFill>
-                <a:latin typeface="Inter"/>
+                <a:latin typeface="Calibri"/>
               </a:rPr>
               <a:t> PII/PHI classification and lineage are done by hand, late, and inconsistently.</a:t>
             </a:r>
@@ -23481,7 +23481,7 @@
                 <a:solidFill>
                   <a:srgbClr val="A9AFB6"/>
                 </a:solidFill>
-                <a:latin typeface="Inter"/>
+                <a:latin typeface="Calibri"/>
               </a:rPr>
               <a:t>Cortex Atlas  ·  Illustrative prototype, synthetic data  ·  Confidential</a:t>
             </a:r>
@@ -23523,7 +23523,7 @@
                 <a:solidFill>
                   <a:srgbClr val="A9AFB6"/>
                 </a:solidFill>
-                <a:latin typeface="Inter"/>
+                <a:latin typeface="Calibri"/>
               </a:rPr>
               <a:t>2</a:t>
             </a:r>
@@ -23635,7 +23635,7 @@
                 <a:solidFill>
                   <a:srgbClr val="F89739"/>
                 </a:solidFill>
-                <a:latin typeface="Inter"/>
+                <a:latin typeface="Calibri"/>
               </a:rPr>
               <a:t>WHY IT MATTERS</a:t>
             </a:r>
@@ -23677,7 +23677,7 @@
                 <a:solidFill>
                   <a:srgbClr val="09131B"/>
                 </a:solidFill>
-                <a:latin typeface="Inter"/>
+                <a:latin typeface="Calibri"/>
               </a:rPr>
               <a:t>What the disconnect costs — four ways money and risk leak</a:t>
             </a:r>
@@ -23813,7 +23813,7 @@
                 <a:solidFill>
                   <a:srgbClr val="09131B"/>
                 </a:solidFill>
-                <a:latin typeface="Inter"/>
+                <a:latin typeface="Calibri"/>
               </a:rPr>
               <a:t>Duplicate buys</a:t>
             </a:r>
@@ -23832,7 +23832,7 @@
                 <a:solidFill>
                   <a:srgbClr val="595959"/>
                 </a:solidFill>
-                <a:latin typeface="Inter"/>
+                <a:latin typeface="Calibri"/>
               </a:rPr>
               <a:t>Teams re-purchase data the organisation already owns because there's no check at the point of request.</a:t>
             </a:r>
@@ -23874,7 +23874,7 @@
                 <a:solidFill>
                   <a:srgbClr val="9A5C12"/>
                 </a:solidFill>
-                <a:latin typeface="Inter"/>
+                <a:latin typeface="Calibri"/>
               </a:rPr>
               <a:t>AVOIDABLE SPEND</a:t>
             </a:r>
@@ -24010,7 +24010,7 @@
                 <a:solidFill>
                   <a:srgbClr val="09131B"/>
                 </a:solidFill>
-                <a:latin typeface="Inter"/>
+                <a:latin typeface="Calibri"/>
               </a:rPr>
               <a:t>Lapsed / rushed renewals</a:t>
             </a:r>
@@ -24029,7 +24029,7 @@
                 <a:solidFill>
                   <a:srgbClr val="595959"/>
                 </a:solidFill>
-                <a:latin typeface="Inter"/>
+                <a:latin typeface="Calibri"/>
               </a:rPr>
               <a:t>Agreements expire without warning, or renew under time pressure with no negotiating room.</a:t>
             </a:r>
@@ -24071,7 +24071,7 @@
                 <a:solidFill>
                   <a:srgbClr val="E8451C"/>
                 </a:solidFill>
-                <a:latin typeface="Inter"/>
+                <a:latin typeface="Calibri"/>
               </a:rPr>
               <a:t>LOST LEVERAGE + RISK</a:t>
             </a:r>
@@ -24207,7 +24207,7 @@
                 <a:solidFill>
                   <a:srgbClr val="09131B"/>
                 </a:solidFill>
-                <a:latin typeface="Inter"/>
+                <a:latin typeface="Calibri"/>
               </a:rPr>
               <a:t>Vendor over-dependence</a:t>
             </a:r>
@@ -24226,7 +24226,7 @@
                 <a:solidFill>
                   <a:srgbClr val="595959"/>
                 </a:solidFill>
-                <a:latin typeface="Inter"/>
+                <a:latin typeface="Calibri"/>
               </a:rPr>
               <a:t>Spend quietly concentrates in a few vendors with no substitutes — a single point of failure.</a:t>
             </a:r>
@@ -24268,7 +24268,7 @@
                 <a:solidFill>
                   <a:srgbClr val="9A5C12"/>
                 </a:solidFill>
-                <a:latin typeface="Inter"/>
+                <a:latin typeface="Calibri"/>
               </a:rPr>
               <a:t>CONCENTRATION RISK</a:t>
             </a:r>
@@ -24404,7 +24404,7 @@
                 <a:solidFill>
                   <a:srgbClr val="09131B"/>
                 </a:solidFill>
-                <a:latin typeface="Inter"/>
+                <a:latin typeface="Calibri"/>
               </a:rPr>
               <a:t>Audit exposure</a:t>
             </a:r>
@@ -24423,7 +24423,7 @@
                 <a:solidFill>
                   <a:srgbClr val="595959"/>
                 </a:solidFill>
-                <a:latin typeface="Inter"/>
+                <a:latin typeface="Calibri"/>
               </a:rPr>
               <a:t>Sensitive data isn't consistently classified and lineage is unclear when the auditor asks.</a:t>
             </a:r>
@@ -24465,7 +24465,7 @@
                 <a:solidFill>
                   <a:srgbClr val="E8451C"/>
                 </a:solidFill>
-                <a:latin typeface="Inter"/>
+                <a:latin typeface="Calibri"/>
               </a:rPr>
               <a:t>COMPLIANCE RISK</a:t>
             </a:r>
@@ -24507,7 +24507,7 @@
                 <a:solidFill>
                   <a:srgbClr val="09131B"/>
                 </a:solidFill>
-                <a:latin typeface="Inter"/>
+                <a:latin typeface="Calibri"/>
               </a:rPr>
               <a:t>None of this is a people problem. It's a structure problem — and structure is exactly what a connected platform fixes.</a:t>
             </a:r>
@@ -24593,7 +24593,7 @@
                 <a:solidFill>
                   <a:srgbClr val="A9AFB6"/>
                 </a:solidFill>
-                <a:latin typeface="Inter"/>
+                <a:latin typeface="Calibri"/>
               </a:rPr>
               <a:t>Cortex Atlas  ·  Illustrative prototype, synthetic data  ·  Confidential</a:t>
             </a:r>
@@ -24635,7 +24635,7 @@
                 <a:solidFill>
                   <a:srgbClr val="A9AFB6"/>
                 </a:solidFill>
-                <a:latin typeface="Inter"/>
+                <a:latin typeface="Calibri"/>
               </a:rPr>
               <a:t>3</a:t>
             </a:r>
@@ -24747,7 +24747,7 @@
                 <a:solidFill>
                   <a:srgbClr val="F89739"/>
                 </a:solidFill>
-                <a:latin typeface="Inter"/>
+                <a:latin typeface="Calibri"/>
               </a:rPr>
               <a:t>THE SOLUTION</a:t>
             </a:r>
@@ -24789,7 +24789,7 @@
                 <a:solidFill>
                   <a:srgbClr val="FFFFFF"/>
                 </a:solidFill>
-                <a:latin typeface="Inter"/>
+                <a:latin typeface="Calibri"/>
               </a:rPr>
               <a:t>One connected estate</a:t>
             </a:r>
@@ -24831,7 +24831,7 @@
                 <a:solidFill>
                   <a:srgbClr val="A9AFB6"/>
                 </a:solidFill>
-                <a:latin typeface="Inter"/>
+                <a:latin typeface="Calibri"/>
               </a:rPr>
               <a:t>A purchase request becomes a catalogued asset, measured by KPIs, supplied by a vendor, governed by an agreement — and Atlas sees all of it.</a:t>
             </a:r>
@@ -24873,7 +24873,7 @@
                 <a:solidFill>
                   <a:srgbClr val="3A4A54"/>
                 </a:solidFill>
-                <a:latin typeface="Inter"/>
+                <a:latin typeface="Calibri"/>
               </a:rPr>
               <a:t>02 / 06</a:t>
             </a:r>
@@ -24985,7 +24985,7 @@
                 <a:solidFill>
                   <a:srgbClr val="F89739"/>
                 </a:solidFill>
-                <a:latin typeface="Inter"/>
+                <a:latin typeface="Calibri"/>
               </a:rPr>
               <a:t>THE BIG IDEA</a:t>
             </a:r>
@@ -25027,7 +25027,7 @@
                 <a:solidFill>
                   <a:srgbClr val="09131B"/>
                 </a:solidFill>
-                <a:latin typeface="Inter"/>
+                <a:latin typeface="Calibri"/>
               </a:rPr>
               <a:t>Cortex Atlas: the five tools as one estate</a:t>
             </a:r>
@@ -25117,7 +25117,7 @@
                 <a:solidFill>
                   <a:srgbClr val="F89739"/>
                 </a:solidFill>
-                <a:latin typeface="Inter"/>
+                <a:latin typeface="Calibri"/>
               </a:rPr>
               <a:t>DPRH</a:t>
             </a:r>
@@ -25136,7 +25136,7 @@
                 <a:solidFill>
                   <a:srgbClr val="09131B"/>
                 </a:solidFill>
-                <a:latin typeface="Inter"/>
+                <a:latin typeface="Calibri"/>
               </a:rPr>
               <a:t>Data Requests</a:t>
             </a:r>
@@ -25178,7 +25178,7 @@
                 <a:solidFill>
                   <a:srgbClr val="F89739"/>
                 </a:solidFill>
-                <a:latin typeface="Inter"/>
+                <a:latin typeface="Calibri"/>
               </a:rPr>
               <a:t>→</a:t>
             </a:r>
@@ -25268,7 +25268,7 @@
                 <a:solidFill>
                   <a:srgbClr val="F89739"/>
                 </a:solidFill>
-                <a:latin typeface="Inter"/>
+                <a:latin typeface="Calibri"/>
               </a:rPr>
               <a:t>ASSET</a:t>
             </a:r>
@@ -25287,7 +25287,7 @@
                 <a:solidFill>
                   <a:srgbClr val="09131B"/>
                 </a:solidFill>
-                <a:latin typeface="Inter"/>
+                <a:latin typeface="Calibri"/>
               </a:rPr>
               <a:t>Data Catalogue</a:t>
             </a:r>
@@ -25329,7 +25329,7 @@
                 <a:solidFill>
                   <a:srgbClr val="F89739"/>
                 </a:solidFill>
-                <a:latin typeface="Inter"/>
+                <a:latin typeface="Calibri"/>
               </a:rPr>
               <a:t>→</a:t>
             </a:r>
@@ -25419,7 +25419,7 @@
                 <a:solidFill>
                   <a:srgbClr val="F89739"/>
                 </a:solidFill>
-                <a:latin typeface="Inter"/>
+                <a:latin typeface="Calibri"/>
               </a:rPr>
               <a:t>METRIC</a:t>
             </a:r>
@@ -25438,7 +25438,7 @@
                 <a:solidFill>
                   <a:srgbClr val="09131B"/>
                 </a:solidFill>
-                <a:latin typeface="Inter"/>
+                <a:latin typeface="Calibri"/>
               </a:rPr>
               <a:t>KPI Catalogue</a:t>
             </a:r>
@@ -25480,7 +25480,7 @@
                 <a:solidFill>
                   <a:srgbClr val="F89739"/>
                 </a:solidFill>
-                <a:latin typeface="Inter"/>
+                <a:latin typeface="Calibri"/>
               </a:rPr>
               <a:t>→</a:t>
             </a:r>
@@ -25570,7 +25570,7 @@
                 <a:solidFill>
                   <a:srgbClr val="F89739"/>
                 </a:solidFill>
-                <a:latin typeface="Inter"/>
+                <a:latin typeface="Calibri"/>
               </a:rPr>
               <a:t>VENDOR</a:t>
             </a:r>
@@ -25589,7 +25589,7 @@
                 <a:solidFill>
                   <a:srgbClr val="09131B"/>
                 </a:solidFill>
-                <a:latin typeface="Inter"/>
+                <a:latin typeface="Calibri"/>
               </a:rPr>
               <a:t>Vendor Hub</a:t>
             </a:r>
@@ -25631,7 +25631,7 @@
                 <a:solidFill>
                   <a:srgbClr val="F89739"/>
                 </a:solidFill>
-                <a:latin typeface="Inter"/>
+                <a:latin typeface="Calibri"/>
               </a:rPr>
               <a:t>→</a:t>
             </a:r>
@@ -25721,7 +25721,7 @@
                 <a:solidFill>
                   <a:srgbClr val="F89739"/>
                 </a:solidFill>
-                <a:latin typeface="Inter"/>
+                <a:latin typeface="Calibri"/>
               </a:rPr>
               <a:t>AGREEMENT</a:t>
             </a:r>
@@ -25740,7 +25740,7 @@
                 <a:solidFill>
                   <a:srgbClr val="09131B"/>
                 </a:solidFill>
-                <a:latin typeface="Inter"/>
+                <a:latin typeface="Calibri"/>
               </a:rPr>
               <a:t>TPA Hub</a:t>
             </a:r>
@@ -25782,7 +25782,7 @@
                 <a:solidFill>
                   <a:srgbClr val="09131B"/>
                 </a:solidFill>
-                <a:latin typeface="Inter"/>
+                <a:latin typeface="Calibri"/>
               </a:rPr>
               <a:t>Real links, not labels — every connection is clickable</a:t>
             </a:r>
@@ -25872,7 +25872,7 @@
                 <a:solidFill>
                   <a:srgbClr val="09131B"/>
                 </a:solidFill>
-                <a:latin typeface="Inter"/>
+                <a:latin typeface="Calibri"/>
               </a:rPr>
               <a:t>From a request</a:t>
             </a:r>
@@ -25891,7 +25891,7 @@
                 <a:solidFill>
                   <a:srgbClr val="595959"/>
                 </a:solidFill>
-                <a:latin typeface="Inter"/>
+                <a:latin typeface="Calibri"/>
               </a:rPr>
               <a:t>jump to the catalogue entry it creates</a:t>
             </a:r>
@@ -25981,7 +25981,7 @@
                 <a:solidFill>
                   <a:srgbClr val="09131B"/>
                 </a:solidFill>
-                <a:latin typeface="Inter"/>
+                <a:latin typeface="Calibri"/>
               </a:rPr>
               <a:t>From an asset</a:t>
             </a:r>
@@ -26000,7 +26000,7 @@
                 <a:solidFill>
                   <a:srgbClr val="595959"/>
                 </a:solidFill>
-                <a:latin typeface="Inter"/>
+                <a:latin typeface="Calibri"/>
               </a:rPr>
               <a:t>jump to its KPIs, its vendor, its agreement</a:t>
             </a:r>
@@ -26090,7 +26090,7 @@
                 <a:solidFill>
                   <a:srgbClr val="09131B"/>
                 </a:solidFill>
-                <a:latin typeface="Inter"/>
+                <a:latin typeface="Calibri"/>
               </a:rPr>
               <a:t>From a KPI</a:t>
             </a:r>
@@ -26109,7 +26109,7 @@
                 <a:solidFill>
                   <a:srgbClr val="595959"/>
                 </a:solidFill>
-                <a:latin typeface="Inter"/>
+                <a:latin typeface="Calibri"/>
               </a:rPr>
               <a:t>trace the exact asset and vendor it depends on</a:t>
             </a:r>
@@ -26199,7 +26199,7 @@
                 <a:solidFill>
                   <a:srgbClr val="09131B"/>
                 </a:solidFill>
-                <a:latin typeface="Inter"/>
+                <a:latin typeface="Calibri"/>
               </a:rPr>
               <a:t>From an agreement</a:t>
             </a:r>
@@ -26218,7 +26218,7 @@
                 <a:solidFill>
                   <a:srgbClr val="595959"/>
                 </a:solidFill>
-                <a:latin typeface="Inter"/>
+                <a:latin typeface="Calibri"/>
               </a:rPr>
               <a:t>see the asset and the strategic KPI behind it</a:t>
             </a:r>
@@ -26304,7 +26304,7 @@
                 <a:solidFill>
                   <a:srgbClr val="A9AFB6"/>
                 </a:solidFill>
-                <a:latin typeface="Inter"/>
+                <a:latin typeface="Calibri"/>
               </a:rPr>
               <a:t>Cortex Atlas  ·  Illustrative prototype, synthetic data  ·  Confidential</a:t>
             </a:r>
@@ -26346,7 +26346,7 @@
                 <a:solidFill>
                   <a:srgbClr val="A9AFB6"/>
                 </a:solidFill>
-                <a:latin typeface="Inter"/>
+                <a:latin typeface="Calibri"/>
               </a:rPr>
               <a:t>4</a:t>
             </a:r>
@@ -26458,7 +26458,7 @@
                 <a:solidFill>
                   <a:srgbClr val="F89739"/>
                 </a:solidFill>
-                <a:latin typeface="Inter"/>
+                <a:latin typeface="Calibri"/>
               </a:rPr>
               <a:t>HOW IT WORKS</a:t>
             </a:r>
@@ -26500,7 +26500,7 @@
                 <a:solidFill>
                   <a:srgbClr val="09131B"/>
                 </a:solidFill>
-                <a:latin typeface="Inter"/>
+                <a:latin typeface="Calibri"/>
               </a:rPr>
               <a:t>Three layers, one tool</a:t>
             </a:r>
@@ -26682,7 +26682,7 @@
                 <a:solidFill>
                   <a:srgbClr val="FFFFFF"/>
                 </a:solidFill>
-                <a:latin typeface="Inter"/>
+                <a:latin typeface="Calibri"/>
               </a:rPr>
               <a:t>01</a:t>
             </a:r>
@@ -26724,7 +26724,7 @@
                 <a:solidFill>
                   <a:srgbClr val="09131B"/>
                 </a:solidFill>
-                <a:latin typeface="Inter"/>
+                <a:latin typeface="Calibri"/>
               </a:rPr>
               <a:t>Estate</a:t>
             </a:r>
@@ -26743,7 +26743,7 @@
                 <a:solidFill>
                   <a:srgbClr val="0563C1"/>
                 </a:solidFill>
-                <a:latin typeface="Inter"/>
+                <a:latin typeface="Calibri"/>
               </a:rPr>
               <a:t>The five tools, faithful to how they work today</a:t>
             </a:r>
@@ -26762,7 +26762,7 @@
                 <a:solidFill>
                   <a:srgbClr val="595959"/>
                 </a:solidFill>
-                <a:latin typeface="Inter"/>
+                <a:latin typeface="Calibri"/>
               </a:rPr>
               <a:t>Combined role-gated request form · full catalogue record · KPI registry · vendor inventory · agreement register. The trustworthy foundation.</a:t>
             </a:r>
@@ -26944,7 +26944,7 @@
                 <a:solidFill>
                   <a:srgbClr val="FFFFFF"/>
                 </a:solidFill>
-                <a:latin typeface="Inter"/>
+                <a:latin typeface="Calibri"/>
               </a:rPr>
               <a:t>02</a:t>
             </a:r>
@@ -26986,7 +26986,7 @@
                 <a:solidFill>
                   <a:srgbClr val="09131B"/>
                 </a:solidFill>
-                <a:latin typeface="Inter"/>
+                <a:latin typeface="Calibri"/>
               </a:rPr>
               <a:t>Automation</a:t>
             </a:r>
@@ -27005,7 +27005,7 @@
                 <a:solidFill>
                   <a:srgbClr val="9A5C12"/>
                 </a:solidFill>
-                <a:latin typeface="Inter"/>
+                <a:latin typeface="Calibri"/>
               </a:rPr>
               <a:t>The work the platform does for you</a:t>
             </a:r>
@@ -27024,7 +27024,7 @@
                 <a:solidFill>
                   <a:srgbClr val="595959"/>
                 </a:solidFill>
-                <a:latin typeface="Inter"/>
+                <a:latin typeface="Calibri"/>
               </a:rPr>
               <a:t>30/60/90-day renewal reminders · approved request auto-writes to the catalogue · renewals pre-fill from it · PII/PHI auto-classification · duplicate-buy detection at intake.</a:t>
             </a:r>
@@ -27206,7 +27206,7 @@
                 <a:solidFill>
                   <a:srgbClr val="FFFFFF"/>
                 </a:solidFill>
-                <a:latin typeface="Inter"/>
+                <a:latin typeface="Calibri"/>
               </a:rPr>
               <a:t>03</a:t>
             </a:r>
@@ -27248,7 +27248,7 @@
                 <a:solidFill>
                   <a:srgbClr val="09131B"/>
                 </a:solidFill>
-                <a:latin typeface="Inter"/>
+                <a:latin typeface="Calibri"/>
               </a:rPr>
               <a:t>Intelligence</a:t>
             </a:r>
@@ -27267,7 +27267,7 @@
                 <a:solidFill>
                   <a:srgbClr val="1E7F4F"/>
                 </a:solidFill>
-                <a:latin typeface="Inter"/>
+                <a:latin typeface="Calibri"/>
               </a:rPr>
               <a:t>The decision layer on top</a:t>
             </a:r>
@@ -27286,7 +27286,7 @@
                 <a:solidFill>
                   <a:srgbClr val="595959"/>
                 </a:solidFill>
-                <a:latin typeface="Inter"/>
+                <a:latin typeface="Calibri"/>
               </a:rPr>
               <a:t>Cross-tool signals · renewal prediction · vendor concentration &amp; value analytics (Vendor Hub Plus) · natural-language Ask Atlas across the estate.</a:t>
             </a:r>
@@ -27372,7 +27372,7 @@
                 <a:solidFill>
                   <a:srgbClr val="A9AFB6"/>
                 </a:solidFill>
-                <a:latin typeface="Inter"/>
+                <a:latin typeface="Calibri"/>
               </a:rPr>
               <a:t>Cortex Atlas  ·  Illustrative prototype, synthetic data  ·  Confidential</a:t>
             </a:r>
@@ -27414,7 +27414,7 @@
                 <a:solidFill>
                   <a:srgbClr val="A9AFB6"/>
                 </a:solidFill>
-                <a:latin typeface="Inter"/>
+                <a:latin typeface="Calibri"/>
               </a:rPr>
               <a:t>5</a:t>
             </a:r>
@@ -27526,7 +27526,7 @@
                 <a:solidFill>
                   <a:srgbClr val="F89739"/>
                 </a:solidFill>
-                <a:latin typeface="Inter"/>
+                <a:latin typeface="Calibri"/>
               </a:rPr>
               <a:t>INSIDE THE PLATFORM</a:t>
             </a:r>
@@ -27568,7 +27568,7 @@
                 <a:solidFill>
                   <a:srgbClr val="FFFFFF"/>
                 </a:solidFill>
-                <a:latin typeface="Inter"/>
+                <a:latin typeface="Calibri"/>
               </a:rPr>
               <a:t>A guided walk through the five tools</a:t>
             </a:r>
@@ -27610,7 +27610,7 @@
                 <a:solidFill>
                   <a:srgbClr val="A9AFB6"/>
                 </a:solidFill>
-                <a:latin typeface="Inter"/>
+                <a:latin typeface="Calibri"/>
               </a:rPr>
               <a:t>Each tool keeps its real-world job — then carries the automation and intelligence that belong to it.</a:t>
             </a:r>
@@ -27652,7 +27652,7 @@
                 <a:solidFill>
                   <a:srgbClr val="3A4A54"/>
                 </a:solidFill>
-                <a:latin typeface="Inter"/>
+                <a:latin typeface="Calibri"/>
               </a:rPr>
               <a:t>03 / 06</a:t>
             </a:r>

--- a/Cortex-Atlas-Client-Deck.pptx
+++ b/Cortex-Atlas-Client-Deck.pptx
@@ -28,6 +28,7 @@
     <p:sldId id="276" r:id="rId28"/>
     <p:sldId id="277" r:id="rId29"/>
     <p:sldId id="278" r:id="rId30"/>
+    <p:sldId id="279" r:id="rId31"/>
   </p:sldIdLst>
   <p:sldSz cx="12191695" cy="6858000" type="screen4x3"/>
   <p:notesSz cx="6858000" cy="9144000"/>
@@ -594,7 +595,7 @@
           <a:lstStyle/>
           <a:p>
             <a:r>
-              <a:t>This is the front door — the highest-value place to stop waste, because it's before the money is spent. Three things to land: (1) the role-gating means one form, not a relay of emails, and each persona sees only what they should — demo the Requester/Regional/Committee/Admin toggle. (2) The two automations kill the re-keying that causes catalogue drift today. (3) The duplicate flag is the headline — show DP-2042 overlapping the existing Oncology EMR asset. That one flag can pay for the platform. Reinforce: the flag is advisory; a human decides.</a:t>
+              <a:t>This is the front door — the highest-value place to stop waste, because it's before the money is spent. Land three things: (1) the form is status-driven — on submit it auto-routes by national/sub-national and the divisional cost threshold, and each reviewer tab (Admin, region-scoped Regional, CDS committee of regional+global reviewers, Admin final) opens progressively and is visible only to that role — demo the Requester/Admin/Regional/Global toggle. (2) Automation kills the re-keying that causes catalogue drift; on approval the record moves to the catalogue as a draft to complete. (3) The duplicate flag is the headline — show DP-2042 overlapping the existing Oncology EMR asset. That one flag can pay for the platform. The flag is advisory; a human decides. (This mirrors the live CDSP-DPRH portal.)</a:t>
             </a:r>
           </a:p>
         </p:txBody>
@@ -1014,7 +1015,7 @@
           <a:lstStyle/>
           <a:p>
             <a:r>
-              <a:t>This is where the pieces become a decision layer. Left: Atlas doesn't make you hunt — it pushes the handful of cross-tool issues that need a decision, ranked by stakes, each linking to the record. Right: for everything else, ask in plain English and it reads across all five tools. Demo one chip live. Crucial trust message for a pharma audience: it's grounded (no hallucinated numbers — it cites the source rows), it shows its confidence, and it's advisory only — a human always approves. No autonomous decisions. That sentence often unlocks the room.</a:t>
+              <a:t>This is the slide that answers 'what have you enhanced?' across the board. Read it as: every one of the five tools keeps its as-is job (Layer 1) and now carries Layer 2 automation and Layer 3 intelligence — not just one or two tools. Point out the consistent pattern: each has automation that removes manual effort, an AI/analytics capability, a dashboard view, and Ask Atlas. The bottom line is the next-gen integration story — cross-connectivity between tools, a unified dashboard layer, and AI (Azure OpenAI) woven in. Reassure: every AI output stays advisory with a human in the loop.</a:t>
             </a:r>
           </a:p>
         </p:txBody>
@@ -1084,7 +1085,7 @@
           <a:lstStyle/>
           <a:p>
             <a:r>
-              <a:t>Transition from 'what it does' to 'why it pays and how we deliver.' Keep momentum — the demo has done the convincing; now make it easy to say yes.</a:t>
+              <a:t>This is where the pieces become a decision layer. Left: Atlas doesn't make you hunt — it pushes the handful of cross-tool issues that need a decision, ranked by stakes, each linking to the record. Right: for everything else, ask in plain English and it reads across all five tools. Demo one chip live. Crucial trust message for a pharma audience: it's grounded (no hallucinated numbers — it cites the source rows), it shows its confidence, and it's advisory only — a human always approves. No autonomous decisions. That sentence often unlocks the room.</a:t>
             </a:r>
           </a:p>
         </p:txBody>
@@ -1154,7 +1155,7 @@
           <a:lstStyle/>
           <a:p>
             <a:r>
-              <a:t>Translate features into outcomes and name the owner who cares about each — that's how you build a coalition of sponsors in the room. Lead with 'stop duplicate spend' and 'never miss a renewal' because they're the easiest to quantify in a baseline audit. If asked for ROI numbers, be honest: the prototype shows the mechanism; the baseline audit (next steps) quantifies it against their actual spend and agreements. Avoid over-claiming hard figures on synthetic data.</a:t>
+              <a:t>Transition from 'what it does' to 'why it pays and how we deliver.' Keep momentum — the demo has done the convincing; now make it easy to say yes.</a:t>
             </a:r>
           </a:p>
         </p:txBody>
@@ -1224,7 +1225,7 @@
           <a:lstStyle/>
           <a:p>
             <a:r>
-              <a:t>Reassure IT and architecture stakeholders. Two messages. Left: the prototype is deliberately a single offline file so anyone can evaluate it without procurement or installs — and it reuses the proven Cortex pattern, so it's not bespoke risk. Right: the production target maps cleanly onto tools they already own and trust — SharePoint, Power Automate, Purview, Azure OpenAI. We're not asking them to adopt a new platform; we're orchestrating their existing Microsoft estate. That lowers security, procurement and change-management friction enormously.</a:t>
+              <a:t>Translate features into outcomes and name the owner who cares about each — that's how you build a coalition of sponsors in the room. Lead with 'stop duplicate spend' and 'never miss a renewal' because they're the easiest to quantify in a baseline audit. If asked for ROI numbers, be honest: the prototype shows the mechanism; the baseline audit (next steps) quantifies it against their actual spend and agreements. Avoid over-claiming hard figures on synthetic data.</a:t>
             </a:r>
           </a:p>
         </p:txBody>
@@ -1364,7 +1365,7 @@
           <a:lstStyle/>
           <a:p>
             <a:r>
-              <a:t>Phasing makes a big programme feel safe and fundable. Key reframe: although we're showing all three layers working today in the prototype, we deliver them in sequence so the client gets usable value early and each phase proves the ground for the next. Phase 1 alone — connected tools with real cross-links — already beats today. Don't commit to calendar durations here unless you've scoped them; talk in phases and let the next-steps/scoping conversation set dates.</a:t>
+              <a:t>Reassure IT and architecture stakeholders. Two messages. Left: the prototype is deliberately a single offline file so anyone can evaluate it without procurement or installs — and it reuses the proven Cortex pattern, so it's not bespoke risk. Right: the production target maps cleanly onto tools they already own and trust — SharePoint, Power Automate, Purview, Azure OpenAI. We're not asking them to adopt a new platform; we're orchestrating their existing Microsoft estate. That lowers security, procurement and change-management friction enormously.</a:t>
             </a:r>
           </a:p>
         </p:txBody>
@@ -1434,7 +1435,7 @@
           <a:lstStyle/>
           <a:p>
             <a:r>
-              <a:t>Pre-empt the 'why you / why this way' questions. The strongest card is the first — this isn't a science project; it's the same pattern we've already shipped as other Cortex modules, so the delivery risk is low. Pair that with 'it runs on what you already own' and 'you can try it today' and you've removed the three usual objections: risk, cost of change, and uncertainty. Keep this brisk; it's reinforcement before the ask.</a:t>
+              <a:t>Phasing makes a big programme feel safe and fundable. Key reframe: although we're showing all three layers working today in the prototype, we deliver them in sequence so the client gets usable value early and each phase proves the ground for the next. Phase 1 alone — connected tools with real cross-links — already beats today. Don't commit to calendar durations here unless you've scoped them; talk in phases and let the next-steps/scoping conversation set dates.</a:t>
             </a:r>
           </a:p>
         </p:txBody>
@@ -1504,7 +1505,7 @@
           <a:lstStyle/>
           <a:p>
             <a:r>
-              <a:t>Close with a clear, low-commitment ask: the next step is just a live walkthrough with their people — easy to say yes to. The baseline audit is the real hook: it converts every illustrative number in this deck into their actual exposure, which is what unlocks budget. End by inviting them into the prototype — finish on the product, not a slide. Hand over to the live demo or open for questions.</a:t>
+              <a:t>Pre-empt the 'why you / why this way' questions. The strongest card is the first — this isn't a science project; it's the same pattern we've already shipped as other Cortex modules, so the delivery risk is low. Pair that with 'it runs on what you already own' and 'you can try it today' and you've removed the three usual objections: risk, cost of change, and uncertainty. Keep this brisk; it's reinforcement before the ask.</a:t>
             </a:r>
           </a:p>
         </p:txBody>
@@ -1530,6 +1531,76 @@
 </file>
 
 <file path=ppt/notesSlides/notesSlide23.xml><?xml version="1.0" encoding="utf-8"?>
+<p:notes xmlns:a="http://schemas.openxmlformats.org/drawingml/2006/main" xmlns:p="http://schemas.openxmlformats.org/presentationml/2006/main" xmlns:r="http://schemas.openxmlformats.org/officeDocument/2006/relationships">
+  <p:cSld>
+    <p:spTree>
+      <p:nvGrpSpPr>
+        <p:cNvPr id="1" name=""/>
+        <p:cNvGrpSpPr/>
+        <p:nvPr/>
+      </p:nvGrpSpPr>
+      <p:grpSpPr>
+        <a:xfrm>
+          <a:off x="0" y="0"/>
+          <a:ext cx="0" cy="0"/>
+          <a:chOff x="0" y="0"/>
+          <a:chExt cx="0" cy="0"/>
+        </a:xfrm>
+      </p:grpSpPr>
+      <p:sp>
+        <p:nvSpPr>
+          <p:cNvPr id="2" name="Slide Image Placeholder 1"/>
+          <p:cNvSpPr>
+            <a:spLocks noGrp="1"/>
+          </p:cNvSpPr>
+          <p:nvPr>
+            <p:ph type="sldImg" idx="2"/>
+          </p:nvPr>
+        </p:nvSpPr>
+        <p:spPr/>
+      </p:sp>
+      <p:sp>
+        <p:nvSpPr>
+          <p:cNvPr id="3" name="Notes Placeholder 2"/>
+          <p:cNvSpPr>
+            <a:spLocks noGrp="1"/>
+          </p:cNvSpPr>
+          <p:nvPr>
+            <p:ph type="body" idx="3" sz="quarter"/>
+          </p:nvPr>
+        </p:nvSpPr>
+        <p:spPr/>
+        <p:txBody>
+          <a:bodyPr/>
+          <a:lstStyle/>
+          <a:p>
+            <a:r>
+              <a:t>Close with a clear, low-commitment ask: the next step is just a live walkthrough with their people — easy to say yes to. The baseline audit is the real hook: it converts every illustrative number in this deck into their actual exposure, which is what unlocks budget. End by inviting them into the prototype — finish on the product, not a slide. Hand over to the live demo or open for questions.</a:t>
+            </a:r>
+          </a:p>
+        </p:txBody>
+      </p:sp>
+      <p:sp>
+        <p:nvSpPr>
+          <p:cNvPr id="4" name="Slide Number Placeholder 3"/>
+          <p:cNvSpPr>
+            <a:spLocks noGrp="1"/>
+          </p:cNvSpPr>
+          <p:nvPr>
+            <p:ph type="sldNum" idx="5" sz="quarter"/>
+          </p:nvPr>
+        </p:nvSpPr>
+        <p:spPr/>
+      </p:sp>
+    </p:spTree>
+  </p:cSld>
+  <p:clrMapOvr>
+    <a:masterClrMapping/>
+  </p:clrMapOvr>
+</p:notes>
+</file>
+
+<file path=ppt/notesSlides/notesSlide24.xml><?xml version="1.0" encoding="utf-8"?>
 <p:notes xmlns:a="http://schemas.openxmlformats.org/drawingml/2006/main" xmlns:p="http://schemas.openxmlformats.org/presentationml/2006/main" xmlns:r="http://schemas.openxmlformats.org/officeDocument/2006/relationships">
   <p:cSld>
     <p:spTree>
@@ -5793,7 +5864,7 @@
                 </a:solidFill>
                 <a:latin typeface="Calibri"/>
               </a:rPr>
-              <a:t>Role-gated approval</a:t>
+              <a:t>Status-driven &amp; role-gated</a:t>
             </a:r>
           </a:p>
           <a:p>
@@ -5812,7 +5883,7 @@
                 </a:solidFill>
                 <a:latin typeface="Calibri"/>
               </a:rPr>
-              <a:t>A single form raises the request; reviewers see only their section. Routes Requester → Regional + Admin → Committee → Admin final, by national/sub-national scope and cost threshold.</a:t>
+              <a:t>Status is set automatically on submit from national/sub-national + cost threshold (e.g. National above → In data sourcing pre review). Reviewer tabs open progressively: Admin → Regional (region-scoped) → CDS committee (regional + global) → Admin final.</a:t>
             </a:r>
           </a:p>
         </p:txBody>
@@ -6009,7 +6080,7 @@
                 </a:solidFill>
                 <a:latin typeface="Calibri"/>
               </a:rPr>
-              <a:t>On renewal the form pre-fills from the catalogue; once purchased, one click writes every field back into the catalogue — no re-keying, no drift.</a:t>
+              <a:t>Renewals pre-fill from the catalogue; on approval, Move to Catalogue lands the record there as a draft to complete — no re-keying, no drift. Power Automate notifications throughout.</a:t>
             </a:r>
           </a:p>
         </p:txBody>
@@ -13546,7 +13617,7 @@
                 </a:solidFill>
                 <a:latin typeface="Calibri"/>
               </a:rPr>
-              <a:t>THE DECISION LAYER</a:t>
+              <a:t>ENHANCEMENTS</a:t>
             </a:r>
           </a:p>
         </p:txBody>
@@ -13588,21 +13659,147 @@
                 </a:solidFill>
                 <a:latin typeface="Calibri"/>
               </a:rPr>
-              <a:t>Cross-tool intelligence and a natural-language ask</a:t>
-            </a:r>
-          </a:p>
-        </p:txBody>
-      </p:sp>
-      <p:sp>
-        <p:nvSpPr>
-          <p:cNvPr id="5" name="Rounded Rectangle 4"/>
+              <a:t>Automation and intelligence — built into every tool</a:t>
+            </a:r>
+          </a:p>
+        </p:txBody>
+      </p:sp>
+      <p:sp>
+        <p:nvSpPr>
+          <p:cNvPr id="5" name="TextBox 4"/>
+          <p:cNvSpPr txBox="1"/>
+          <p:nvPr/>
+        </p:nvSpPr>
+        <p:spPr>
+          <a:xfrm>
+            <a:off x="685800" y="1755648"/>
+            <a:ext cx="2286000" cy="274320"/>
+          </a:xfrm>
+          <a:prstGeom prst="rect">
+            <a:avLst/>
+          </a:prstGeom>
+          <a:noFill/>
+        </p:spPr>
+        <p:txBody>
+          <a:bodyPr wrap="square" anchor="t" lIns="0" rIns="0" tIns="0" bIns="0">
+            <a:spAutoFit/>
+          </a:bodyPr>
+          <a:lstStyle/>
+          <a:p>
+            <a:pPr algn="l">
+              <a:spcBef>
+                <a:spcPts val="0"/>
+              </a:spcBef>
+              <a:spcAft>
+                <a:spcPts val="0"/>
+              </a:spcAft>
+            </a:pPr>
+            <a:r>
+              <a:rPr sz="1050" b="1" i="0">
+                <a:solidFill>
+                  <a:srgbClr val="595959"/>
+                </a:solidFill>
+                <a:latin typeface="Calibri"/>
+              </a:rPr>
+              <a:t>TOOL</a:t>
+            </a:r>
+          </a:p>
+        </p:txBody>
+      </p:sp>
+      <p:sp>
+        <p:nvSpPr>
+          <p:cNvPr id="6" name="TextBox 5"/>
+          <p:cNvSpPr txBox="1"/>
+          <p:nvPr/>
+        </p:nvSpPr>
+        <p:spPr>
+          <a:xfrm>
+            <a:off x="3017520" y="1755648"/>
+            <a:ext cx="4206240" cy="274320"/>
+          </a:xfrm>
+          <a:prstGeom prst="rect">
+            <a:avLst/>
+          </a:prstGeom>
+          <a:noFill/>
+        </p:spPr>
+        <p:txBody>
+          <a:bodyPr wrap="square" anchor="t" lIns="0" rIns="0" tIns="0" bIns="0">
+            <a:spAutoFit/>
+          </a:bodyPr>
+          <a:lstStyle/>
+          <a:p>
+            <a:pPr algn="l">
+              <a:spcBef>
+                <a:spcPts val="0"/>
+              </a:spcBef>
+              <a:spcAft>
+                <a:spcPts val="0"/>
+              </a:spcAft>
+            </a:pPr>
+            <a:r>
+              <a:rPr sz="1050" b="1" i="0">
+                <a:solidFill>
+                  <a:srgbClr val="0563C1"/>
+                </a:solidFill>
+                <a:latin typeface="Calibri"/>
+              </a:rPr>
+              <a:t>AUTOMATION (Layer 2)</a:t>
+            </a:r>
+          </a:p>
+        </p:txBody>
+      </p:sp>
+      <p:sp>
+        <p:nvSpPr>
+          <p:cNvPr id="7" name="TextBox 6"/>
+          <p:cNvSpPr txBox="1"/>
+          <p:nvPr/>
+        </p:nvSpPr>
+        <p:spPr>
+          <a:xfrm>
+            <a:off x="7360920" y="1755648"/>
+            <a:ext cx="4206240" cy="274320"/>
+          </a:xfrm>
+          <a:prstGeom prst="rect">
+            <a:avLst/>
+          </a:prstGeom>
+          <a:noFill/>
+        </p:spPr>
+        <p:txBody>
+          <a:bodyPr wrap="square" anchor="t" lIns="0" rIns="0" tIns="0" bIns="0">
+            <a:spAutoFit/>
+          </a:bodyPr>
+          <a:lstStyle/>
+          <a:p>
+            <a:pPr algn="l">
+              <a:spcBef>
+                <a:spcPts val="0"/>
+              </a:spcBef>
+              <a:spcAft>
+                <a:spcPts val="0"/>
+              </a:spcAft>
+            </a:pPr>
+            <a:r>
+              <a:rPr sz="1050" b="1" i="0">
+                <a:solidFill>
+                  <a:srgbClr val="9A5C12"/>
+                </a:solidFill>
+                <a:latin typeface="Calibri"/>
+              </a:rPr>
+              <a:t>INTELLIGENCE &amp; NEXT-GEN (Layer 3)</a:t>
+            </a:r>
+          </a:p>
+        </p:txBody>
+      </p:sp>
+      <p:sp>
+        <p:nvSpPr>
+          <p:cNvPr id="8" name="Rounded Rectangle 7"/>
           <p:cNvSpPr/>
           <p:nvPr/>
         </p:nvSpPr>
         <p:spPr>
           <a:xfrm>
-            <a:off x="685800" y="1828800"/>
-            <a:ext cx="5486400" cy="4023360"/>
+            <a:off x="685800" y="2121408"/>
+            <a:ext cx="10972800" cy="658368"/>
           </a:xfrm>
           <a:prstGeom prst="roundRect">
             <a:avLst>
@@ -13643,6 +13840,1430 @@
       </p:sp>
       <p:sp>
         <p:nvSpPr>
+          <p:cNvPr id="9" name="Rounded Rectangle 8"/>
+          <p:cNvSpPr/>
+          <p:nvPr/>
+        </p:nvSpPr>
+        <p:spPr>
+          <a:xfrm>
+            <a:off x="685800" y="2121408"/>
+            <a:ext cx="91440" cy="658368"/>
+          </a:xfrm>
+          <a:prstGeom prst="roundRect">
+            <a:avLst>
+              <a:gd name="adj" fmla="val 50000"/>
+            </a:avLst>
+          </a:prstGeom>
+          <a:solidFill>
+            <a:srgbClr val="F89739"/>
+          </a:solidFill>
+          <a:ln>
+            <a:noFill/>
+          </a:ln>
+          <a:effectLst/>
+        </p:spPr>
+        <p:style>
+          <a:lnRef idx="1">
+            <a:schemeClr val="accent1"/>
+          </a:lnRef>
+          <a:fillRef idx="3">
+            <a:schemeClr val="accent1"/>
+          </a:fillRef>
+          <a:effectRef idx="2">
+            <a:schemeClr val="accent1"/>
+          </a:effectRef>
+          <a:fontRef idx="minor">
+            <a:schemeClr val="lt1"/>
+          </a:fontRef>
+        </p:style>
+        <p:txBody>
+          <a:bodyPr rtlCol="0" anchor="ctr"/>
+          <a:lstStyle/>
+          <a:p>
+            <a:pPr algn="ctr"/>
+          </a:p>
+        </p:txBody>
+      </p:sp>
+      <p:sp>
+        <p:nvSpPr>
+          <p:cNvPr id="10" name="TextBox 9"/>
+          <p:cNvSpPr txBox="1"/>
+          <p:nvPr/>
+        </p:nvSpPr>
+        <p:spPr>
+          <a:xfrm>
+            <a:off x="905256" y="2194560"/>
+            <a:ext cx="2103120" cy="530352"/>
+          </a:xfrm>
+          <a:prstGeom prst="rect">
+            <a:avLst/>
+          </a:prstGeom>
+          <a:noFill/>
+        </p:spPr>
+        <p:txBody>
+          <a:bodyPr wrap="square" anchor="ctr" lIns="0" rIns="0" tIns="0" bIns="0">
+            <a:spAutoFit/>
+          </a:bodyPr>
+          <a:lstStyle/>
+          <a:p>
+            <a:pPr algn="l">
+              <a:spcBef>
+                <a:spcPts val="0"/>
+              </a:spcBef>
+              <a:spcAft>
+                <a:spcPts val="0"/>
+              </a:spcAft>
+            </a:pPr>
+            <a:r>
+              <a:rPr sz="1250" b="1" i="0">
+                <a:solidFill>
+                  <a:srgbClr val="09131B"/>
+                </a:solidFill>
+                <a:latin typeface="Calibri"/>
+              </a:rPr>
+              <a:t>Data Requests</a:t>
+            </a:r>
+          </a:p>
+        </p:txBody>
+      </p:sp>
+      <p:sp>
+        <p:nvSpPr>
+          <p:cNvPr id="11" name="TextBox 10"/>
+          <p:cNvSpPr txBox="1"/>
+          <p:nvPr/>
+        </p:nvSpPr>
+        <p:spPr>
+          <a:xfrm>
+            <a:off x="3017520" y="2194560"/>
+            <a:ext cx="4206240" cy="530352"/>
+          </a:xfrm>
+          <a:prstGeom prst="rect">
+            <a:avLst/>
+          </a:prstGeom>
+          <a:noFill/>
+        </p:spPr>
+        <p:txBody>
+          <a:bodyPr wrap="square" anchor="ctr" lIns="0" rIns="0" tIns="0" bIns="0">
+            <a:spAutoFit/>
+          </a:bodyPr>
+          <a:lstStyle/>
+          <a:p>
+            <a:pPr algn="l">
+              <a:spcBef>
+                <a:spcPts val="0"/>
+              </a:spcBef>
+              <a:spcAft>
+                <a:spcPts val="0"/>
+              </a:spcAft>
+            </a:pPr>
+            <a:r>
+              <a:rPr sz="1030" b="0" i="0">
+                <a:solidFill>
+                  <a:srgbClr val="595959"/>
+                </a:solidFill>
+                <a:latin typeface="Calibri"/>
+              </a:rPr>
+              <a:t>Auto-status routing · renewal pre-fill · move-to-catalogue (draft) · Power Automate alerts</a:t>
+            </a:r>
+          </a:p>
+        </p:txBody>
+      </p:sp>
+      <p:sp>
+        <p:nvSpPr>
+          <p:cNvPr id="12" name="TextBox 11"/>
+          <p:cNvSpPr txBox="1"/>
+          <p:nvPr/>
+        </p:nvSpPr>
+        <p:spPr>
+          <a:xfrm>
+            <a:off x="7360920" y="2194560"/>
+            <a:ext cx="4206240" cy="530352"/>
+          </a:xfrm>
+          <a:prstGeom prst="rect">
+            <a:avLst/>
+          </a:prstGeom>
+          <a:noFill/>
+        </p:spPr>
+        <p:txBody>
+          <a:bodyPr wrap="square" anchor="ctr" lIns="0" rIns="0" tIns="0" bIns="0">
+            <a:spAutoFit/>
+          </a:bodyPr>
+          <a:lstStyle/>
+          <a:p>
+            <a:pPr algn="l">
+              <a:spcBef>
+                <a:spcPts val="0"/>
+              </a:spcBef>
+              <a:spcAft>
+                <a:spcPts val="0"/>
+              </a:spcAft>
+            </a:pPr>
+            <a:r>
+              <a:rPr sz="1030" b="0" i="0">
+                <a:solidFill>
+                  <a:srgbClr val="595959"/>
+                </a:solidFill>
+                <a:latin typeface="Calibri"/>
+              </a:rPr>
+              <a:t>Duplicate-buy detection · approval-likelihood · status dashboard · Ask Atlas</a:t>
+            </a:r>
+          </a:p>
+        </p:txBody>
+      </p:sp>
+      <p:sp>
+        <p:nvSpPr>
+          <p:cNvPr id="13" name="Rounded Rectangle 12"/>
+          <p:cNvSpPr/>
+          <p:nvPr/>
+        </p:nvSpPr>
+        <p:spPr>
+          <a:xfrm>
+            <a:off x="685800" y="2871216"/>
+            <a:ext cx="10972800" cy="658368"/>
+          </a:xfrm>
+          <a:prstGeom prst="roundRect">
+            <a:avLst>
+              <a:gd name="adj" fmla="val 6000"/>
+            </a:avLst>
+          </a:prstGeom>
+          <a:solidFill>
+            <a:srgbClr val="FFFFFF"/>
+          </a:solidFill>
+          <a:ln w="12700">
+            <a:solidFill>
+              <a:srgbClr val="D6DCE4"/>
+            </a:solidFill>
+          </a:ln>
+          <a:effectLst/>
+        </p:spPr>
+        <p:style>
+          <a:lnRef idx="1">
+            <a:schemeClr val="accent1"/>
+          </a:lnRef>
+          <a:fillRef idx="3">
+            <a:schemeClr val="accent1"/>
+          </a:fillRef>
+          <a:effectRef idx="2">
+            <a:schemeClr val="accent1"/>
+          </a:effectRef>
+          <a:fontRef idx="minor">
+            <a:schemeClr val="lt1"/>
+          </a:fontRef>
+        </p:style>
+        <p:txBody>
+          <a:bodyPr rtlCol="0" anchor="ctr"/>
+          <a:lstStyle/>
+          <a:p>
+            <a:pPr algn="ctr"/>
+          </a:p>
+        </p:txBody>
+      </p:sp>
+      <p:sp>
+        <p:nvSpPr>
+          <p:cNvPr id="14" name="Rounded Rectangle 13"/>
+          <p:cNvSpPr/>
+          <p:nvPr/>
+        </p:nvSpPr>
+        <p:spPr>
+          <a:xfrm>
+            <a:off x="685800" y="2871216"/>
+            <a:ext cx="91440" cy="658368"/>
+          </a:xfrm>
+          <a:prstGeom prst="roundRect">
+            <a:avLst>
+              <a:gd name="adj" fmla="val 50000"/>
+            </a:avLst>
+          </a:prstGeom>
+          <a:solidFill>
+            <a:srgbClr val="F89739"/>
+          </a:solidFill>
+          <a:ln>
+            <a:noFill/>
+          </a:ln>
+          <a:effectLst/>
+        </p:spPr>
+        <p:style>
+          <a:lnRef idx="1">
+            <a:schemeClr val="accent1"/>
+          </a:lnRef>
+          <a:fillRef idx="3">
+            <a:schemeClr val="accent1"/>
+          </a:fillRef>
+          <a:effectRef idx="2">
+            <a:schemeClr val="accent1"/>
+          </a:effectRef>
+          <a:fontRef idx="minor">
+            <a:schemeClr val="lt1"/>
+          </a:fontRef>
+        </p:style>
+        <p:txBody>
+          <a:bodyPr rtlCol="0" anchor="ctr"/>
+          <a:lstStyle/>
+          <a:p>
+            <a:pPr algn="ctr"/>
+          </a:p>
+        </p:txBody>
+      </p:sp>
+      <p:sp>
+        <p:nvSpPr>
+          <p:cNvPr id="15" name="TextBox 14"/>
+          <p:cNvSpPr txBox="1"/>
+          <p:nvPr/>
+        </p:nvSpPr>
+        <p:spPr>
+          <a:xfrm>
+            <a:off x="905256" y="2944368"/>
+            <a:ext cx="2103120" cy="530352"/>
+          </a:xfrm>
+          <a:prstGeom prst="rect">
+            <a:avLst/>
+          </a:prstGeom>
+          <a:noFill/>
+        </p:spPr>
+        <p:txBody>
+          <a:bodyPr wrap="square" anchor="ctr" lIns="0" rIns="0" tIns="0" bIns="0">
+            <a:spAutoFit/>
+          </a:bodyPr>
+          <a:lstStyle/>
+          <a:p>
+            <a:pPr algn="l">
+              <a:spcBef>
+                <a:spcPts val="0"/>
+              </a:spcBef>
+              <a:spcAft>
+                <a:spcPts val="0"/>
+              </a:spcAft>
+            </a:pPr>
+            <a:r>
+              <a:rPr sz="1250" b="1" i="0">
+                <a:solidFill>
+                  <a:srgbClr val="09131B"/>
+                </a:solidFill>
+                <a:latin typeface="Calibri"/>
+              </a:rPr>
+              <a:t>Data Catalogue</a:t>
+            </a:r>
+          </a:p>
+        </p:txBody>
+      </p:sp>
+      <p:sp>
+        <p:nvSpPr>
+          <p:cNvPr id="16" name="TextBox 15"/>
+          <p:cNvSpPr txBox="1"/>
+          <p:nvPr/>
+        </p:nvSpPr>
+        <p:spPr>
+          <a:xfrm>
+            <a:off x="3017520" y="2944368"/>
+            <a:ext cx="4206240" cy="530352"/>
+          </a:xfrm>
+          <a:prstGeom prst="rect">
+            <a:avLst/>
+          </a:prstGeom>
+          <a:noFill/>
+        </p:spPr>
+        <p:txBody>
+          <a:bodyPr wrap="square" anchor="ctr" lIns="0" rIns="0" tIns="0" bIns="0">
+            <a:spAutoFit/>
+          </a:bodyPr>
+          <a:lstStyle/>
+          <a:p>
+            <a:pPr algn="l">
+              <a:spcBef>
+                <a:spcPts val="0"/>
+              </a:spcBef>
+              <a:spcAft>
+                <a:spcPts val="0"/>
+              </a:spcAft>
+            </a:pPr>
+            <a:r>
+              <a:rPr sz="1030" b="0" i="0">
+                <a:solidFill>
+                  <a:srgbClr val="595959"/>
+                </a:solidFill>
+                <a:latin typeface="Calibri"/>
+              </a:rPr>
+              <a:t>PII/PHI auto-classification · approved-request sync · renewal read-back</a:t>
+            </a:r>
+          </a:p>
+        </p:txBody>
+      </p:sp>
+      <p:sp>
+        <p:nvSpPr>
+          <p:cNvPr id="17" name="TextBox 16"/>
+          <p:cNvSpPr txBox="1"/>
+          <p:nvPr/>
+        </p:nvSpPr>
+        <p:spPr>
+          <a:xfrm>
+            <a:off x="7360920" y="2944368"/>
+            <a:ext cx="4206240" cy="530352"/>
+          </a:xfrm>
+          <a:prstGeom prst="rect">
+            <a:avLst/>
+          </a:prstGeom>
+          <a:noFill/>
+        </p:spPr>
+        <p:txBody>
+          <a:bodyPr wrap="square" anchor="ctr" lIns="0" rIns="0" tIns="0" bIns="0">
+            <a:spAutoFit/>
+          </a:bodyPr>
+          <a:lstStyle/>
+          <a:p>
+            <a:pPr algn="l">
+              <a:spcBef>
+                <a:spcPts val="0"/>
+              </a:spcBef>
+              <a:spcAft>
+                <a:spcPts val="0"/>
+              </a:spcAft>
+            </a:pPr>
+            <a:r>
+              <a:rPr sz="1030" b="0" i="0">
+                <a:solidFill>
+                  <a:srgbClr val="595959"/>
+                </a:solidFill>
+                <a:latin typeface="Calibri"/>
+              </a:rPr>
+              <a:t>Quality-risk flags · overlap detection · quality dashboard · Ask Atlas</a:t>
+            </a:r>
+          </a:p>
+        </p:txBody>
+      </p:sp>
+      <p:sp>
+        <p:nvSpPr>
+          <p:cNvPr id="18" name="Rounded Rectangle 17"/>
+          <p:cNvSpPr/>
+          <p:nvPr/>
+        </p:nvSpPr>
+        <p:spPr>
+          <a:xfrm>
+            <a:off x="685800" y="3621024"/>
+            <a:ext cx="10972800" cy="658368"/>
+          </a:xfrm>
+          <a:prstGeom prst="roundRect">
+            <a:avLst>
+              <a:gd name="adj" fmla="val 6000"/>
+            </a:avLst>
+          </a:prstGeom>
+          <a:solidFill>
+            <a:srgbClr val="FFFFFF"/>
+          </a:solidFill>
+          <a:ln w="12700">
+            <a:solidFill>
+              <a:srgbClr val="D6DCE4"/>
+            </a:solidFill>
+          </a:ln>
+          <a:effectLst/>
+        </p:spPr>
+        <p:style>
+          <a:lnRef idx="1">
+            <a:schemeClr val="accent1"/>
+          </a:lnRef>
+          <a:fillRef idx="3">
+            <a:schemeClr val="accent1"/>
+          </a:fillRef>
+          <a:effectRef idx="2">
+            <a:schemeClr val="accent1"/>
+          </a:effectRef>
+          <a:fontRef idx="minor">
+            <a:schemeClr val="lt1"/>
+          </a:fontRef>
+        </p:style>
+        <p:txBody>
+          <a:bodyPr rtlCol="0" anchor="ctr"/>
+          <a:lstStyle/>
+          <a:p>
+            <a:pPr algn="ctr"/>
+          </a:p>
+        </p:txBody>
+      </p:sp>
+      <p:sp>
+        <p:nvSpPr>
+          <p:cNvPr id="19" name="Rounded Rectangle 18"/>
+          <p:cNvSpPr/>
+          <p:nvPr/>
+        </p:nvSpPr>
+        <p:spPr>
+          <a:xfrm>
+            <a:off x="685800" y="3621024"/>
+            <a:ext cx="91440" cy="658368"/>
+          </a:xfrm>
+          <a:prstGeom prst="roundRect">
+            <a:avLst>
+              <a:gd name="adj" fmla="val 50000"/>
+            </a:avLst>
+          </a:prstGeom>
+          <a:solidFill>
+            <a:srgbClr val="F89739"/>
+          </a:solidFill>
+          <a:ln>
+            <a:noFill/>
+          </a:ln>
+          <a:effectLst/>
+        </p:spPr>
+        <p:style>
+          <a:lnRef idx="1">
+            <a:schemeClr val="accent1"/>
+          </a:lnRef>
+          <a:fillRef idx="3">
+            <a:schemeClr val="accent1"/>
+          </a:fillRef>
+          <a:effectRef idx="2">
+            <a:schemeClr val="accent1"/>
+          </a:effectRef>
+          <a:fontRef idx="minor">
+            <a:schemeClr val="lt1"/>
+          </a:fontRef>
+        </p:style>
+        <p:txBody>
+          <a:bodyPr rtlCol="0" anchor="ctr"/>
+          <a:lstStyle/>
+          <a:p>
+            <a:pPr algn="ctr"/>
+          </a:p>
+        </p:txBody>
+      </p:sp>
+      <p:sp>
+        <p:nvSpPr>
+          <p:cNvPr id="20" name="TextBox 19"/>
+          <p:cNvSpPr txBox="1"/>
+          <p:nvPr/>
+        </p:nvSpPr>
+        <p:spPr>
+          <a:xfrm>
+            <a:off x="905256" y="3694176"/>
+            <a:ext cx="2103120" cy="530352"/>
+          </a:xfrm>
+          <a:prstGeom prst="rect">
+            <a:avLst/>
+          </a:prstGeom>
+          <a:noFill/>
+        </p:spPr>
+        <p:txBody>
+          <a:bodyPr wrap="square" anchor="ctr" lIns="0" rIns="0" tIns="0" bIns="0">
+            <a:spAutoFit/>
+          </a:bodyPr>
+          <a:lstStyle/>
+          <a:p>
+            <a:pPr algn="l">
+              <a:spcBef>
+                <a:spcPts val="0"/>
+              </a:spcBef>
+              <a:spcAft>
+                <a:spcPts val="0"/>
+              </a:spcAft>
+            </a:pPr>
+            <a:r>
+              <a:rPr sz="1250" b="1" i="0">
+                <a:solidFill>
+                  <a:srgbClr val="09131B"/>
+                </a:solidFill>
+                <a:latin typeface="Calibri"/>
+              </a:rPr>
+              <a:t>KPI Catalogue</a:t>
+            </a:r>
+          </a:p>
+        </p:txBody>
+      </p:sp>
+      <p:sp>
+        <p:nvSpPr>
+          <p:cNvPr id="21" name="TextBox 20"/>
+          <p:cNvSpPr txBox="1"/>
+          <p:nvPr/>
+        </p:nvSpPr>
+        <p:spPr>
+          <a:xfrm>
+            <a:off x="3017520" y="3694176"/>
+            <a:ext cx="4206240" cy="530352"/>
+          </a:xfrm>
+          <a:prstGeom prst="rect">
+            <a:avLst/>
+          </a:prstGeom>
+          <a:noFill/>
+        </p:spPr>
+        <p:txBody>
+          <a:bodyPr wrap="square" anchor="ctr" lIns="0" rIns="0" tIns="0" bIns="0">
+            <a:spAutoFit/>
+          </a:bodyPr>
+          <a:lstStyle/>
+          <a:p>
+            <a:pPr algn="l">
+              <a:spcBef>
+                <a:spcPts val="0"/>
+              </a:spcBef>
+              <a:spcAft>
+                <a:spcPts val="0"/>
+              </a:spcAft>
+            </a:pPr>
+            <a:r>
+              <a:rPr sz="1030" b="0" i="0">
+                <a:solidFill>
+                  <a:srgbClr val="595959"/>
+                </a:solidFill>
+                <a:latin typeface="Calibri"/>
+              </a:rPr>
+              <a:t>Lineage auto-resolve · retirement propagation</a:t>
+            </a:r>
+          </a:p>
+        </p:txBody>
+      </p:sp>
+      <p:sp>
+        <p:nvSpPr>
+          <p:cNvPr id="22" name="TextBox 21"/>
+          <p:cNvSpPr txBox="1"/>
+          <p:nvPr/>
+        </p:nvSpPr>
+        <p:spPr>
+          <a:xfrm>
+            <a:off x="7360920" y="3694176"/>
+            <a:ext cx="4206240" cy="530352"/>
+          </a:xfrm>
+          <a:prstGeom prst="rect">
+            <a:avLst/>
+          </a:prstGeom>
+          <a:noFill/>
+        </p:spPr>
+        <p:txBody>
+          <a:bodyPr wrap="square" anchor="ctr" lIns="0" rIns="0" tIns="0" bIns="0">
+            <a:spAutoFit/>
+          </a:bodyPr>
+          <a:lstStyle/>
+          <a:p>
+            <a:pPr algn="l">
+              <a:spcBef>
+                <a:spcPts val="0"/>
+              </a:spcBef>
+              <a:spcAft>
+                <a:spcPts val="0"/>
+              </a:spcAft>
+            </a:pPr>
+            <a:r>
+              <a:rPr sz="1030" b="0" i="0">
+                <a:solidFill>
+                  <a:srgbClr val="595959"/>
+                </a:solidFill>
+                <a:latin typeface="Calibri"/>
+              </a:rPr>
+              <a:t>Source quality-risk · impact analysis · scope dashboard · Ask Atlas</a:t>
+            </a:r>
+          </a:p>
+        </p:txBody>
+      </p:sp>
+      <p:sp>
+        <p:nvSpPr>
+          <p:cNvPr id="23" name="Rounded Rectangle 22"/>
+          <p:cNvSpPr/>
+          <p:nvPr/>
+        </p:nvSpPr>
+        <p:spPr>
+          <a:xfrm>
+            <a:off x="685800" y="4370832"/>
+            <a:ext cx="10972800" cy="658368"/>
+          </a:xfrm>
+          <a:prstGeom prst="roundRect">
+            <a:avLst>
+              <a:gd name="adj" fmla="val 6000"/>
+            </a:avLst>
+          </a:prstGeom>
+          <a:solidFill>
+            <a:srgbClr val="FFFFFF"/>
+          </a:solidFill>
+          <a:ln w="12700">
+            <a:solidFill>
+              <a:srgbClr val="D6DCE4"/>
+            </a:solidFill>
+          </a:ln>
+          <a:effectLst/>
+        </p:spPr>
+        <p:style>
+          <a:lnRef idx="1">
+            <a:schemeClr val="accent1"/>
+          </a:lnRef>
+          <a:fillRef idx="3">
+            <a:schemeClr val="accent1"/>
+          </a:fillRef>
+          <a:effectRef idx="2">
+            <a:schemeClr val="accent1"/>
+          </a:effectRef>
+          <a:fontRef idx="minor">
+            <a:schemeClr val="lt1"/>
+          </a:fontRef>
+        </p:style>
+        <p:txBody>
+          <a:bodyPr rtlCol="0" anchor="ctr"/>
+          <a:lstStyle/>
+          <a:p>
+            <a:pPr algn="ctr"/>
+          </a:p>
+        </p:txBody>
+      </p:sp>
+      <p:sp>
+        <p:nvSpPr>
+          <p:cNvPr id="24" name="Rounded Rectangle 23"/>
+          <p:cNvSpPr/>
+          <p:nvPr/>
+        </p:nvSpPr>
+        <p:spPr>
+          <a:xfrm>
+            <a:off x="685800" y="4370832"/>
+            <a:ext cx="91440" cy="658368"/>
+          </a:xfrm>
+          <a:prstGeom prst="roundRect">
+            <a:avLst>
+              <a:gd name="adj" fmla="val 50000"/>
+            </a:avLst>
+          </a:prstGeom>
+          <a:solidFill>
+            <a:srgbClr val="F89739"/>
+          </a:solidFill>
+          <a:ln>
+            <a:noFill/>
+          </a:ln>
+          <a:effectLst/>
+        </p:spPr>
+        <p:style>
+          <a:lnRef idx="1">
+            <a:schemeClr val="accent1"/>
+          </a:lnRef>
+          <a:fillRef idx="3">
+            <a:schemeClr val="accent1"/>
+          </a:fillRef>
+          <a:effectRef idx="2">
+            <a:schemeClr val="accent1"/>
+          </a:effectRef>
+          <a:fontRef idx="minor">
+            <a:schemeClr val="lt1"/>
+          </a:fontRef>
+        </p:style>
+        <p:txBody>
+          <a:bodyPr rtlCol="0" anchor="ctr"/>
+          <a:lstStyle/>
+          <a:p>
+            <a:pPr algn="ctr"/>
+          </a:p>
+        </p:txBody>
+      </p:sp>
+      <p:sp>
+        <p:nvSpPr>
+          <p:cNvPr id="25" name="TextBox 24"/>
+          <p:cNvSpPr txBox="1"/>
+          <p:nvPr/>
+        </p:nvSpPr>
+        <p:spPr>
+          <a:xfrm>
+            <a:off x="905256" y="4443984"/>
+            <a:ext cx="2103120" cy="530352"/>
+          </a:xfrm>
+          <a:prstGeom prst="rect">
+            <a:avLst/>
+          </a:prstGeom>
+          <a:noFill/>
+        </p:spPr>
+        <p:txBody>
+          <a:bodyPr wrap="square" anchor="ctr" lIns="0" rIns="0" tIns="0" bIns="0">
+            <a:spAutoFit/>
+          </a:bodyPr>
+          <a:lstStyle/>
+          <a:p>
+            <a:pPr algn="l">
+              <a:spcBef>
+                <a:spcPts val="0"/>
+              </a:spcBef>
+              <a:spcAft>
+                <a:spcPts val="0"/>
+              </a:spcAft>
+            </a:pPr>
+            <a:r>
+              <a:rPr sz="1250" b="1" i="0">
+                <a:solidFill>
+                  <a:srgbClr val="09131B"/>
+                </a:solidFill>
+                <a:latin typeface="Calibri"/>
+              </a:rPr>
+              <a:t>Vendor Hub</a:t>
+            </a:r>
+          </a:p>
+        </p:txBody>
+      </p:sp>
+      <p:sp>
+        <p:nvSpPr>
+          <p:cNvPr id="26" name="TextBox 25"/>
+          <p:cNvSpPr txBox="1"/>
+          <p:nvPr/>
+        </p:nvSpPr>
+        <p:spPr>
+          <a:xfrm>
+            <a:off x="3017520" y="4443984"/>
+            <a:ext cx="4206240" cy="530352"/>
+          </a:xfrm>
+          <a:prstGeom prst="rect">
+            <a:avLst/>
+          </a:prstGeom>
+          <a:noFill/>
+        </p:spPr>
+        <p:txBody>
+          <a:bodyPr wrap="square" anchor="ctr" lIns="0" rIns="0" tIns="0" bIns="0">
+            <a:spAutoFit/>
+          </a:bodyPr>
+          <a:lstStyle/>
+          <a:p>
+            <a:pPr algn="l">
+              <a:spcBef>
+                <a:spcPts val="0"/>
+              </a:spcBef>
+              <a:spcAft>
+                <a:spcPts val="0"/>
+              </a:spcAft>
+            </a:pPr>
+            <a:r>
+              <a:rPr sz="1030" b="0" i="0">
+                <a:solidFill>
+                  <a:srgbClr val="595959"/>
+                </a:solidFill>
+                <a:latin typeface="Calibri"/>
+              </a:rPr>
+              <a:t>Asset-to-vendor rollup · spend aggregation</a:t>
+            </a:r>
+          </a:p>
+        </p:txBody>
+      </p:sp>
+      <p:sp>
+        <p:nvSpPr>
+          <p:cNvPr id="27" name="TextBox 26"/>
+          <p:cNvSpPr txBox="1"/>
+          <p:nvPr/>
+        </p:nvSpPr>
+        <p:spPr>
+          <a:xfrm>
+            <a:off x="7360920" y="4443984"/>
+            <a:ext cx="4206240" cy="530352"/>
+          </a:xfrm>
+          <a:prstGeom prst="rect">
+            <a:avLst/>
+          </a:prstGeom>
+          <a:noFill/>
+        </p:spPr>
+        <p:txBody>
+          <a:bodyPr wrap="square" anchor="ctr" lIns="0" rIns="0" tIns="0" bIns="0">
+            <a:spAutoFit/>
+          </a:bodyPr>
+          <a:lstStyle/>
+          <a:p>
+            <a:pPr algn="l">
+              <a:spcBef>
+                <a:spcPts val="0"/>
+              </a:spcBef>
+              <a:spcAft>
+                <a:spcPts val="0"/>
+              </a:spcAft>
+            </a:pPr>
+            <a:r>
+              <a:rPr sz="1030" b="0" i="0">
+                <a:solidFill>
+                  <a:srgbClr val="595959"/>
+                </a:solidFill>
+                <a:latin typeface="Calibri"/>
+              </a:rPr>
+              <a:t>Vendor Hub Plus: value, HHI, irreplaceability, leverage · Ask Atlas</a:t>
+            </a:r>
+          </a:p>
+        </p:txBody>
+      </p:sp>
+      <p:sp>
+        <p:nvSpPr>
+          <p:cNvPr id="28" name="Rounded Rectangle 27"/>
+          <p:cNvSpPr/>
+          <p:nvPr/>
+        </p:nvSpPr>
+        <p:spPr>
+          <a:xfrm>
+            <a:off x="685800" y="5120640"/>
+            <a:ext cx="10972800" cy="658368"/>
+          </a:xfrm>
+          <a:prstGeom prst="roundRect">
+            <a:avLst>
+              <a:gd name="adj" fmla="val 6000"/>
+            </a:avLst>
+          </a:prstGeom>
+          <a:solidFill>
+            <a:srgbClr val="FFFFFF"/>
+          </a:solidFill>
+          <a:ln w="12700">
+            <a:solidFill>
+              <a:srgbClr val="D6DCE4"/>
+            </a:solidFill>
+          </a:ln>
+          <a:effectLst/>
+        </p:spPr>
+        <p:style>
+          <a:lnRef idx="1">
+            <a:schemeClr val="accent1"/>
+          </a:lnRef>
+          <a:fillRef idx="3">
+            <a:schemeClr val="accent1"/>
+          </a:fillRef>
+          <a:effectRef idx="2">
+            <a:schemeClr val="accent1"/>
+          </a:effectRef>
+          <a:fontRef idx="minor">
+            <a:schemeClr val="lt1"/>
+          </a:fontRef>
+        </p:style>
+        <p:txBody>
+          <a:bodyPr rtlCol="0" anchor="ctr"/>
+          <a:lstStyle/>
+          <a:p>
+            <a:pPr algn="ctr"/>
+          </a:p>
+        </p:txBody>
+      </p:sp>
+      <p:sp>
+        <p:nvSpPr>
+          <p:cNvPr id="29" name="Rounded Rectangle 28"/>
+          <p:cNvSpPr/>
+          <p:nvPr/>
+        </p:nvSpPr>
+        <p:spPr>
+          <a:xfrm>
+            <a:off x="685800" y="5120640"/>
+            <a:ext cx="91440" cy="658368"/>
+          </a:xfrm>
+          <a:prstGeom prst="roundRect">
+            <a:avLst>
+              <a:gd name="adj" fmla="val 50000"/>
+            </a:avLst>
+          </a:prstGeom>
+          <a:solidFill>
+            <a:srgbClr val="F89739"/>
+          </a:solidFill>
+          <a:ln>
+            <a:noFill/>
+          </a:ln>
+          <a:effectLst/>
+        </p:spPr>
+        <p:style>
+          <a:lnRef idx="1">
+            <a:schemeClr val="accent1"/>
+          </a:lnRef>
+          <a:fillRef idx="3">
+            <a:schemeClr val="accent1"/>
+          </a:fillRef>
+          <a:effectRef idx="2">
+            <a:schemeClr val="accent1"/>
+          </a:effectRef>
+          <a:fontRef idx="minor">
+            <a:schemeClr val="lt1"/>
+          </a:fontRef>
+        </p:style>
+        <p:txBody>
+          <a:bodyPr rtlCol="0" anchor="ctr"/>
+          <a:lstStyle/>
+          <a:p>
+            <a:pPr algn="ctr"/>
+          </a:p>
+        </p:txBody>
+      </p:sp>
+      <p:sp>
+        <p:nvSpPr>
+          <p:cNvPr id="30" name="TextBox 29"/>
+          <p:cNvSpPr txBox="1"/>
+          <p:nvPr/>
+        </p:nvSpPr>
+        <p:spPr>
+          <a:xfrm>
+            <a:off x="905256" y="5193792"/>
+            <a:ext cx="2103120" cy="530352"/>
+          </a:xfrm>
+          <a:prstGeom prst="rect">
+            <a:avLst/>
+          </a:prstGeom>
+          <a:noFill/>
+        </p:spPr>
+        <p:txBody>
+          <a:bodyPr wrap="square" anchor="ctr" lIns="0" rIns="0" tIns="0" bIns="0">
+            <a:spAutoFit/>
+          </a:bodyPr>
+          <a:lstStyle/>
+          <a:p>
+            <a:pPr algn="l">
+              <a:spcBef>
+                <a:spcPts val="0"/>
+              </a:spcBef>
+              <a:spcAft>
+                <a:spcPts val="0"/>
+              </a:spcAft>
+            </a:pPr>
+            <a:r>
+              <a:rPr sz="1250" b="1" i="0">
+                <a:solidFill>
+                  <a:srgbClr val="09131B"/>
+                </a:solidFill>
+                <a:latin typeface="Calibri"/>
+              </a:rPr>
+              <a:t>TPA Hub</a:t>
+            </a:r>
+          </a:p>
+        </p:txBody>
+      </p:sp>
+      <p:sp>
+        <p:nvSpPr>
+          <p:cNvPr id="31" name="TextBox 30"/>
+          <p:cNvSpPr txBox="1"/>
+          <p:nvPr/>
+        </p:nvSpPr>
+        <p:spPr>
+          <a:xfrm>
+            <a:off x="3017520" y="5193792"/>
+            <a:ext cx="4206240" cy="530352"/>
+          </a:xfrm>
+          <a:prstGeom prst="rect">
+            <a:avLst/>
+          </a:prstGeom>
+          <a:noFill/>
+        </p:spPr>
+        <p:txBody>
+          <a:bodyPr wrap="square" anchor="ctr" lIns="0" rIns="0" tIns="0" bIns="0">
+            <a:spAutoFit/>
+          </a:bodyPr>
+          <a:lstStyle/>
+          <a:p>
+            <a:pPr algn="l">
+              <a:spcBef>
+                <a:spcPts val="0"/>
+              </a:spcBef>
+              <a:spcAft>
+                <a:spcPts val="0"/>
+              </a:spcAft>
+            </a:pPr>
+            <a:r>
+              <a:rPr sz="1030" b="0" i="0">
+                <a:solidFill>
+                  <a:srgbClr val="595959"/>
+                </a:solidFill>
+                <a:latin typeface="Calibri"/>
+              </a:rPr>
+              <a:t>30/60/90 reminders · owner escalation · email notifications</a:t>
+            </a:r>
+          </a:p>
+        </p:txBody>
+      </p:sp>
+      <p:sp>
+        <p:nvSpPr>
+          <p:cNvPr id="32" name="TextBox 31"/>
+          <p:cNvSpPr txBox="1"/>
+          <p:nvPr/>
+        </p:nvSpPr>
+        <p:spPr>
+          <a:xfrm>
+            <a:off x="7360920" y="5193792"/>
+            <a:ext cx="4206240" cy="530352"/>
+          </a:xfrm>
+          <a:prstGeom prst="rect">
+            <a:avLst/>
+          </a:prstGeom>
+          <a:noFill/>
+        </p:spPr>
+        <p:txBody>
+          <a:bodyPr wrap="square" anchor="ctr" lIns="0" rIns="0" tIns="0" bIns="0">
+            <a:spAutoFit/>
+          </a:bodyPr>
+          <a:lstStyle/>
+          <a:p>
+            <a:pPr algn="l">
+              <a:spcBef>
+                <a:spcPts val="0"/>
+              </a:spcBef>
+              <a:spcAft>
+                <a:spcPts val="0"/>
+              </a:spcAft>
+            </a:pPr>
+            <a:r>
+              <a:rPr sz="1030" b="0" i="0">
+                <a:solidFill>
+                  <a:srgbClr val="595959"/>
+                </a:solidFill>
+                <a:latin typeface="Calibri"/>
+              </a:rPr>
+              <a:t>Renewal prediction · KPI-impact warning · runway dashboard · Ask Atlas</a:t>
+            </a:r>
+          </a:p>
+        </p:txBody>
+      </p:sp>
+      <p:sp>
+        <p:nvSpPr>
+          <p:cNvPr id="33" name="TextBox 32"/>
+          <p:cNvSpPr txBox="1"/>
+          <p:nvPr/>
+        </p:nvSpPr>
+        <p:spPr>
+          <a:xfrm>
+            <a:off x="685800" y="5943600"/>
+            <a:ext cx="10820095" cy="457200"/>
+          </a:xfrm>
+          <a:prstGeom prst="rect">
+            <a:avLst/>
+          </a:prstGeom>
+          <a:noFill/>
+        </p:spPr>
+        <p:txBody>
+          <a:bodyPr wrap="square" anchor="t" lIns="0" rIns="0" tIns="0" bIns="0">
+            <a:spAutoFit/>
+          </a:bodyPr>
+          <a:lstStyle/>
+          <a:p>
+            <a:pPr algn="l">
+              <a:spcBef>
+                <a:spcPts val="0"/>
+              </a:spcBef>
+              <a:spcAft>
+                <a:spcPts val="0"/>
+              </a:spcAft>
+            </a:pPr>
+            <a:r>
+              <a:rPr sz="1200" b="1" i="0">
+                <a:solidFill>
+                  <a:srgbClr val="09131B"/>
+                </a:solidFill>
+                <a:latin typeface="Calibri"/>
+              </a:rPr>
+              <a:t>Cross-connectivity throughout: every record links to its related asset, KPI, vendor and agreement; Ask Atlas spans all five; one connected dashboard layer.</a:t>
+            </a:r>
+          </a:p>
+        </p:txBody>
+      </p:sp>
+      <p:sp>
+        <p:nvSpPr>
+          <p:cNvPr id="34" name="Rectangle 33"/>
+          <p:cNvSpPr/>
+          <p:nvPr/>
+        </p:nvSpPr>
+        <p:spPr>
+          <a:xfrm>
+            <a:off x="685800" y="6419088"/>
+            <a:ext cx="10820095" cy="9525"/>
+          </a:xfrm>
+          <a:prstGeom prst="rect">
+            <a:avLst/>
+          </a:prstGeom>
+          <a:solidFill>
+            <a:srgbClr val="D6DCE4"/>
+          </a:solidFill>
+          <a:ln>
+            <a:noFill/>
+          </a:ln>
+          <a:effectLst/>
+        </p:spPr>
+        <p:style>
+          <a:lnRef idx="1">
+            <a:schemeClr val="accent1"/>
+          </a:lnRef>
+          <a:fillRef idx="3">
+            <a:schemeClr val="accent1"/>
+          </a:fillRef>
+          <a:effectRef idx="2">
+            <a:schemeClr val="accent1"/>
+          </a:effectRef>
+          <a:fontRef idx="minor">
+            <a:schemeClr val="lt1"/>
+          </a:fontRef>
+        </p:style>
+        <p:txBody>
+          <a:bodyPr rtlCol="0" anchor="ctr"/>
+          <a:lstStyle/>
+          <a:p>
+            <a:pPr algn="ctr"/>
+          </a:p>
+        </p:txBody>
+      </p:sp>
+      <p:sp>
+        <p:nvSpPr>
+          <p:cNvPr id="35" name="TextBox 34"/>
+          <p:cNvSpPr txBox="1"/>
+          <p:nvPr/>
+        </p:nvSpPr>
+        <p:spPr>
+          <a:xfrm>
+            <a:off x="685800" y="6473952"/>
+            <a:ext cx="7315200" cy="274320"/>
+          </a:xfrm>
+          <a:prstGeom prst="rect">
+            <a:avLst/>
+          </a:prstGeom>
+          <a:noFill/>
+        </p:spPr>
+        <p:txBody>
+          <a:bodyPr wrap="square" anchor="t" lIns="0" rIns="0" tIns="0" bIns="0">
+            <a:spAutoFit/>
+          </a:bodyPr>
+          <a:lstStyle/>
+          <a:p>
+            <a:pPr algn="l">
+              <a:spcBef>
+                <a:spcPts val="0"/>
+              </a:spcBef>
+              <a:spcAft>
+                <a:spcPts val="0"/>
+              </a:spcAft>
+            </a:pPr>
+            <a:r>
+              <a:rPr sz="900" b="0" i="0">
+                <a:solidFill>
+                  <a:srgbClr val="A9AFB6"/>
+                </a:solidFill>
+                <a:latin typeface="Calibri"/>
+              </a:rPr>
+              <a:t>Cortex Atlas  ·  Illustrative prototype, synthetic data  ·  Confidential</a:t>
+            </a:r>
+          </a:p>
+        </p:txBody>
+      </p:sp>
+      <p:sp>
+        <p:nvSpPr>
+          <p:cNvPr id="36" name="TextBox 35"/>
+          <p:cNvSpPr txBox="1"/>
+          <p:nvPr/>
+        </p:nvSpPr>
+        <p:spPr>
+          <a:xfrm>
+            <a:off x="10591495" y="6473952"/>
+            <a:ext cx="914400" cy="274320"/>
+          </a:xfrm>
+          <a:prstGeom prst="rect">
+            <a:avLst/>
+          </a:prstGeom>
+          <a:noFill/>
+        </p:spPr>
+        <p:txBody>
+          <a:bodyPr wrap="square" anchor="t" lIns="0" rIns="0" tIns="0" bIns="0">
+            <a:spAutoFit/>
+          </a:bodyPr>
+          <a:lstStyle/>
+          <a:p>
+            <a:pPr algn="r">
+              <a:spcBef>
+                <a:spcPts val="0"/>
+              </a:spcBef>
+              <a:spcAft>
+                <a:spcPts val="0"/>
+              </a:spcAft>
+            </a:pPr>
+            <a:r>
+              <a:rPr sz="900" b="0" i="0">
+                <a:solidFill>
+                  <a:srgbClr val="A9AFB6"/>
+                </a:solidFill>
+                <a:latin typeface="Calibri"/>
+              </a:rPr>
+              <a:t>12</a:t>
+            </a:r>
+          </a:p>
+        </p:txBody>
+      </p:sp>
+    </p:spTree>
+  </p:cSld>
+  <p:clrMapOvr>
+    <a:masterClrMapping/>
+  </p:clrMapOvr>
+</p:sld>
+</file>
+
+<file path=ppt/slides/slide17.xml><?xml version="1.0" encoding="utf-8"?>
+<p:sld xmlns:a="http://schemas.openxmlformats.org/drawingml/2006/main" xmlns:p="http://schemas.openxmlformats.org/presentationml/2006/main" xmlns:r="http://schemas.openxmlformats.org/officeDocument/2006/relationships">
+  <p:cSld>
+    <p:bg>
+      <p:bgPr>
+        <a:solidFill>
+          <a:srgbClr val="F4F4F4"/>
+        </a:solidFill>
+        <a:effectLst/>
+      </p:bgPr>
+    </p:bg>
+    <p:spTree>
+      <p:nvGrpSpPr>
+        <p:cNvPr id="1" name=""/>
+        <p:cNvGrpSpPr/>
+        <p:nvPr/>
+      </p:nvGrpSpPr>
+      <p:grpSpPr/>
+      <p:sp>
+        <p:nvSpPr>
+          <p:cNvPr id="2" name="Rectangle 1"/>
+          <p:cNvSpPr/>
+          <p:nvPr/>
+        </p:nvSpPr>
+        <p:spPr>
+          <a:xfrm>
+            <a:off x="685800" y="566928"/>
+            <a:ext cx="310896" cy="82296"/>
+          </a:xfrm>
+          <a:prstGeom prst="rect">
+            <a:avLst/>
+          </a:prstGeom>
+          <a:solidFill>
+            <a:srgbClr val="F89739"/>
+          </a:solidFill>
+          <a:ln>
+            <a:noFill/>
+          </a:ln>
+          <a:effectLst/>
+        </p:spPr>
+        <p:style>
+          <a:lnRef idx="1">
+            <a:schemeClr val="accent1"/>
+          </a:lnRef>
+          <a:fillRef idx="3">
+            <a:schemeClr val="accent1"/>
+          </a:fillRef>
+          <a:effectRef idx="2">
+            <a:schemeClr val="accent1"/>
+          </a:effectRef>
+          <a:fontRef idx="minor">
+            <a:schemeClr val="lt1"/>
+          </a:fontRef>
+        </p:style>
+        <p:txBody>
+          <a:bodyPr rtlCol="0" anchor="ctr"/>
+          <a:lstStyle/>
+          <a:p>
+            <a:pPr algn="ctr"/>
+          </a:p>
+        </p:txBody>
+      </p:sp>
+      <p:sp>
+        <p:nvSpPr>
+          <p:cNvPr id="3" name="TextBox 2"/>
+          <p:cNvSpPr txBox="1"/>
+          <p:nvPr/>
+        </p:nvSpPr>
+        <p:spPr>
+          <a:xfrm>
+            <a:off x="1097280" y="457200"/>
+            <a:ext cx="10408615" cy="320040"/>
+          </a:xfrm>
+          <a:prstGeom prst="rect">
+            <a:avLst/>
+          </a:prstGeom>
+          <a:noFill/>
+        </p:spPr>
+        <p:txBody>
+          <a:bodyPr wrap="square" anchor="t" lIns="0" rIns="0" tIns="0" bIns="0">
+            <a:spAutoFit/>
+          </a:bodyPr>
+          <a:lstStyle/>
+          <a:p>
+            <a:pPr algn="l">
+              <a:spcBef>
+                <a:spcPts val="0"/>
+              </a:spcBef>
+              <a:spcAft>
+                <a:spcPts val="0"/>
+              </a:spcAft>
+            </a:pPr>
+            <a:r>
+              <a:rPr sz="1250" b="1" i="0">
+                <a:solidFill>
+                  <a:srgbClr val="F89739"/>
+                </a:solidFill>
+                <a:latin typeface="Calibri"/>
+              </a:rPr>
+              <a:t>THE DECISION LAYER</a:t>
+            </a:r>
+          </a:p>
+        </p:txBody>
+      </p:sp>
+      <p:sp>
+        <p:nvSpPr>
+          <p:cNvPr id="4" name="TextBox 3"/>
+          <p:cNvSpPr txBox="1"/>
+          <p:nvPr/>
+        </p:nvSpPr>
+        <p:spPr>
+          <a:xfrm>
+            <a:off x="685800" y="841248"/>
+            <a:ext cx="10820095" cy="640080"/>
+          </a:xfrm>
+          <a:prstGeom prst="rect">
+            <a:avLst/>
+          </a:prstGeom>
+          <a:noFill/>
+        </p:spPr>
+        <p:txBody>
+          <a:bodyPr wrap="square" anchor="t" lIns="0" rIns="0" tIns="0" bIns="0">
+            <a:spAutoFit/>
+          </a:bodyPr>
+          <a:lstStyle/>
+          <a:p>
+            <a:pPr algn="l">
+              <a:spcBef>
+                <a:spcPts val="0"/>
+              </a:spcBef>
+              <a:spcAft>
+                <a:spcPts val="0"/>
+              </a:spcAft>
+            </a:pPr>
+            <a:r>
+              <a:rPr sz="2900" b="1" i="0">
+                <a:solidFill>
+                  <a:srgbClr val="09131B"/>
+                </a:solidFill>
+                <a:latin typeface="Calibri"/>
+              </a:rPr>
+              <a:t>Cross-tool intelligence and a natural-language ask</a:t>
+            </a:r>
+          </a:p>
+        </p:txBody>
+      </p:sp>
+      <p:sp>
+        <p:nvSpPr>
+          <p:cNvPr id="5" name="Rounded Rectangle 4"/>
+          <p:cNvSpPr/>
+          <p:nvPr/>
+        </p:nvSpPr>
+        <p:spPr>
+          <a:xfrm>
+            <a:off x="685800" y="1828800"/>
+            <a:ext cx="5486400" cy="4023360"/>
+          </a:xfrm>
+          <a:prstGeom prst="roundRect">
+            <a:avLst>
+              <a:gd name="adj" fmla="val 6000"/>
+            </a:avLst>
+          </a:prstGeom>
+          <a:solidFill>
+            <a:srgbClr val="FFFFFF"/>
+          </a:solidFill>
+          <a:ln w="12700">
+            <a:solidFill>
+              <a:srgbClr val="D6DCE4"/>
+            </a:solidFill>
+          </a:ln>
+          <a:effectLst/>
+        </p:spPr>
+        <p:style>
+          <a:lnRef idx="1">
+            <a:schemeClr val="accent1"/>
+          </a:lnRef>
+          <a:fillRef idx="3">
+            <a:schemeClr val="accent1"/>
+          </a:fillRef>
+          <a:effectRef idx="2">
+            <a:schemeClr val="accent1"/>
+          </a:effectRef>
+          <a:fontRef idx="minor">
+            <a:schemeClr val="lt1"/>
+          </a:fontRef>
+        </p:style>
+        <p:txBody>
+          <a:bodyPr rtlCol="0" anchor="ctr"/>
+          <a:lstStyle/>
+          <a:p>
+            <a:pPr algn="ctr"/>
+          </a:p>
+        </p:txBody>
+      </p:sp>
+      <p:sp>
+        <p:nvSpPr>
           <p:cNvPr id="6" name="TextBox 5"/>
           <p:cNvSpPr txBox="1"/>
           <p:nvPr/>
@@ -14492,7 +16113,7 @@
                 </a:solidFill>
                 <a:latin typeface="Calibri"/>
               </a:rPr>
-              <a:t>12</a:t>
+              <a:t>13</a:t>
             </a:r>
           </a:p>
         </p:txBody>
@@ -14505,7 +16126,7 @@
 </p:sld>
 </file>
 
-<file path=ppt/slides/slide17.xml><?xml version="1.0" encoding="utf-8"?>
+<file path=ppt/slides/slide18.xml><?xml version="1.0" encoding="utf-8"?>
 <p:sld xmlns:a="http://schemas.openxmlformats.org/drawingml/2006/main" xmlns:p="http://schemas.openxmlformats.org/presentationml/2006/main" xmlns:r="http://schemas.openxmlformats.org/officeDocument/2006/relationships">
   <p:cSld>
     <p:bg>
@@ -14731,1483 +16352,6 @@
                 <a:latin typeface="Calibri"/>
               </a:rPr>
               <a:t>04 / 06</a:t>
-            </a:r>
-          </a:p>
-        </p:txBody>
-      </p:sp>
-    </p:spTree>
-  </p:cSld>
-  <p:clrMapOvr>
-    <a:masterClrMapping/>
-  </p:clrMapOvr>
-</p:sld>
-</file>
-
-<file path=ppt/slides/slide18.xml><?xml version="1.0" encoding="utf-8"?>
-<p:sld xmlns:a="http://schemas.openxmlformats.org/drawingml/2006/main" xmlns:p="http://schemas.openxmlformats.org/presentationml/2006/main" xmlns:r="http://schemas.openxmlformats.org/officeDocument/2006/relationships">
-  <p:cSld>
-    <p:bg>
-      <p:bgPr>
-        <a:solidFill>
-          <a:srgbClr val="F4F4F4"/>
-        </a:solidFill>
-        <a:effectLst/>
-      </p:bgPr>
-    </p:bg>
-    <p:spTree>
-      <p:nvGrpSpPr>
-        <p:cNvPr id="1" name=""/>
-        <p:cNvGrpSpPr/>
-        <p:nvPr/>
-      </p:nvGrpSpPr>
-      <p:grpSpPr/>
-      <p:sp>
-        <p:nvSpPr>
-          <p:cNvPr id="2" name="Rectangle 1"/>
-          <p:cNvSpPr/>
-          <p:nvPr/>
-        </p:nvSpPr>
-        <p:spPr>
-          <a:xfrm>
-            <a:off x="685800" y="566928"/>
-            <a:ext cx="310896" cy="82296"/>
-          </a:xfrm>
-          <a:prstGeom prst="rect">
-            <a:avLst/>
-          </a:prstGeom>
-          <a:solidFill>
-            <a:srgbClr val="F89739"/>
-          </a:solidFill>
-          <a:ln>
-            <a:noFill/>
-          </a:ln>
-          <a:effectLst/>
-        </p:spPr>
-        <p:style>
-          <a:lnRef idx="1">
-            <a:schemeClr val="accent1"/>
-          </a:lnRef>
-          <a:fillRef idx="3">
-            <a:schemeClr val="accent1"/>
-          </a:fillRef>
-          <a:effectRef idx="2">
-            <a:schemeClr val="accent1"/>
-          </a:effectRef>
-          <a:fontRef idx="minor">
-            <a:schemeClr val="lt1"/>
-          </a:fontRef>
-        </p:style>
-        <p:txBody>
-          <a:bodyPr rtlCol="0" anchor="ctr"/>
-          <a:lstStyle/>
-          <a:p>
-            <a:pPr algn="ctr"/>
-          </a:p>
-        </p:txBody>
-      </p:sp>
-      <p:sp>
-        <p:nvSpPr>
-          <p:cNvPr id="3" name="TextBox 2"/>
-          <p:cNvSpPr txBox="1"/>
-          <p:nvPr/>
-        </p:nvSpPr>
-        <p:spPr>
-          <a:xfrm>
-            <a:off x="1097280" y="457200"/>
-            <a:ext cx="10408615" cy="320040"/>
-          </a:xfrm>
-          <a:prstGeom prst="rect">
-            <a:avLst/>
-          </a:prstGeom>
-          <a:noFill/>
-        </p:spPr>
-        <p:txBody>
-          <a:bodyPr wrap="square" anchor="t" lIns="0" rIns="0" tIns="0" bIns="0">
-            <a:spAutoFit/>
-          </a:bodyPr>
-          <a:lstStyle/>
-          <a:p>
-            <a:pPr algn="l">
-              <a:spcBef>
-                <a:spcPts val="0"/>
-              </a:spcBef>
-              <a:spcAft>
-                <a:spcPts val="0"/>
-              </a:spcAft>
-            </a:pPr>
-            <a:r>
-              <a:rPr sz="1250" b="1" i="0">
-                <a:solidFill>
-                  <a:srgbClr val="F89739"/>
-                </a:solidFill>
-                <a:latin typeface="Calibri"/>
-              </a:rPr>
-              <a:t>BUSINESS VALUE</a:t>
-            </a:r>
-          </a:p>
-        </p:txBody>
-      </p:sp>
-      <p:sp>
-        <p:nvSpPr>
-          <p:cNvPr id="4" name="TextBox 3"/>
-          <p:cNvSpPr txBox="1"/>
-          <p:nvPr/>
-        </p:nvSpPr>
-        <p:spPr>
-          <a:xfrm>
-            <a:off x="685800" y="841248"/>
-            <a:ext cx="10820095" cy="640080"/>
-          </a:xfrm>
-          <a:prstGeom prst="rect">
-            <a:avLst/>
-          </a:prstGeom>
-          <a:noFill/>
-        </p:spPr>
-        <p:txBody>
-          <a:bodyPr wrap="square" anchor="t" lIns="0" rIns="0" tIns="0" bIns="0">
-            <a:spAutoFit/>
-          </a:bodyPr>
-          <a:lstStyle/>
-          <a:p>
-            <a:pPr algn="l">
-              <a:spcBef>
-                <a:spcPts val="0"/>
-              </a:spcBef>
-              <a:spcAft>
-                <a:spcPts val="0"/>
-              </a:spcAft>
-            </a:pPr>
-            <a:r>
-              <a:rPr sz="2900" b="1" i="0">
-                <a:solidFill>
-                  <a:srgbClr val="09131B"/>
-                </a:solidFill>
-                <a:latin typeface="Calibri"/>
-              </a:rPr>
-              <a:t>Five outcomes leadership can point to</a:t>
-            </a:r>
-          </a:p>
-        </p:txBody>
-      </p:sp>
-      <p:sp>
-        <p:nvSpPr>
-          <p:cNvPr id="5" name="Rounded Rectangle 4"/>
-          <p:cNvSpPr/>
-          <p:nvPr/>
-        </p:nvSpPr>
-        <p:spPr>
-          <a:xfrm>
-            <a:off x="685800" y="1828800"/>
-            <a:ext cx="5349240" cy="960120"/>
-          </a:xfrm>
-          <a:prstGeom prst="roundRect">
-            <a:avLst>
-              <a:gd name="adj" fmla="val 6000"/>
-            </a:avLst>
-          </a:prstGeom>
-          <a:solidFill>
-            <a:srgbClr val="FFFFFF"/>
-          </a:solidFill>
-          <a:ln w="12700">
-            <a:solidFill>
-              <a:srgbClr val="D6DCE4"/>
-            </a:solidFill>
-          </a:ln>
-          <a:effectLst/>
-        </p:spPr>
-        <p:style>
-          <a:lnRef idx="1">
-            <a:schemeClr val="accent1"/>
-          </a:lnRef>
-          <a:fillRef idx="3">
-            <a:schemeClr val="accent1"/>
-          </a:fillRef>
-          <a:effectRef idx="2">
-            <a:schemeClr val="accent1"/>
-          </a:effectRef>
-          <a:fontRef idx="minor">
-            <a:schemeClr val="lt1"/>
-          </a:fontRef>
-        </p:style>
-        <p:txBody>
-          <a:bodyPr rtlCol="0" anchor="ctr"/>
-          <a:lstStyle/>
-          <a:p>
-            <a:pPr algn="ctr"/>
-          </a:p>
-        </p:txBody>
-      </p:sp>
-      <p:sp>
-        <p:nvSpPr>
-          <p:cNvPr id="6" name="Rounded Rectangle 5"/>
-          <p:cNvSpPr/>
-          <p:nvPr/>
-        </p:nvSpPr>
-        <p:spPr>
-          <a:xfrm>
-            <a:off x="886968" y="2103120"/>
-            <a:ext cx="420624" cy="420624"/>
-          </a:xfrm>
-          <a:prstGeom prst="roundRect">
-            <a:avLst>
-              <a:gd name="adj" fmla="val 25000"/>
-            </a:avLst>
-          </a:prstGeom>
-          <a:solidFill>
-            <a:srgbClr val="1E7F4F"/>
-          </a:solidFill>
-          <a:ln>
-            <a:noFill/>
-          </a:ln>
-          <a:effectLst/>
-        </p:spPr>
-        <p:style>
-          <a:lnRef idx="1">
-            <a:schemeClr val="accent1"/>
-          </a:lnRef>
-          <a:fillRef idx="3">
-            <a:schemeClr val="accent1"/>
-          </a:fillRef>
-          <a:effectRef idx="2">
-            <a:schemeClr val="accent1"/>
-          </a:effectRef>
-          <a:fontRef idx="minor">
-            <a:schemeClr val="lt1"/>
-          </a:fontRef>
-        </p:style>
-        <p:txBody>
-          <a:bodyPr rtlCol="0" anchor="ctr"/>
-          <a:lstStyle/>
-          <a:p>
-            <a:pPr algn="ctr"/>
-          </a:p>
-        </p:txBody>
-      </p:sp>
-      <p:sp>
-        <p:nvSpPr>
-          <p:cNvPr id="7" name="TextBox 6"/>
-          <p:cNvSpPr txBox="1"/>
-          <p:nvPr/>
-        </p:nvSpPr>
-        <p:spPr>
-          <a:xfrm>
-            <a:off x="886968" y="2103120"/>
-            <a:ext cx="420624" cy="420624"/>
-          </a:xfrm>
-          <a:prstGeom prst="rect">
-            <a:avLst/>
-          </a:prstGeom>
-          <a:noFill/>
-        </p:spPr>
-        <p:txBody>
-          <a:bodyPr wrap="square" anchor="ctr" lIns="0" rIns="0" tIns="0" bIns="0">
-            <a:spAutoFit/>
-          </a:bodyPr>
-          <a:lstStyle/>
-          <a:p>
-            <a:pPr algn="ctr">
-              <a:spcBef>
-                <a:spcPts val="0"/>
-              </a:spcBef>
-              <a:spcAft>
-                <a:spcPts val="0"/>
-              </a:spcAft>
-            </a:pPr>
-            <a:r>
-              <a:rPr sz="1400" b="1" i="0">
-                <a:solidFill>
-                  <a:srgbClr val="FFFFFF"/>
-                </a:solidFill>
-                <a:latin typeface="Calibri"/>
-              </a:rPr>
-              <a:t>1</a:t>
-            </a:r>
-          </a:p>
-        </p:txBody>
-      </p:sp>
-      <p:sp>
-        <p:nvSpPr>
-          <p:cNvPr id="8" name="TextBox 7"/>
-          <p:cNvSpPr txBox="1"/>
-          <p:nvPr/>
-        </p:nvSpPr>
-        <p:spPr>
-          <a:xfrm>
-            <a:off x="1554480" y="1975104"/>
-            <a:ext cx="2606040" cy="731520"/>
-          </a:xfrm>
-          <a:prstGeom prst="rect">
-            <a:avLst/>
-          </a:prstGeom>
-          <a:noFill/>
-        </p:spPr>
-        <p:txBody>
-          <a:bodyPr wrap="square" anchor="ctr" lIns="0" rIns="0" tIns="0" bIns="0">
-            <a:spAutoFit/>
-          </a:bodyPr>
-          <a:lstStyle/>
-          <a:p>
-            <a:pPr algn="l">
-              <a:spcBef>
-                <a:spcPts val="0"/>
-              </a:spcBef>
-              <a:spcAft>
-                <a:spcPts val="200"/>
-              </a:spcAft>
-            </a:pPr>
-            <a:r>
-              <a:rPr sz="1450" b="1" i="0">
-                <a:solidFill>
-                  <a:srgbClr val="09131B"/>
-                </a:solidFill>
-                <a:latin typeface="Calibri"/>
-              </a:rPr>
-              <a:t>Stop duplicate spend</a:t>
-            </a:r>
-          </a:p>
-          <a:p>
-            <a:pPr algn="l">
-              <a:spcBef>
-                <a:spcPts val="0"/>
-              </a:spcBef>
-              <a:spcAft>
-                <a:spcPts val="0"/>
-              </a:spcAft>
-            </a:pPr>
-            <a:r>
-              <a:rPr sz="1130" b="0" i="0">
-                <a:solidFill>
-                  <a:srgbClr val="595959"/>
-                </a:solidFill>
-                <a:latin typeface="Calibri"/>
-              </a:rPr>
-              <a:t>Overlap is caught at the point of request, before commitment — direct, recurring savings.</a:t>
-            </a:r>
-          </a:p>
-        </p:txBody>
-      </p:sp>
-      <p:sp>
-        <p:nvSpPr>
-          <p:cNvPr id="9" name="TextBox 8"/>
-          <p:cNvSpPr txBox="1"/>
-          <p:nvPr/>
-        </p:nvSpPr>
-        <p:spPr>
-          <a:xfrm>
-            <a:off x="4297680" y="2103120"/>
-            <a:ext cx="1554480" cy="411480"/>
-          </a:xfrm>
-          <a:prstGeom prst="rect">
-            <a:avLst/>
-          </a:prstGeom>
-          <a:noFill/>
-        </p:spPr>
-        <p:txBody>
-          <a:bodyPr wrap="square" anchor="ctr" lIns="0" rIns="0" tIns="0" bIns="0">
-            <a:spAutoFit/>
-          </a:bodyPr>
-          <a:lstStyle/>
-          <a:p>
-            <a:pPr algn="r">
-              <a:spcBef>
-                <a:spcPts val="0"/>
-              </a:spcBef>
-              <a:spcAft>
-                <a:spcPts val="0"/>
-              </a:spcAft>
-            </a:pPr>
-            <a:r>
-              <a:rPr sz="950" b="1" i="0">
-                <a:solidFill>
-                  <a:srgbClr val="1E7F4F"/>
-                </a:solidFill>
-                <a:latin typeface="Calibri"/>
-              </a:rPr>
-              <a:t>PROCUREMENT</a:t>
-            </a:r>
-          </a:p>
-        </p:txBody>
-      </p:sp>
-      <p:sp>
-        <p:nvSpPr>
-          <p:cNvPr id="10" name="Rounded Rectangle 9"/>
-          <p:cNvSpPr/>
-          <p:nvPr/>
-        </p:nvSpPr>
-        <p:spPr>
-          <a:xfrm>
-            <a:off x="6309360" y="1828800"/>
-            <a:ext cx="5349240" cy="960120"/>
-          </a:xfrm>
-          <a:prstGeom prst="roundRect">
-            <a:avLst>
-              <a:gd name="adj" fmla="val 6000"/>
-            </a:avLst>
-          </a:prstGeom>
-          <a:solidFill>
-            <a:srgbClr val="FFFFFF"/>
-          </a:solidFill>
-          <a:ln w="12700">
-            <a:solidFill>
-              <a:srgbClr val="D6DCE4"/>
-            </a:solidFill>
-          </a:ln>
-          <a:effectLst/>
-        </p:spPr>
-        <p:style>
-          <a:lnRef idx="1">
-            <a:schemeClr val="accent1"/>
-          </a:lnRef>
-          <a:fillRef idx="3">
-            <a:schemeClr val="accent1"/>
-          </a:fillRef>
-          <a:effectRef idx="2">
-            <a:schemeClr val="accent1"/>
-          </a:effectRef>
-          <a:fontRef idx="minor">
-            <a:schemeClr val="lt1"/>
-          </a:fontRef>
-        </p:style>
-        <p:txBody>
-          <a:bodyPr rtlCol="0" anchor="ctr"/>
-          <a:lstStyle/>
-          <a:p>
-            <a:pPr algn="ctr"/>
-          </a:p>
-        </p:txBody>
-      </p:sp>
-      <p:sp>
-        <p:nvSpPr>
-          <p:cNvPr id="11" name="Rounded Rectangle 10"/>
-          <p:cNvSpPr/>
-          <p:nvPr/>
-        </p:nvSpPr>
-        <p:spPr>
-          <a:xfrm>
-            <a:off x="6510528" y="2103120"/>
-            <a:ext cx="420624" cy="420624"/>
-          </a:xfrm>
-          <a:prstGeom prst="roundRect">
-            <a:avLst>
-              <a:gd name="adj" fmla="val 25000"/>
-            </a:avLst>
-          </a:prstGeom>
-          <a:solidFill>
-            <a:srgbClr val="1E7F4F"/>
-          </a:solidFill>
-          <a:ln>
-            <a:noFill/>
-          </a:ln>
-          <a:effectLst/>
-        </p:spPr>
-        <p:style>
-          <a:lnRef idx="1">
-            <a:schemeClr val="accent1"/>
-          </a:lnRef>
-          <a:fillRef idx="3">
-            <a:schemeClr val="accent1"/>
-          </a:fillRef>
-          <a:effectRef idx="2">
-            <a:schemeClr val="accent1"/>
-          </a:effectRef>
-          <a:fontRef idx="minor">
-            <a:schemeClr val="lt1"/>
-          </a:fontRef>
-        </p:style>
-        <p:txBody>
-          <a:bodyPr rtlCol="0" anchor="ctr"/>
-          <a:lstStyle/>
-          <a:p>
-            <a:pPr algn="ctr"/>
-          </a:p>
-        </p:txBody>
-      </p:sp>
-      <p:sp>
-        <p:nvSpPr>
-          <p:cNvPr id="12" name="TextBox 11"/>
-          <p:cNvSpPr txBox="1"/>
-          <p:nvPr/>
-        </p:nvSpPr>
-        <p:spPr>
-          <a:xfrm>
-            <a:off x="6510528" y="2103120"/>
-            <a:ext cx="420624" cy="420624"/>
-          </a:xfrm>
-          <a:prstGeom prst="rect">
-            <a:avLst/>
-          </a:prstGeom>
-          <a:noFill/>
-        </p:spPr>
-        <p:txBody>
-          <a:bodyPr wrap="square" anchor="ctr" lIns="0" rIns="0" tIns="0" bIns="0">
-            <a:spAutoFit/>
-          </a:bodyPr>
-          <a:lstStyle/>
-          <a:p>
-            <a:pPr algn="ctr">
-              <a:spcBef>
-                <a:spcPts val="0"/>
-              </a:spcBef>
-              <a:spcAft>
-                <a:spcPts val="0"/>
-              </a:spcAft>
-            </a:pPr>
-            <a:r>
-              <a:rPr sz="1400" b="1" i="0">
-                <a:solidFill>
-                  <a:srgbClr val="FFFFFF"/>
-                </a:solidFill>
-                <a:latin typeface="Calibri"/>
-              </a:rPr>
-              <a:t>2</a:t>
-            </a:r>
-          </a:p>
-        </p:txBody>
-      </p:sp>
-      <p:sp>
-        <p:nvSpPr>
-          <p:cNvPr id="13" name="TextBox 12"/>
-          <p:cNvSpPr txBox="1"/>
-          <p:nvPr/>
-        </p:nvSpPr>
-        <p:spPr>
-          <a:xfrm>
-            <a:off x="7178040" y="1975104"/>
-            <a:ext cx="2606040" cy="731520"/>
-          </a:xfrm>
-          <a:prstGeom prst="rect">
-            <a:avLst/>
-          </a:prstGeom>
-          <a:noFill/>
-        </p:spPr>
-        <p:txBody>
-          <a:bodyPr wrap="square" anchor="ctr" lIns="0" rIns="0" tIns="0" bIns="0">
-            <a:spAutoFit/>
-          </a:bodyPr>
-          <a:lstStyle/>
-          <a:p>
-            <a:pPr algn="l">
-              <a:spcBef>
-                <a:spcPts val="0"/>
-              </a:spcBef>
-              <a:spcAft>
-                <a:spcPts val="200"/>
-              </a:spcAft>
-            </a:pPr>
-            <a:r>
-              <a:rPr sz="1450" b="1" i="0">
-                <a:solidFill>
-                  <a:srgbClr val="09131B"/>
-                </a:solidFill>
-                <a:latin typeface="Calibri"/>
-              </a:rPr>
-              <a:t>Never miss a renewal</a:t>
-            </a:r>
-          </a:p>
-          <a:p>
-            <a:pPr algn="l">
-              <a:spcBef>
-                <a:spcPts val="0"/>
-              </a:spcBef>
-              <a:spcAft>
-                <a:spcPts val="0"/>
-              </a:spcAft>
-            </a:pPr>
-            <a:r>
-              <a:rPr sz="1130" b="0" i="0">
-                <a:solidFill>
-                  <a:srgbClr val="595959"/>
-                </a:solidFill>
-                <a:latin typeface="Calibri"/>
-              </a:rPr>
-              <a:t>Automated 30/60/90 reminders plus impact-aware warnings end lapses and rushed, low-leverage renewals.</a:t>
-            </a:r>
-          </a:p>
-        </p:txBody>
-      </p:sp>
-      <p:sp>
-        <p:nvSpPr>
-          <p:cNvPr id="14" name="TextBox 13"/>
-          <p:cNvSpPr txBox="1"/>
-          <p:nvPr/>
-        </p:nvSpPr>
-        <p:spPr>
-          <a:xfrm>
-            <a:off x="9921240" y="2103120"/>
-            <a:ext cx="1554480" cy="411480"/>
-          </a:xfrm>
-          <a:prstGeom prst="rect">
-            <a:avLst/>
-          </a:prstGeom>
-          <a:noFill/>
-        </p:spPr>
-        <p:txBody>
-          <a:bodyPr wrap="square" anchor="ctr" lIns="0" rIns="0" tIns="0" bIns="0">
-            <a:spAutoFit/>
-          </a:bodyPr>
-          <a:lstStyle/>
-          <a:p>
-            <a:pPr algn="r">
-              <a:spcBef>
-                <a:spcPts val="0"/>
-              </a:spcBef>
-              <a:spcAft>
-                <a:spcPts val="0"/>
-              </a:spcAft>
-            </a:pPr>
-            <a:r>
-              <a:rPr sz="950" b="1" i="0">
-                <a:solidFill>
-                  <a:srgbClr val="1E7F4F"/>
-                </a:solidFill>
-                <a:latin typeface="Calibri"/>
-              </a:rPr>
-              <a:t>LEGAL / CONTINUITY</a:t>
-            </a:r>
-          </a:p>
-        </p:txBody>
-      </p:sp>
-      <p:sp>
-        <p:nvSpPr>
-          <p:cNvPr id="15" name="Rounded Rectangle 14"/>
-          <p:cNvSpPr/>
-          <p:nvPr/>
-        </p:nvSpPr>
-        <p:spPr>
-          <a:xfrm>
-            <a:off x="685800" y="2907792"/>
-            <a:ext cx="5349240" cy="960120"/>
-          </a:xfrm>
-          <a:prstGeom prst="roundRect">
-            <a:avLst>
-              <a:gd name="adj" fmla="val 6000"/>
-            </a:avLst>
-          </a:prstGeom>
-          <a:solidFill>
-            <a:srgbClr val="FFFFFF"/>
-          </a:solidFill>
-          <a:ln w="12700">
-            <a:solidFill>
-              <a:srgbClr val="D6DCE4"/>
-            </a:solidFill>
-          </a:ln>
-          <a:effectLst/>
-        </p:spPr>
-        <p:style>
-          <a:lnRef idx="1">
-            <a:schemeClr val="accent1"/>
-          </a:lnRef>
-          <a:fillRef idx="3">
-            <a:schemeClr val="accent1"/>
-          </a:fillRef>
-          <a:effectRef idx="2">
-            <a:schemeClr val="accent1"/>
-          </a:effectRef>
-          <a:fontRef idx="minor">
-            <a:schemeClr val="lt1"/>
-          </a:fontRef>
-        </p:style>
-        <p:txBody>
-          <a:bodyPr rtlCol="0" anchor="ctr"/>
-          <a:lstStyle/>
-          <a:p>
-            <a:pPr algn="ctr"/>
-          </a:p>
-        </p:txBody>
-      </p:sp>
-      <p:sp>
-        <p:nvSpPr>
-          <p:cNvPr id="16" name="Rounded Rectangle 15"/>
-          <p:cNvSpPr/>
-          <p:nvPr/>
-        </p:nvSpPr>
-        <p:spPr>
-          <a:xfrm>
-            <a:off x="886968" y="3182112"/>
-            <a:ext cx="420624" cy="420624"/>
-          </a:xfrm>
-          <a:prstGeom prst="roundRect">
-            <a:avLst>
-              <a:gd name="adj" fmla="val 25000"/>
-            </a:avLst>
-          </a:prstGeom>
-          <a:solidFill>
-            <a:srgbClr val="1E7F4F"/>
-          </a:solidFill>
-          <a:ln>
-            <a:noFill/>
-          </a:ln>
-          <a:effectLst/>
-        </p:spPr>
-        <p:style>
-          <a:lnRef idx="1">
-            <a:schemeClr val="accent1"/>
-          </a:lnRef>
-          <a:fillRef idx="3">
-            <a:schemeClr val="accent1"/>
-          </a:fillRef>
-          <a:effectRef idx="2">
-            <a:schemeClr val="accent1"/>
-          </a:effectRef>
-          <a:fontRef idx="minor">
-            <a:schemeClr val="lt1"/>
-          </a:fontRef>
-        </p:style>
-        <p:txBody>
-          <a:bodyPr rtlCol="0" anchor="ctr"/>
-          <a:lstStyle/>
-          <a:p>
-            <a:pPr algn="ctr"/>
-          </a:p>
-        </p:txBody>
-      </p:sp>
-      <p:sp>
-        <p:nvSpPr>
-          <p:cNvPr id="17" name="TextBox 16"/>
-          <p:cNvSpPr txBox="1"/>
-          <p:nvPr/>
-        </p:nvSpPr>
-        <p:spPr>
-          <a:xfrm>
-            <a:off x="886968" y="3182112"/>
-            <a:ext cx="420624" cy="420624"/>
-          </a:xfrm>
-          <a:prstGeom prst="rect">
-            <a:avLst/>
-          </a:prstGeom>
-          <a:noFill/>
-        </p:spPr>
-        <p:txBody>
-          <a:bodyPr wrap="square" anchor="ctr" lIns="0" rIns="0" tIns="0" bIns="0">
-            <a:spAutoFit/>
-          </a:bodyPr>
-          <a:lstStyle/>
-          <a:p>
-            <a:pPr algn="ctr">
-              <a:spcBef>
-                <a:spcPts val="0"/>
-              </a:spcBef>
-              <a:spcAft>
-                <a:spcPts val="0"/>
-              </a:spcAft>
-            </a:pPr>
-            <a:r>
-              <a:rPr sz="1400" b="1" i="0">
-                <a:solidFill>
-                  <a:srgbClr val="FFFFFF"/>
-                </a:solidFill>
-                <a:latin typeface="Calibri"/>
-              </a:rPr>
-              <a:t>3</a:t>
-            </a:r>
-          </a:p>
-        </p:txBody>
-      </p:sp>
-      <p:sp>
-        <p:nvSpPr>
-          <p:cNvPr id="18" name="TextBox 17"/>
-          <p:cNvSpPr txBox="1"/>
-          <p:nvPr/>
-        </p:nvSpPr>
-        <p:spPr>
-          <a:xfrm>
-            <a:off x="1554480" y="3054096"/>
-            <a:ext cx="2606040" cy="731520"/>
-          </a:xfrm>
-          <a:prstGeom prst="rect">
-            <a:avLst/>
-          </a:prstGeom>
-          <a:noFill/>
-        </p:spPr>
-        <p:txBody>
-          <a:bodyPr wrap="square" anchor="ctr" lIns="0" rIns="0" tIns="0" bIns="0">
-            <a:spAutoFit/>
-          </a:bodyPr>
-          <a:lstStyle/>
-          <a:p>
-            <a:pPr algn="l">
-              <a:spcBef>
-                <a:spcPts val="0"/>
-              </a:spcBef>
-              <a:spcAft>
-                <a:spcPts val="200"/>
-              </a:spcAft>
-            </a:pPr>
-            <a:r>
-              <a:rPr sz="1450" b="1" i="0">
-                <a:solidFill>
-                  <a:srgbClr val="09131B"/>
-                </a:solidFill>
-                <a:latin typeface="Calibri"/>
-              </a:rPr>
-              <a:t>Negotiate from strength</a:t>
-            </a:r>
-          </a:p>
-          <a:p>
-            <a:pPr algn="l">
-              <a:spcBef>
-                <a:spcPts val="0"/>
-              </a:spcBef>
-              <a:spcAft>
-                <a:spcPts val="0"/>
-              </a:spcAft>
-            </a:pPr>
-            <a:r>
-              <a:rPr sz="1130" b="0" i="0">
-                <a:solidFill>
-                  <a:srgbClr val="595959"/>
-                </a:solidFill>
-                <a:latin typeface="Calibri"/>
-              </a:rPr>
-              <a:t>Vendor value, concentration and coverage analytics turn renewals into informed negotiations.</a:t>
-            </a:r>
-          </a:p>
-        </p:txBody>
-      </p:sp>
-      <p:sp>
-        <p:nvSpPr>
-          <p:cNvPr id="19" name="TextBox 18"/>
-          <p:cNvSpPr txBox="1"/>
-          <p:nvPr/>
-        </p:nvSpPr>
-        <p:spPr>
-          <a:xfrm>
-            <a:off x="4297680" y="3182112"/>
-            <a:ext cx="1554480" cy="411480"/>
-          </a:xfrm>
-          <a:prstGeom prst="rect">
-            <a:avLst/>
-          </a:prstGeom>
-          <a:noFill/>
-        </p:spPr>
-        <p:txBody>
-          <a:bodyPr wrap="square" anchor="ctr" lIns="0" rIns="0" tIns="0" bIns="0">
-            <a:spAutoFit/>
-          </a:bodyPr>
-          <a:lstStyle/>
-          <a:p>
-            <a:pPr algn="r">
-              <a:spcBef>
-                <a:spcPts val="0"/>
-              </a:spcBef>
-              <a:spcAft>
-                <a:spcPts val="0"/>
-              </a:spcAft>
-            </a:pPr>
-            <a:r>
-              <a:rPr sz="950" b="1" i="0">
-                <a:solidFill>
-                  <a:srgbClr val="1E7F4F"/>
-                </a:solidFill>
-                <a:latin typeface="Calibri"/>
-              </a:rPr>
-              <a:t>PROCUREMENT / CI</a:t>
-            </a:r>
-          </a:p>
-        </p:txBody>
-      </p:sp>
-      <p:sp>
-        <p:nvSpPr>
-          <p:cNvPr id="20" name="Rounded Rectangle 19"/>
-          <p:cNvSpPr/>
-          <p:nvPr/>
-        </p:nvSpPr>
-        <p:spPr>
-          <a:xfrm>
-            <a:off x="6309360" y="2907792"/>
-            <a:ext cx="5349240" cy="960120"/>
-          </a:xfrm>
-          <a:prstGeom prst="roundRect">
-            <a:avLst>
-              <a:gd name="adj" fmla="val 6000"/>
-            </a:avLst>
-          </a:prstGeom>
-          <a:solidFill>
-            <a:srgbClr val="FFFFFF"/>
-          </a:solidFill>
-          <a:ln w="12700">
-            <a:solidFill>
-              <a:srgbClr val="D6DCE4"/>
-            </a:solidFill>
-          </a:ln>
-          <a:effectLst/>
-        </p:spPr>
-        <p:style>
-          <a:lnRef idx="1">
-            <a:schemeClr val="accent1"/>
-          </a:lnRef>
-          <a:fillRef idx="3">
-            <a:schemeClr val="accent1"/>
-          </a:fillRef>
-          <a:effectRef idx="2">
-            <a:schemeClr val="accent1"/>
-          </a:effectRef>
-          <a:fontRef idx="minor">
-            <a:schemeClr val="lt1"/>
-          </a:fontRef>
-        </p:style>
-        <p:txBody>
-          <a:bodyPr rtlCol="0" anchor="ctr"/>
-          <a:lstStyle/>
-          <a:p>
-            <a:pPr algn="ctr"/>
-          </a:p>
-        </p:txBody>
-      </p:sp>
-      <p:sp>
-        <p:nvSpPr>
-          <p:cNvPr id="21" name="Rounded Rectangle 20"/>
-          <p:cNvSpPr/>
-          <p:nvPr/>
-        </p:nvSpPr>
-        <p:spPr>
-          <a:xfrm>
-            <a:off x="6510528" y="3182112"/>
-            <a:ext cx="420624" cy="420624"/>
-          </a:xfrm>
-          <a:prstGeom prst="roundRect">
-            <a:avLst>
-              <a:gd name="adj" fmla="val 25000"/>
-            </a:avLst>
-          </a:prstGeom>
-          <a:solidFill>
-            <a:srgbClr val="1E7F4F"/>
-          </a:solidFill>
-          <a:ln>
-            <a:noFill/>
-          </a:ln>
-          <a:effectLst/>
-        </p:spPr>
-        <p:style>
-          <a:lnRef idx="1">
-            <a:schemeClr val="accent1"/>
-          </a:lnRef>
-          <a:fillRef idx="3">
-            <a:schemeClr val="accent1"/>
-          </a:fillRef>
-          <a:effectRef idx="2">
-            <a:schemeClr val="accent1"/>
-          </a:effectRef>
-          <a:fontRef idx="minor">
-            <a:schemeClr val="lt1"/>
-          </a:fontRef>
-        </p:style>
-        <p:txBody>
-          <a:bodyPr rtlCol="0" anchor="ctr"/>
-          <a:lstStyle/>
-          <a:p>
-            <a:pPr algn="ctr"/>
-          </a:p>
-        </p:txBody>
-      </p:sp>
-      <p:sp>
-        <p:nvSpPr>
-          <p:cNvPr id="22" name="TextBox 21"/>
-          <p:cNvSpPr txBox="1"/>
-          <p:nvPr/>
-        </p:nvSpPr>
-        <p:spPr>
-          <a:xfrm>
-            <a:off x="6510528" y="3182112"/>
-            <a:ext cx="420624" cy="420624"/>
-          </a:xfrm>
-          <a:prstGeom prst="rect">
-            <a:avLst/>
-          </a:prstGeom>
-          <a:noFill/>
-        </p:spPr>
-        <p:txBody>
-          <a:bodyPr wrap="square" anchor="ctr" lIns="0" rIns="0" tIns="0" bIns="0">
-            <a:spAutoFit/>
-          </a:bodyPr>
-          <a:lstStyle/>
-          <a:p>
-            <a:pPr algn="ctr">
-              <a:spcBef>
-                <a:spcPts val="0"/>
-              </a:spcBef>
-              <a:spcAft>
-                <a:spcPts val="0"/>
-              </a:spcAft>
-            </a:pPr>
-            <a:r>
-              <a:rPr sz="1400" b="1" i="0">
-                <a:solidFill>
-                  <a:srgbClr val="FFFFFF"/>
-                </a:solidFill>
-                <a:latin typeface="Calibri"/>
-              </a:rPr>
-              <a:t>4</a:t>
-            </a:r>
-          </a:p>
-        </p:txBody>
-      </p:sp>
-      <p:sp>
-        <p:nvSpPr>
-          <p:cNvPr id="23" name="TextBox 22"/>
-          <p:cNvSpPr txBox="1"/>
-          <p:nvPr/>
-        </p:nvSpPr>
-        <p:spPr>
-          <a:xfrm>
-            <a:off x="7178040" y="3054096"/>
-            <a:ext cx="2606040" cy="731520"/>
-          </a:xfrm>
-          <a:prstGeom prst="rect">
-            <a:avLst/>
-          </a:prstGeom>
-          <a:noFill/>
-        </p:spPr>
-        <p:txBody>
-          <a:bodyPr wrap="square" anchor="ctr" lIns="0" rIns="0" tIns="0" bIns="0">
-            <a:spAutoFit/>
-          </a:bodyPr>
-          <a:lstStyle/>
-          <a:p>
-            <a:pPr algn="l">
-              <a:spcBef>
-                <a:spcPts val="0"/>
-              </a:spcBef>
-              <a:spcAft>
-                <a:spcPts val="200"/>
-              </a:spcAft>
-            </a:pPr>
-            <a:r>
-              <a:rPr sz="1450" b="1" i="0">
-                <a:solidFill>
-                  <a:srgbClr val="09131B"/>
-                </a:solidFill>
-                <a:latin typeface="Calibri"/>
-              </a:rPr>
-              <a:t>Audit-ready by default</a:t>
-            </a:r>
-          </a:p>
-          <a:p>
-            <a:pPr algn="l">
-              <a:spcBef>
-                <a:spcPts val="0"/>
-              </a:spcBef>
-              <a:spcAft>
-                <a:spcPts val="0"/>
-              </a:spcAft>
-            </a:pPr>
-            <a:r>
-              <a:rPr sz="1130" b="0" i="0">
-                <a:solidFill>
-                  <a:srgbClr val="595959"/>
-                </a:solidFill>
-                <a:latin typeface="Calibri"/>
-              </a:rPr>
-              <a:t>Automatic PII/PHI classification and full lineage make governance the default, not a project.</a:t>
-            </a:r>
-          </a:p>
-        </p:txBody>
-      </p:sp>
-      <p:sp>
-        <p:nvSpPr>
-          <p:cNvPr id="24" name="TextBox 23"/>
-          <p:cNvSpPr txBox="1"/>
-          <p:nvPr/>
-        </p:nvSpPr>
-        <p:spPr>
-          <a:xfrm>
-            <a:off x="9921240" y="3182112"/>
-            <a:ext cx="1554480" cy="411480"/>
-          </a:xfrm>
-          <a:prstGeom prst="rect">
-            <a:avLst/>
-          </a:prstGeom>
-          <a:noFill/>
-        </p:spPr>
-        <p:txBody>
-          <a:bodyPr wrap="square" anchor="ctr" lIns="0" rIns="0" tIns="0" bIns="0">
-            <a:spAutoFit/>
-          </a:bodyPr>
-          <a:lstStyle/>
-          <a:p>
-            <a:pPr algn="r">
-              <a:spcBef>
-                <a:spcPts val="0"/>
-              </a:spcBef>
-              <a:spcAft>
-                <a:spcPts val="0"/>
-              </a:spcAft>
-            </a:pPr>
-            <a:r>
-              <a:rPr sz="950" b="1" i="0">
-                <a:solidFill>
-                  <a:srgbClr val="1E7F4F"/>
-                </a:solidFill>
-                <a:latin typeface="Calibri"/>
-              </a:rPr>
-              <a:t>COMPLIANCE</a:t>
-            </a:r>
-          </a:p>
-        </p:txBody>
-      </p:sp>
-      <p:sp>
-        <p:nvSpPr>
-          <p:cNvPr id="25" name="Rounded Rectangle 24"/>
-          <p:cNvSpPr/>
-          <p:nvPr/>
-        </p:nvSpPr>
-        <p:spPr>
-          <a:xfrm>
-            <a:off x="685800" y="3986784"/>
-            <a:ext cx="10972800" cy="960120"/>
-          </a:xfrm>
-          <a:prstGeom prst="roundRect">
-            <a:avLst>
-              <a:gd name="adj" fmla="val 6000"/>
-            </a:avLst>
-          </a:prstGeom>
-          <a:solidFill>
-            <a:srgbClr val="FFFFFF"/>
-          </a:solidFill>
-          <a:ln w="12700">
-            <a:solidFill>
-              <a:srgbClr val="D6DCE4"/>
-            </a:solidFill>
-          </a:ln>
-          <a:effectLst/>
-        </p:spPr>
-        <p:style>
-          <a:lnRef idx="1">
-            <a:schemeClr val="accent1"/>
-          </a:lnRef>
-          <a:fillRef idx="3">
-            <a:schemeClr val="accent1"/>
-          </a:fillRef>
-          <a:effectRef idx="2">
-            <a:schemeClr val="accent1"/>
-          </a:effectRef>
-          <a:fontRef idx="minor">
-            <a:schemeClr val="lt1"/>
-          </a:fontRef>
-        </p:style>
-        <p:txBody>
-          <a:bodyPr rtlCol="0" anchor="ctr"/>
-          <a:lstStyle/>
-          <a:p>
-            <a:pPr algn="ctr"/>
-          </a:p>
-        </p:txBody>
-      </p:sp>
-      <p:sp>
-        <p:nvSpPr>
-          <p:cNvPr id="26" name="Rounded Rectangle 25"/>
-          <p:cNvSpPr/>
-          <p:nvPr/>
-        </p:nvSpPr>
-        <p:spPr>
-          <a:xfrm>
-            <a:off x="886968" y="4261104"/>
-            <a:ext cx="420624" cy="420624"/>
-          </a:xfrm>
-          <a:prstGeom prst="roundRect">
-            <a:avLst>
-              <a:gd name="adj" fmla="val 25000"/>
-            </a:avLst>
-          </a:prstGeom>
-          <a:solidFill>
-            <a:srgbClr val="1E7F4F"/>
-          </a:solidFill>
-          <a:ln>
-            <a:noFill/>
-          </a:ln>
-          <a:effectLst/>
-        </p:spPr>
-        <p:style>
-          <a:lnRef idx="1">
-            <a:schemeClr val="accent1"/>
-          </a:lnRef>
-          <a:fillRef idx="3">
-            <a:schemeClr val="accent1"/>
-          </a:fillRef>
-          <a:effectRef idx="2">
-            <a:schemeClr val="accent1"/>
-          </a:effectRef>
-          <a:fontRef idx="minor">
-            <a:schemeClr val="lt1"/>
-          </a:fontRef>
-        </p:style>
-        <p:txBody>
-          <a:bodyPr rtlCol="0" anchor="ctr"/>
-          <a:lstStyle/>
-          <a:p>
-            <a:pPr algn="ctr"/>
-          </a:p>
-        </p:txBody>
-      </p:sp>
-      <p:sp>
-        <p:nvSpPr>
-          <p:cNvPr id="27" name="TextBox 26"/>
-          <p:cNvSpPr txBox="1"/>
-          <p:nvPr/>
-        </p:nvSpPr>
-        <p:spPr>
-          <a:xfrm>
-            <a:off x="886968" y="4261104"/>
-            <a:ext cx="420624" cy="420624"/>
-          </a:xfrm>
-          <a:prstGeom prst="rect">
-            <a:avLst/>
-          </a:prstGeom>
-          <a:noFill/>
-        </p:spPr>
-        <p:txBody>
-          <a:bodyPr wrap="square" anchor="ctr" lIns="0" rIns="0" tIns="0" bIns="0">
-            <a:spAutoFit/>
-          </a:bodyPr>
-          <a:lstStyle/>
-          <a:p>
-            <a:pPr algn="ctr">
-              <a:spcBef>
-                <a:spcPts val="0"/>
-              </a:spcBef>
-              <a:spcAft>
-                <a:spcPts val="0"/>
-              </a:spcAft>
-            </a:pPr>
-            <a:r>
-              <a:rPr sz="1400" b="1" i="0">
-                <a:solidFill>
-                  <a:srgbClr val="FFFFFF"/>
-                </a:solidFill>
-                <a:latin typeface="Calibri"/>
-              </a:rPr>
-              <a:t>5</a:t>
-            </a:r>
-          </a:p>
-        </p:txBody>
-      </p:sp>
-      <p:sp>
-        <p:nvSpPr>
-          <p:cNvPr id="28" name="TextBox 27"/>
-          <p:cNvSpPr txBox="1"/>
-          <p:nvPr/>
-        </p:nvSpPr>
-        <p:spPr>
-          <a:xfrm>
-            <a:off x="1554480" y="4133088"/>
-            <a:ext cx="8229600" cy="731520"/>
-          </a:xfrm>
-          <a:prstGeom prst="rect">
-            <a:avLst/>
-          </a:prstGeom>
-          <a:noFill/>
-        </p:spPr>
-        <p:txBody>
-          <a:bodyPr wrap="square" anchor="ctr" lIns="0" rIns="0" tIns="0" bIns="0">
-            <a:spAutoFit/>
-          </a:bodyPr>
-          <a:lstStyle/>
-          <a:p>
-            <a:pPr algn="l">
-              <a:spcBef>
-                <a:spcPts val="0"/>
-              </a:spcBef>
-              <a:spcAft>
-                <a:spcPts val="200"/>
-              </a:spcAft>
-            </a:pPr>
-            <a:r>
-              <a:rPr sz="1450" b="1" i="0">
-                <a:solidFill>
-                  <a:srgbClr val="09131B"/>
-                </a:solidFill>
-                <a:latin typeface="Calibri"/>
-              </a:rPr>
-              <a:t>Faster, confident decisions</a:t>
-            </a:r>
-          </a:p>
-          <a:p>
-            <a:pPr algn="l">
-              <a:spcBef>
-                <a:spcPts val="0"/>
-              </a:spcBef>
-              <a:spcAft>
-                <a:spcPts val="0"/>
-              </a:spcAft>
-            </a:pPr>
-            <a:r>
-              <a:rPr sz="1130" b="0" i="0">
-                <a:solidFill>
-                  <a:srgbClr val="595959"/>
-                </a:solidFill>
-                <a:latin typeface="Calibri"/>
-              </a:rPr>
-              <a:t>One source of truth and a natural-language ask cut manual lookups and let teams trust the number.</a:t>
-            </a:r>
-          </a:p>
-        </p:txBody>
-      </p:sp>
-      <p:sp>
-        <p:nvSpPr>
-          <p:cNvPr id="29" name="TextBox 28"/>
-          <p:cNvSpPr txBox="1"/>
-          <p:nvPr/>
-        </p:nvSpPr>
-        <p:spPr>
-          <a:xfrm>
-            <a:off x="9921240" y="4261104"/>
-            <a:ext cx="1554480" cy="411480"/>
-          </a:xfrm>
-          <a:prstGeom prst="rect">
-            <a:avLst/>
-          </a:prstGeom>
-          <a:noFill/>
-        </p:spPr>
-        <p:txBody>
-          <a:bodyPr wrap="square" anchor="ctr" lIns="0" rIns="0" tIns="0" bIns="0">
-            <a:spAutoFit/>
-          </a:bodyPr>
-          <a:lstStyle/>
-          <a:p>
-            <a:pPr algn="r">
-              <a:spcBef>
-                <a:spcPts val="0"/>
-              </a:spcBef>
-              <a:spcAft>
-                <a:spcPts val="0"/>
-              </a:spcAft>
-            </a:pPr>
-            <a:r>
-              <a:rPr sz="950" b="1" i="0">
-                <a:solidFill>
-                  <a:srgbClr val="1E7F4F"/>
-                </a:solidFill>
-                <a:latin typeface="Calibri"/>
-              </a:rPr>
-              <a:t>COMMERCIAL INSIGHTS</a:t>
-            </a:r>
-          </a:p>
-        </p:txBody>
-      </p:sp>
-      <p:sp>
-        <p:nvSpPr>
-          <p:cNvPr id="30" name="Rectangle 29"/>
-          <p:cNvSpPr/>
-          <p:nvPr/>
-        </p:nvSpPr>
-        <p:spPr>
-          <a:xfrm>
-            <a:off x="685800" y="6419088"/>
-            <a:ext cx="10820095" cy="9525"/>
-          </a:xfrm>
-          <a:prstGeom prst="rect">
-            <a:avLst/>
-          </a:prstGeom>
-          <a:solidFill>
-            <a:srgbClr val="D6DCE4"/>
-          </a:solidFill>
-          <a:ln>
-            <a:noFill/>
-          </a:ln>
-          <a:effectLst/>
-        </p:spPr>
-        <p:style>
-          <a:lnRef idx="1">
-            <a:schemeClr val="accent1"/>
-          </a:lnRef>
-          <a:fillRef idx="3">
-            <a:schemeClr val="accent1"/>
-          </a:fillRef>
-          <a:effectRef idx="2">
-            <a:schemeClr val="accent1"/>
-          </a:effectRef>
-          <a:fontRef idx="minor">
-            <a:schemeClr val="lt1"/>
-          </a:fontRef>
-        </p:style>
-        <p:txBody>
-          <a:bodyPr rtlCol="0" anchor="ctr"/>
-          <a:lstStyle/>
-          <a:p>
-            <a:pPr algn="ctr"/>
-          </a:p>
-        </p:txBody>
-      </p:sp>
-      <p:sp>
-        <p:nvSpPr>
-          <p:cNvPr id="31" name="TextBox 30"/>
-          <p:cNvSpPr txBox="1"/>
-          <p:nvPr/>
-        </p:nvSpPr>
-        <p:spPr>
-          <a:xfrm>
-            <a:off x="685800" y="6473952"/>
-            <a:ext cx="7315200" cy="274320"/>
-          </a:xfrm>
-          <a:prstGeom prst="rect">
-            <a:avLst/>
-          </a:prstGeom>
-          <a:noFill/>
-        </p:spPr>
-        <p:txBody>
-          <a:bodyPr wrap="square" anchor="t" lIns="0" rIns="0" tIns="0" bIns="0">
-            <a:spAutoFit/>
-          </a:bodyPr>
-          <a:lstStyle/>
-          <a:p>
-            <a:pPr algn="l">
-              <a:spcBef>
-                <a:spcPts val="0"/>
-              </a:spcBef>
-              <a:spcAft>
-                <a:spcPts val="0"/>
-              </a:spcAft>
-            </a:pPr>
-            <a:r>
-              <a:rPr sz="900" b="0" i="0">
-                <a:solidFill>
-                  <a:srgbClr val="A9AFB6"/>
-                </a:solidFill>
-                <a:latin typeface="Calibri"/>
-              </a:rPr>
-              <a:t>Cortex Atlas  ·  Illustrative prototype, synthetic data  ·  Confidential</a:t>
-            </a:r>
-          </a:p>
-        </p:txBody>
-      </p:sp>
-      <p:sp>
-        <p:nvSpPr>
-          <p:cNvPr id="32" name="TextBox 31"/>
-          <p:cNvSpPr txBox="1"/>
-          <p:nvPr/>
-        </p:nvSpPr>
-        <p:spPr>
-          <a:xfrm>
-            <a:off x="10591495" y="6473952"/>
-            <a:ext cx="914400" cy="274320"/>
-          </a:xfrm>
-          <a:prstGeom prst="rect">
-            <a:avLst/>
-          </a:prstGeom>
-          <a:noFill/>
-        </p:spPr>
-        <p:txBody>
-          <a:bodyPr wrap="square" anchor="t" lIns="0" rIns="0" tIns="0" bIns="0">
-            <a:spAutoFit/>
-          </a:bodyPr>
-          <a:lstStyle/>
-          <a:p>
-            <a:pPr algn="r">
-              <a:spcBef>
-                <a:spcPts val="0"/>
-              </a:spcBef>
-              <a:spcAft>
-                <a:spcPts val="0"/>
-              </a:spcAft>
-            </a:pPr>
-            <a:r>
-              <a:rPr sz="900" b="0" i="0">
-                <a:solidFill>
-                  <a:srgbClr val="A9AFB6"/>
-                </a:solidFill>
-                <a:latin typeface="Calibri"/>
-              </a:rPr>
-              <a:t>13</a:t>
             </a:r>
           </a:p>
         </p:txBody>
@@ -16319,7 +16463,7 @@
                 </a:solidFill>
                 <a:latin typeface="Calibri"/>
               </a:rPr>
-              <a:t>DESIGN &amp; ARCHITECTURE</a:t>
+              <a:t>BUSINESS VALUE</a:t>
             </a:r>
           </a:p>
         </p:txBody>
@@ -16361,7 +16505,7 @@
                 </a:solidFill>
                 <a:latin typeface="Calibri"/>
               </a:rPr>
-              <a:t>Built to drop into your Microsoft estate — and the Cortex suite</a:t>
+              <a:t>Five outcomes leadership can point to</a:t>
             </a:r>
           </a:p>
         </p:txBody>
@@ -16375,7 +16519,7 @@
         <p:spPr>
           <a:xfrm>
             <a:off x="685800" y="1828800"/>
-            <a:ext cx="5349240" cy="4023360"/>
+            <a:ext cx="5349240" cy="960120"/>
           </a:xfrm>
           <a:prstGeom prst="roundRect">
             <a:avLst>
@@ -16416,14 +16560,60 @@
       </p:sp>
       <p:sp>
         <p:nvSpPr>
-          <p:cNvPr id="6" name="TextBox 5"/>
+          <p:cNvPr id="6" name="Rounded Rectangle 5"/>
+          <p:cNvSpPr/>
+          <p:nvPr/>
+        </p:nvSpPr>
+        <p:spPr>
+          <a:xfrm>
+            <a:off x="886968" y="2103120"/>
+            <a:ext cx="420624" cy="420624"/>
+          </a:xfrm>
+          <a:prstGeom prst="roundRect">
+            <a:avLst>
+              <a:gd name="adj" fmla="val 25000"/>
+            </a:avLst>
+          </a:prstGeom>
+          <a:solidFill>
+            <a:srgbClr val="1E7F4F"/>
+          </a:solidFill>
+          <a:ln>
+            <a:noFill/>
+          </a:ln>
+          <a:effectLst/>
+        </p:spPr>
+        <p:style>
+          <a:lnRef idx="1">
+            <a:schemeClr val="accent1"/>
+          </a:lnRef>
+          <a:fillRef idx="3">
+            <a:schemeClr val="accent1"/>
+          </a:fillRef>
+          <a:effectRef idx="2">
+            <a:schemeClr val="accent1"/>
+          </a:effectRef>
+          <a:fontRef idx="minor">
+            <a:schemeClr val="lt1"/>
+          </a:fontRef>
+        </p:style>
+        <p:txBody>
+          <a:bodyPr rtlCol="0" anchor="ctr"/>
+          <a:lstStyle/>
+          <a:p>
+            <a:pPr algn="ctr"/>
+          </a:p>
+        </p:txBody>
+      </p:sp>
+      <p:sp>
+        <p:nvSpPr>
+          <p:cNvPr id="7" name="TextBox 6"/>
           <p:cNvSpPr txBox="1"/>
           <p:nvPr/>
         </p:nvSpPr>
         <p:spPr>
           <a:xfrm>
-            <a:off x="960120" y="2011680"/>
-            <a:ext cx="4800600" cy="3657600"/>
+            <a:off x="886968" y="2103120"/>
+            <a:ext cx="420624" cy="420624"/>
           </a:xfrm>
           <a:prstGeom prst="rect">
             <a:avLst/>
@@ -16431,179 +16621,144 @@
           <a:noFill/>
         </p:spPr>
         <p:txBody>
-          <a:bodyPr wrap="square" anchor="t" lIns="0" rIns="0" tIns="0" bIns="0">
+          <a:bodyPr wrap="square" anchor="ctr" lIns="0" rIns="0" tIns="0" bIns="0">
             <a:spAutoFit/>
           </a:bodyPr>
           <a:lstStyle/>
           <a:p>
+            <a:pPr algn="ctr">
+              <a:spcBef>
+                <a:spcPts val="0"/>
+              </a:spcBef>
+              <a:spcAft>
+                <a:spcPts val="0"/>
+              </a:spcAft>
+            </a:pPr>
+            <a:r>
+              <a:rPr sz="1400" b="1" i="0">
+                <a:solidFill>
+                  <a:srgbClr val="FFFFFF"/>
+                </a:solidFill>
+                <a:latin typeface="Calibri"/>
+              </a:rPr>
+              <a:t>1</a:t>
+            </a:r>
+          </a:p>
+        </p:txBody>
+      </p:sp>
+      <p:sp>
+        <p:nvSpPr>
+          <p:cNvPr id="8" name="TextBox 7"/>
+          <p:cNvSpPr txBox="1"/>
+          <p:nvPr/>
+        </p:nvSpPr>
+        <p:spPr>
+          <a:xfrm>
+            <a:off x="1554480" y="1975104"/>
+            <a:ext cx="2606040" cy="731520"/>
+          </a:xfrm>
+          <a:prstGeom prst="rect">
+            <a:avLst/>
+          </a:prstGeom>
+          <a:noFill/>
+        </p:spPr>
+        <p:txBody>
+          <a:bodyPr wrap="square" anchor="ctr" lIns="0" rIns="0" tIns="0" bIns="0">
+            <a:spAutoFit/>
+          </a:bodyPr>
+          <a:lstStyle/>
+          <a:p>
             <a:pPr algn="l">
               <a:spcBef>
                 <a:spcPts val="0"/>
               </a:spcBef>
               <a:spcAft>
-                <a:spcPts val="700"/>
-              </a:spcAft>
-            </a:pPr>
-            <a:r>
-              <a:rPr sz="1500" b="1" i="0">
+                <a:spcPts val="200"/>
+              </a:spcAft>
+            </a:pPr>
+            <a:r>
+              <a:rPr sz="1450" b="1" i="0">
                 <a:solidFill>
                   <a:srgbClr val="09131B"/>
                 </a:solidFill>
                 <a:latin typeface="Calibri"/>
               </a:rPr>
-              <a:t>The prototype you're seeing</a:t>
-            </a:r>
-            <a:r>
-              <a:rPr sz="1250" b="1">
-                <a:solidFill>
-                  <a:srgbClr val="F89739"/>
-                </a:solidFill>
-                <a:latin typeface="Calibri"/>
-              </a:rPr>
-              <a:t>—  </a:t>
-            </a:r>
-            <a:r>
-              <a:rPr sz="1250" b="1">
-                <a:solidFill>
-                  <a:srgbClr val="09131B"/>
-                </a:solidFill>
-                <a:latin typeface="Calibri"/>
-              </a:rPr>
-              <a:t>One self-contained file.</a:t>
-            </a:r>
-            <a:r>
-              <a:rPr sz="1250">
+              <a:t>Stop duplicate spend</a:t>
+            </a:r>
+          </a:p>
+          <a:p>
+            <a:pPr algn="l">
+              <a:spcBef>
+                <a:spcPts val="0"/>
+              </a:spcBef>
+              <a:spcAft>
+                <a:spcPts val="0"/>
+              </a:spcAft>
+            </a:pPr>
+            <a:r>
+              <a:rPr sz="1130" b="0" i="0">
                 <a:solidFill>
                   <a:srgbClr val="595959"/>
                 </a:solidFill>
                 <a:latin typeface="Calibri"/>
               </a:rPr>
-              <a:t> Runs in any browser, fully offline — no install to evaluate it.</a:t>
-            </a:r>
-          </a:p>
-          <a:p>
-            <a:pPr algn="l">
-              <a:spcBef>
-                <a:spcPts val="0"/>
-              </a:spcBef>
-              <a:spcAft>
-                <a:spcPts val="700"/>
-              </a:spcAft>
-            </a:pPr>
-            <a:r>
-              <a:rPr sz="1250" b="1">
-                <a:solidFill>
-                  <a:srgbClr val="F89739"/>
-                </a:solidFill>
-                <a:latin typeface="Calibri"/>
-              </a:rPr>
-              <a:t>—  </a:t>
-            </a:r>
-            <a:r>
-              <a:rPr sz="1250" b="1">
-                <a:solidFill>
-                  <a:srgbClr val="09131B"/>
-                </a:solidFill>
-                <a:latin typeface="Calibri"/>
-              </a:rPr>
-              <a:t>Cortex design system.</a:t>
-            </a:r>
-            <a:r>
-              <a:rPr sz="1250">
-                <a:solidFill>
-                  <a:srgbClr val="595959"/>
-                </a:solidFill>
-                <a:latin typeface="Calibri"/>
-              </a:rPr>
-              <a:t> Same look and behaviour as Compass, Vantage and Meridian.</a:t>
-            </a:r>
-          </a:p>
-          <a:p>
-            <a:pPr algn="l">
-              <a:spcBef>
-                <a:spcPts val="0"/>
-              </a:spcBef>
-              <a:spcAft>
-                <a:spcPts val="700"/>
-              </a:spcAft>
-            </a:pPr>
-            <a:r>
-              <a:rPr sz="1250" b="1">
-                <a:solidFill>
-                  <a:srgbClr val="F89739"/>
-                </a:solidFill>
-                <a:latin typeface="Calibri"/>
-              </a:rPr>
-              <a:t>—  </a:t>
-            </a:r>
-            <a:r>
-              <a:rPr sz="1250" b="1">
-                <a:solidFill>
-                  <a:srgbClr val="09131B"/>
-                </a:solidFill>
-                <a:latin typeface="Calibri"/>
-              </a:rPr>
-              <a:t>Lift-and-shift ready.</a:t>
-            </a:r>
-            <a:r>
-              <a:rPr sz="1250">
-                <a:solidFill>
-                  <a:srgbClr val="595959"/>
-                </a:solidFill>
-                <a:latin typeface="Calibri"/>
-              </a:rPr>
-              <a:t> Drops into the cortex-commercial-suite with near-zero rework.</a:t>
-            </a:r>
-          </a:p>
-          <a:p>
-            <a:pPr algn="l">
-              <a:spcBef>
-                <a:spcPts val="0"/>
-              </a:spcBef>
-              <a:spcAft>
-                <a:spcPts val="700"/>
-              </a:spcAft>
-            </a:pPr>
-            <a:r>
-              <a:rPr sz="1250" b="1">
-                <a:solidFill>
-                  <a:srgbClr val="F89739"/>
-                </a:solidFill>
-                <a:latin typeface="Calibri"/>
-              </a:rPr>
-              <a:t>—  </a:t>
-            </a:r>
-            <a:r>
-              <a:rPr sz="1250" b="1">
-                <a:solidFill>
-                  <a:srgbClr val="09131B"/>
-                </a:solidFill>
-                <a:latin typeface="Calibri"/>
-              </a:rPr>
-              <a:t>Synthetic data only.</a:t>
-            </a:r>
-            <a:r>
-              <a:rPr sz="1250">
-                <a:solidFill>
-                  <a:srgbClr val="595959"/>
-                </a:solidFill>
-                <a:latin typeface="Calibri"/>
-              </a:rPr>
-              <a:t> No real client or patient data anywhere in the prototype.</a:t>
-            </a:r>
-          </a:p>
-        </p:txBody>
-      </p:sp>
-      <p:sp>
-        <p:nvSpPr>
-          <p:cNvPr id="7" name="Rounded Rectangle 6"/>
+              <a:t>Overlap is caught at the point of request, before commitment — direct, recurring savings.</a:t>
+            </a:r>
+          </a:p>
+        </p:txBody>
+      </p:sp>
+      <p:sp>
+        <p:nvSpPr>
+          <p:cNvPr id="9" name="TextBox 8"/>
+          <p:cNvSpPr txBox="1"/>
+          <p:nvPr/>
+        </p:nvSpPr>
+        <p:spPr>
+          <a:xfrm>
+            <a:off x="4297680" y="2103120"/>
+            <a:ext cx="1554480" cy="411480"/>
+          </a:xfrm>
+          <a:prstGeom prst="rect">
+            <a:avLst/>
+          </a:prstGeom>
+          <a:noFill/>
+        </p:spPr>
+        <p:txBody>
+          <a:bodyPr wrap="square" anchor="ctr" lIns="0" rIns="0" tIns="0" bIns="0">
+            <a:spAutoFit/>
+          </a:bodyPr>
+          <a:lstStyle/>
+          <a:p>
+            <a:pPr algn="r">
+              <a:spcBef>
+                <a:spcPts val="0"/>
+              </a:spcBef>
+              <a:spcAft>
+                <a:spcPts val="0"/>
+              </a:spcAft>
+            </a:pPr>
+            <a:r>
+              <a:rPr sz="950" b="1" i="0">
+                <a:solidFill>
+                  <a:srgbClr val="1E7F4F"/>
+                </a:solidFill>
+                <a:latin typeface="Calibri"/>
+              </a:rPr>
+              <a:t>PROCUREMENT</a:t>
+            </a:r>
+          </a:p>
+        </p:txBody>
+      </p:sp>
+      <p:sp>
+        <p:nvSpPr>
+          <p:cNvPr id="10" name="Rounded Rectangle 9"/>
           <p:cNvSpPr/>
           <p:nvPr/>
         </p:nvSpPr>
         <p:spPr>
           <a:xfrm>
             <a:off x="6309360" y="1828800"/>
-            <a:ext cx="5349240" cy="4023360"/>
+            <a:ext cx="5349240" cy="960120"/>
           </a:xfrm>
           <a:prstGeom prst="roundRect">
             <a:avLst>
@@ -16644,64 +16799,22 @@
       </p:sp>
       <p:sp>
         <p:nvSpPr>
-          <p:cNvPr id="8" name="TextBox 7"/>
-          <p:cNvSpPr txBox="1"/>
-          <p:nvPr/>
-        </p:nvSpPr>
-        <p:spPr>
-          <a:xfrm>
-            <a:off x="6583680" y="2011680"/>
-            <a:ext cx="4800600" cy="457200"/>
-          </a:xfrm>
-          <a:prstGeom prst="rect">
-            <a:avLst/>
-          </a:prstGeom>
-          <a:noFill/>
-        </p:spPr>
-        <p:txBody>
-          <a:bodyPr wrap="square" anchor="t" lIns="0" rIns="0" tIns="0" bIns="0">
-            <a:spAutoFit/>
-          </a:bodyPr>
-          <a:lstStyle/>
-          <a:p>
-            <a:pPr algn="l">
-              <a:spcBef>
-                <a:spcPts val="0"/>
-              </a:spcBef>
-              <a:spcAft>
-                <a:spcPts val="800"/>
-              </a:spcAft>
-            </a:pPr>
-            <a:r>
-              <a:rPr sz="1500" b="1" i="0">
-                <a:solidFill>
-                  <a:srgbClr val="09131B"/>
-                </a:solidFill>
-                <a:latin typeface="Calibri"/>
-              </a:rPr>
-              <a:t>Target production stack — Microsoft-native</a:t>
-            </a:r>
-          </a:p>
-        </p:txBody>
-      </p:sp>
-      <p:sp>
-        <p:nvSpPr>
-          <p:cNvPr id="9" name="Rounded Rectangle 8"/>
+          <p:cNvPr id="11" name="Rounded Rectangle 10"/>
           <p:cNvSpPr/>
           <p:nvPr/>
         </p:nvSpPr>
         <p:spPr>
           <a:xfrm>
-            <a:off x="6583680" y="2551176"/>
-            <a:ext cx="91440" cy="457200"/>
+            <a:off x="6510528" y="2103120"/>
+            <a:ext cx="420624" cy="420624"/>
           </a:xfrm>
           <a:prstGeom prst="roundRect">
             <a:avLst>
-              <a:gd name="adj" fmla="val 50000"/>
+              <a:gd name="adj" fmla="val 25000"/>
             </a:avLst>
           </a:prstGeom>
           <a:solidFill>
-            <a:srgbClr val="F89739"/>
+            <a:srgbClr val="1E7F4F"/>
           </a:solidFill>
           <a:ln>
             <a:noFill/>
@@ -16732,14 +16845,14 @@
       </p:sp>
       <p:sp>
         <p:nvSpPr>
-          <p:cNvPr id="10" name="TextBox 9"/>
+          <p:cNvPr id="12" name="TextBox 11"/>
           <p:cNvSpPr txBox="1"/>
           <p:nvPr/>
         </p:nvSpPr>
         <p:spPr>
           <a:xfrm>
-            <a:off x="6812280" y="2514600"/>
-            <a:ext cx="4572000" cy="548640"/>
+            <a:off x="6510528" y="2103120"/>
+            <a:ext cx="420624" cy="420624"/>
           </a:xfrm>
           <a:prstGeom prst="rect">
             <a:avLst/>
@@ -16747,27 +16860,69 @@
           <a:noFill/>
         </p:spPr>
         <p:txBody>
-          <a:bodyPr wrap="square" anchor="t" lIns="0" rIns="0" tIns="0" bIns="0">
+          <a:bodyPr wrap="square" anchor="ctr" lIns="0" rIns="0" tIns="0" bIns="0">
             <a:spAutoFit/>
           </a:bodyPr>
           <a:lstStyle/>
           <a:p>
+            <a:pPr algn="ctr">
+              <a:spcBef>
+                <a:spcPts val="0"/>
+              </a:spcBef>
+              <a:spcAft>
+                <a:spcPts val="0"/>
+              </a:spcAft>
+            </a:pPr>
+            <a:r>
+              <a:rPr sz="1400" b="1" i="0">
+                <a:solidFill>
+                  <a:srgbClr val="FFFFFF"/>
+                </a:solidFill>
+                <a:latin typeface="Calibri"/>
+              </a:rPr>
+              <a:t>2</a:t>
+            </a:r>
+          </a:p>
+        </p:txBody>
+      </p:sp>
+      <p:sp>
+        <p:nvSpPr>
+          <p:cNvPr id="13" name="TextBox 12"/>
+          <p:cNvSpPr txBox="1"/>
+          <p:nvPr/>
+        </p:nvSpPr>
+        <p:spPr>
+          <a:xfrm>
+            <a:off x="7178040" y="1975104"/>
+            <a:ext cx="2606040" cy="731520"/>
+          </a:xfrm>
+          <a:prstGeom prst="rect">
+            <a:avLst/>
+          </a:prstGeom>
+          <a:noFill/>
+        </p:spPr>
+        <p:txBody>
+          <a:bodyPr wrap="square" anchor="ctr" lIns="0" rIns="0" tIns="0" bIns="0">
+            <a:spAutoFit/>
+          </a:bodyPr>
+          <a:lstStyle/>
+          <a:p>
             <a:pPr algn="l">
               <a:spcBef>
                 <a:spcPts val="0"/>
               </a:spcBef>
               <a:spcAft>
-                <a:spcPts val="100"/>
-              </a:spcAft>
-            </a:pPr>
-            <a:r>
-              <a:rPr sz="1250" b="1" i="0">
+                <a:spcPts val="200"/>
+              </a:spcAft>
+            </a:pPr>
+            <a:r>
+              <a:rPr sz="1450" b="1" i="0">
                 <a:solidFill>
                   <a:srgbClr val="09131B"/>
                 </a:solidFill>
                 <a:latin typeface="Calibri"/>
               </a:rPr>
-              <a:t>SharePoint</a:t>
+              <a:t>Never miss a renewal</a:t>
             </a:r>
           </a:p>
           <a:p>
@@ -16780,35 +16935,125 @@
               </a:spcAft>
             </a:pPr>
             <a:r>
-              <a:rPr sz="1080" b="0" i="0">
+              <a:rPr sz="1130" b="0" i="0">
                 <a:solidFill>
                   <a:srgbClr val="595959"/>
                 </a:solidFill>
                 <a:latin typeface="Calibri"/>
               </a:rPr>
-              <a:t>Storage &amp; lists — the records system</a:t>
-            </a:r>
-          </a:p>
-        </p:txBody>
-      </p:sp>
-      <p:sp>
-        <p:nvSpPr>
-          <p:cNvPr id="11" name="Rounded Rectangle 10"/>
+              <a:t>Automated 30/60/90 reminders plus impact-aware warnings end lapses and rushed, low-leverage renewals.</a:t>
+            </a:r>
+          </a:p>
+        </p:txBody>
+      </p:sp>
+      <p:sp>
+        <p:nvSpPr>
+          <p:cNvPr id="14" name="TextBox 13"/>
+          <p:cNvSpPr txBox="1"/>
+          <p:nvPr/>
+        </p:nvSpPr>
+        <p:spPr>
+          <a:xfrm>
+            <a:off x="9921240" y="2103120"/>
+            <a:ext cx="1554480" cy="411480"/>
+          </a:xfrm>
+          <a:prstGeom prst="rect">
+            <a:avLst/>
+          </a:prstGeom>
+          <a:noFill/>
+        </p:spPr>
+        <p:txBody>
+          <a:bodyPr wrap="square" anchor="ctr" lIns="0" rIns="0" tIns="0" bIns="0">
+            <a:spAutoFit/>
+          </a:bodyPr>
+          <a:lstStyle/>
+          <a:p>
+            <a:pPr algn="r">
+              <a:spcBef>
+                <a:spcPts val="0"/>
+              </a:spcBef>
+              <a:spcAft>
+                <a:spcPts val="0"/>
+              </a:spcAft>
+            </a:pPr>
+            <a:r>
+              <a:rPr sz="950" b="1" i="0">
+                <a:solidFill>
+                  <a:srgbClr val="1E7F4F"/>
+                </a:solidFill>
+                <a:latin typeface="Calibri"/>
+              </a:rPr>
+              <a:t>LEGAL / CONTINUITY</a:t>
+            </a:r>
+          </a:p>
+        </p:txBody>
+      </p:sp>
+      <p:sp>
+        <p:nvSpPr>
+          <p:cNvPr id="15" name="Rounded Rectangle 14"/>
           <p:cNvSpPr/>
           <p:nvPr/>
         </p:nvSpPr>
         <p:spPr>
           <a:xfrm>
-            <a:off x="6583680" y="3172968"/>
-            <a:ext cx="91440" cy="457200"/>
+            <a:off x="685800" y="2907792"/>
+            <a:ext cx="5349240" cy="960120"/>
           </a:xfrm>
           <a:prstGeom prst="roundRect">
             <a:avLst>
-              <a:gd name="adj" fmla="val 50000"/>
+              <a:gd name="adj" fmla="val 6000"/>
             </a:avLst>
           </a:prstGeom>
           <a:solidFill>
-            <a:srgbClr val="F89739"/>
+            <a:srgbClr val="FFFFFF"/>
+          </a:solidFill>
+          <a:ln w="12700">
+            <a:solidFill>
+              <a:srgbClr val="D6DCE4"/>
+            </a:solidFill>
+          </a:ln>
+          <a:effectLst/>
+        </p:spPr>
+        <p:style>
+          <a:lnRef idx="1">
+            <a:schemeClr val="accent1"/>
+          </a:lnRef>
+          <a:fillRef idx="3">
+            <a:schemeClr val="accent1"/>
+          </a:fillRef>
+          <a:effectRef idx="2">
+            <a:schemeClr val="accent1"/>
+          </a:effectRef>
+          <a:fontRef idx="minor">
+            <a:schemeClr val="lt1"/>
+          </a:fontRef>
+        </p:style>
+        <p:txBody>
+          <a:bodyPr rtlCol="0" anchor="ctr"/>
+          <a:lstStyle/>
+          <a:p>
+            <a:pPr algn="ctr"/>
+          </a:p>
+        </p:txBody>
+      </p:sp>
+      <p:sp>
+        <p:nvSpPr>
+          <p:cNvPr id="16" name="Rounded Rectangle 15"/>
+          <p:cNvSpPr/>
+          <p:nvPr/>
+        </p:nvSpPr>
+        <p:spPr>
+          <a:xfrm>
+            <a:off x="886968" y="3182112"/>
+            <a:ext cx="420624" cy="420624"/>
+          </a:xfrm>
+          <a:prstGeom prst="roundRect">
+            <a:avLst>
+              <a:gd name="adj" fmla="val 25000"/>
+            </a:avLst>
+          </a:prstGeom>
+          <a:solidFill>
+            <a:srgbClr val="1E7F4F"/>
           </a:solidFill>
           <a:ln>
             <a:noFill/>
@@ -16839,14 +17084,14 @@
       </p:sp>
       <p:sp>
         <p:nvSpPr>
-          <p:cNvPr id="12" name="TextBox 11"/>
+          <p:cNvPr id="17" name="TextBox 16"/>
           <p:cNvSpPr txBox="1"/>
           <p:nvPr/>
         </p:nvSpPr>
         <p:spPr>
           <a:xfrm>
-            <a:off x="6812280" y="3136392"/>
-            <a:ext cx="4572000" cy="548640"/>
+            <a:off x="886968" y="3182112"/>
+            <a:ext cx="420624" cy="420624"/>
           </a:xfrm>
           <a:prstGeom prst="rect">
             <a:avLst/>
@@ -16854,27 +17099,69 @@
           <a:noFill/>
         </p:spPr>
         <p:txBody>
-          <a:bodyPr wrap="square" anchor="t" lIns="0" rIns="0" tIns="0" bIns="0">
+          <a:bodyPr wrap="square" anchor="ctr" lIns="0" rIns="0" tIns="0" bIns="0">
             <a:spAutoFit/>
           </a:bodyPr>
           <a:lstStyle/>
           <a:p>
+            <a:pPr algn="ctr">
+              <a:spcBef>
+                <a:spcPts val="0"/>
+              </a:spcBef>
+              <a:spcAft>
+                <a:spcPts val="0"/>
+              </a:spcAft>
+            </a:pPr>
+            <a:r>
+              <a:rPr sz="1400" b="1" i="0">
+                <a:solidFill>
+                  <a:srgbClr val="FFFFFF"/>
+                </a:solidFill>
+                <a:latin typeface="Calibri"/>
+              </a:rPr>
+              <a:t>3</a:t>
+            </a:r>
+          </a:p>
+        </p:txBody>
+      </p:sp>
+      <p:sp>
+        <p:nvSpPr>
+          <p:cNvPr id="18" name="TextBox 17"/>
+          <p:cNvSpPr txBox="1"/>
+          <p:nvPr/>
+        </p:nvSpPr>
+        <p:spPr>
+          <a:xfrm>
+            <a:off x="1554480" y="3054096"/>
+            <a:ext cx="2606040" cy="731520"/>
+          </a:xfrm>
+          <a:prstGeom prst="rect">
+            <a:avLst/>
+          </a:prstGeom>
+          <a:noFill/>
+        </p:spPr>
+        <p:txBody>
+          <a:bodyPr wrap="square" anchor="ctr" lIns="0" rIns="0" tIns="0" bIns="0">
+            <a:spAutoFit/>
+          </a:bodyPr>
+          <a:lstStyle/>
+          <a:p>
             <a:pPr algn="l">
               <a:spcBef>
                 <a:spcPts val="0"/>
               </a:spcBef>
               <a:spcAft>
-                <a:spcPts val="100"/>
-              </a:spcAft>
-            </a:pPr>
-            <a:r>
-              <a:rPr sz="1250" b="1" i="0">
+                <a:spcPts val="200"/>
+              </a:spcAft>
+            </a:pPr>
+            <a:r>
+              <a:rPr sz="1450" b="1" i="0">
                 <a:solidFill>
                   <a:srgbClr val="09131B"/>
                 </a:solidFill>
                 <a:latin typeface="Calibri"/>
               </a:rPr>
-              <a:t>Power Automate</a:t>
+              <a:t>Negotiate from strength</a:t>
             </a:r>
           </a:p>
           <a:p>
@@ -16887,35 +17174,125 @@
               </a:spcAft>
             </a:pPr>
             <a:r>
-              <a:rPr sz="1080" b="0" i="0">
+              <a:rPr sz="1130" b="0" i="0">
                 <a:solidFill>
                   <a:srgbClr val="595959"/>
                 </a:solidFill>
                 <a:latin typeface="Calibri"/>
               </a:rPr>
-              <a:t>Workflow &amp; the 30/60/90 reminders</a:t>
-            </a:r>
-          </a:p>
-        </p:txBody>
-      </p:sp>
-      <p:sp>
-        <p:nvSpPr>
-          <p:cNvPr id="13" name="Rounded Rectangle 12"/>
+              <a:t>Vendor value, concentration and coverage analytics turn renewals into informed negotiations.</a:t>
+            </a:r>
+          </a:p>
+        </p:txBody>
+      </p:sp>
+      <p:sp>
+        <p:nvSpPr>
+          <p:cNvPr id="19" name="TextBox 18"/>
+          <p:cNvSpPr txBox="1"/>
+          <p:nvPr/>
+        </p:nvSpPr>
+        <p:spPr>
+          <a:xfrm>
+            <a:off x="4297680" y="3182112"/>
+            <a:ext cx="1554480" cy="411480"/>
+          </a:xfrm>
+          <a:prstGeom prst="rect">
+            <a:avLst/>
+          </a:prstGeom>
+          <a:noFill/>
+        </p:spPr>
+        <p:txBody>
+          <a:bodyPr wrap="square" anchor="ctr" lIns="0" rIns="0" tIns="0" bIns="0">
+            <a:spAutoFit/>
+          </a:bodyPr>
+          <a:lstStyle/>
+          <a:p>
+            <a:pPr algn="r">
+              <a:spcBef>
+                <a:spcPts val="0"/>
+              </a:spcBef>
+              <a:spcAft>
+                <a:spcPts val="0"/>
+              </a:spcAft>
+            </a:pPr>
+            <a:r>
+              <a:rPr sz="950" b="1" i="0">
+                <a:solidFill>
+                  <a:srgbClr val="1E7F4F"/>
+                </a:solidFill>
+                <a:latin typeface="Calibri"/>
+              </a:rPr>
+              <a:t>PROCUREMENT / CI</a:t>
+            </a:r>
+          </a:p>
+        </p:txBody>
+      </p:sp>
+      <p:sp>
+        <p:nvSpPr>
+          <p:cNvPr id="20" name="Rounded Rectangle 19"/>
           <p:cNvSpPr/>
           <p:nvPr/>
         </p:nvSpPr>
         <p:spPr>
           <a:xfrm>
-            <a:off x="6583680" y="3794760"/>
-            <a:ext cx="91440" cy="457200"/>
+            <a:off x="6309360" y="2907792"/>
+            <a:ext cx="5349240" cy="960120"/>
           </a:xfrm>
           <a:prstGeom prst="roundRect">
             <a:avLst>
-              <a:gd name="adj" fmla="val 50000"/>
+              <a:gd name="adj" fmla="val 6000"/>
             </a:avLst>
           </a:prstGeom>
           <a:solidFill>
-            <a:srgbClr val="F89739"/>
+            <a:srgbClr val="FFFFFF"/>
+          </a:solidFill>
+          <a:ln w="12700">
+            <a:solidFill>
+              <a:srgbClr val="D6DCE4"/>
+            </a:solidFill>
+          </a:ln>
+          <a:effectLst/>
+        </p:spPr>
+        <p:style>
+          <a:lnRef idx="1">
+            <a:schemeClr val="accent1"/>
+          </a:lnRef>
+          <a:fillRef idx="3">
+            <a:schemeClr val="accent1"/>
+          </a:fillRef>
+          <a:effectRef idx="2">
+            <a:schemeClr val="accent1"/>
+          </a:effectRef>
+          <a:fontRef idx="minor">
+            <a:schemeClr val="lt1"/>
+          </a:fontRef>
+        </p:style>
+        <p:txBody>
+          <a:bodyPr rtlCol="0" anchor="ctr"/>
+          <a:lstStyle/>
+          <a:p>
+            <a:pPr algn="ctr"/>
+          </a:p>
+        </p:txBody>
+      </p:sp>
+      <p:sp>
+        <p:nvSpPr>
+          <p:cNvPr id="21" name="Rounded Rectangle 20"/>
+          <p:cNvSpPr/>
+          <p:nvPr/>
+        </p:nvSpPr>
+        <p:spPr>
+          <a:xfrm>
+            <a:off x="6510528" y="3182112"/>
+            <a:ext cx="420624" cy="420624"/>
+          </a:xfrm>
+          <a:prstGeom prst="roundRect">
+            <a:avLst>
+              <a:gd name="adj" fmla="val 25000"/>
+            </a:avLst>
+          </a:prstGeom>
+          <a:solidFill>
+            <a:srgbClr val="1E7F4F"/>
           </a:solidFill>
           <a:ln>
             <a:noFill/>
@@ -16946,14 +17323,14 @@
       </p:sp>
       <p:sp>
         <p:nvSpPr>
-          <p:cNvPr id="14" name="TextBox 13"/>
+          <p:cNvPr id="22" name="TextBox 21"/>
           <p:cNvSpPr txBox="1"/>
           <p:nvPr/>
         </p:nvSpPr>
         <p:spPr>
           <a:xfrm>
-            <a:off x="6812280" y="3758184"/>
-            <a:ext cx="4572000" cy="548640"/>
+            <a:off x="6510528" y="3182112"/>
+            <a:ext cx="420624" cy="420624"/>
           </a:xfrm>
           <a:prstGeom prst="rect">
             <a:avLst/>
@@ -16961,27 +17338,69 @@
           <a:noFill/>
         </p:spPr>
         <p:txBody>
-          <a:bodyPr wrap="square" anchor="t" lIns="0" rIns="0" tIns="0" bIns="0">
+          <a:bodyPr wrap="square" anchor="ctr" lIns="0" rIns="0" tIns="0" bIns="0">
             <a:spAutoFit/>
           </a:bodyPr>
           <a:lstStyle/>
           <a:p>
+            <a:pPr algn="ctr">
+              <a:spcBef>
+                <a:spcPts val="0"/>
+              </a:spcBef>
+              <a:spcAft>
+                <a:spcPts val="0"/>
+              </a:spcAft>
+            </a:pPr>
+            <a:r>
+              <a:rPr sz="1400" b="1" i="0">
+                <a:solidFill>
+                  <a:srgbClr val="FFFFFF"/>
+                </a:solidFill>
+                <a:latin typeface="Calibri"/>
+              </a:rPr>
+              <a:t>4</a:t>
+            </a:r>
+          </a:p>
+        </p:txBody>
+      </p:sp>
+      <p:sp>
+        <p:nvSpPr>
+          <p:cNvPr id="23" name="TextBox 22"/>
+          <p:cNvSpPr txBox="1"/>
+          <p:nvPr/>
+        </p:nvSpPr>
+        <p:spPr>
+          <a:xfrm>
+            <a:off x="7178040" y="3054096"/>
+            <a:ext cx="2606040" cy="731520"/>
+          </a:xfrm>
+          <a:prstGeom prst="rect">
+            <a:avLst/>
+          </a:prstGeom>
+          <a:noFill/>
+        </p:spPr>
+        <p:txBody>
+          <a:bodyPr wrap="square" anchor="ctr" lIns="0" rIns="0" tIns="0" bIns="0">
+            <a:spAutoFit/>
+          </a:bodyPr>
+          <a:lstStyle/>
+          <a:p>
             <a:pPr algn="l">
               <a:spcBef>
                 <a:spcPts val="0"/>
               </a:spcBef>
               <a:spcAft>
-                <a:spcPts val="100"/>
-              </a:spcAft>
-            </a:pPr>
-            <a:r>
-              <a:rPr sz="1250" b="1" i="0">
+                <a:spcPts val="200"/>
+              </a:spcAft>
+            </a:pPr>
+            <a:r>
+              <a:rPr sz="1450" b="1" i="0">
                 <a:solidFill>
                   <a:srgbClr val="09131B"/>
                 </a:solidFill>
                 <a:latin typeface="Calibri"/>
               </a:rPr>
-              <a:t>Microsoft Purview</a:t>
+              <a:t>Audit-ready by default</a:t>
             </a:r>
           </a:p>
           <a:p>
@@ -16994,35 +17413,125 @@
               </a:spcAft>
             </a:pPr>
             <a:r>
-              <a:rPr sz="1080" b="0" i="0">
+              <a:rPr sz="1130" b="0" i="0">
                 <a:solidFill>
                   <a:srgbClr val="595959"/>
                 </a:solidFill>
                 <a:latin typeface="Calibri"/>
               </a:rPr>
-              <a:t>Catalogue, classification &amp; lineage</a:t>
-            </a:r>
-          </a:p>
-        </p:txBody>
-      </p:sp>
-      <p:sp>
-        <p:nvSpPr>
-          <p:cNvPr id="15" name="Rounded Rectangle 14"/>
+              <a:t>Automatic PII/PHI classification and full lineage make governance the default, not a project.</a:t>
+            </a:r>
+          </a:p>
+        </p:txBody>
+      </p:sp>
+      <p:sp>
+        <p:nvSpPr>
+          <p:cNvPr id="24" name="TextBox 23"/>
+          <p:cNvSpPr txBox="1"/>
+          <p:nvPr/>
+        </p:nvSpPr>
+        <p:spPr>
+          <a:xfrm>
+            <a:off x="9921240" y="3182112"/>
+            <a:ext cx="1554480" cy="411480"/>
+          </a:xfrm>
+          <a:prstGeom prst="rect">
+            <a:avLst/>
+          </a:prstGeom>
+          <a:noFill/>
+        </p:spPr>
+        <p:txBody>
+          <a:bodyPr wrap="square" anchor="ctr" lIns="0" rIns="0" tIns="0" bIns="0">
+            <a:spAutoFit/>
+          </a:bodyPr>
+          <a:lstStyle/>
+          <a:p>
+            <a:pPr algn="r">
+              <a:spcBef>
+                <a:spcPts val="0"/>
+              </a:spcBef>
+              <a:spcAft>
+                <a:spcPts val="0"/>
+              </a:spcAft>
+            </a:pPr>
+            <a:r>
+              <a:rPr sz="950" b="1" i="0">
+                <a:solidFill>
+                  <a:srgbClr val="1E7F4F"/>
+                </a:solidFill>
+                <a:latin typeface="Calibri"/>
+              </a:rPr>
+              <a:t>COMPLIANCE</a:t>
+            </a:r>
+          </a:p>
+        </p:txBody>
+      </p:sp>
+      <p:sp>
+        <p:nvSpPr>
+          <p:cNvPr id="25" name="Rounded Rectangle 24"/>
           <p:cNvSpPr/>
           <p:nvPr/>
         </p:nvSpPr>
         <p:spPr>
           <a:xfrm>
-            <a:off x="6583680" y="4416552"/>
-            <a:ext cx="91440" cy="457200"/>
+            <a:off x="685800" y="3986784"/>
+            <a:ext cx="10972800" cy="960120"/>
           </a:xfrm>
           <a:prstGeom prst="roundRect">
             <a:avLst>
-              <a:gd name="adj" fmla="val 50000"/>
+              <a:gd name="adj" fmla="val 6000"/>
             </a:avLst>
           </a:prstGeom>
           <a:solidFill>
-            <a:srgbClr val="F89739"/>
+            <a:srgbClr val="FFFFFF"/>
+          </a:solidFill>
+          <a:ln w="12700">
+            <a:solidFill>
+              <a:srgbClr val="D6DCE4"/>
+            </a:solidFill>
+          </a:ln>
+          <a:effectLst/>
+        </p:spPr>
+        <p:style>
+          <a:lnRef idx="1">
+            <a:schemeClr val="accent1"/>
+          </a:lnRef>
+          <a:fillRef idx="3">
+            <a:schemeClr val="accent1"/>
+          </a:fillRef>
+          <a:effectRef idx="2">
+            <a:schemeClr val="accent1"/>
+          </a:effectRef>
+          <a:fontRef idx="minor">
+            <a:schemeClr val="lt1"/>
+          </a:fontRef>
+        </p:style>
+        <p:txBody>
+          <a:bodyPr rtlCol="0" anchor="ctr"/>
+          <a:lstStyle/>
+          <a:p>
+            <a:pPr algn="ctr"/>
+          </a:p>
+        </p:txBody>
+      </p:sp>
+      <p:sp>
+        <p:nvSpPr>
+          <p:cNvPr id="26" name="Rounded Rectangle 25"/>
+          <p:cNvSpPr/>
+          <p:nvPr/>
+        </p:nvSpPr>
+        <p:spPr>
+          <a:xfrm>
+            <a:off x="886968" y="4261104"/>
+            <a:ext cx="420624" cy="420624"/>
+          </a:xfrm>
+          <a:prstGeom prst="roundRect">
+            <a:avLst>
+              <a:gd name="adj" fmla="val 25000"/>
+            </a:avLst>
+          </a:prstGeom>
+          <a:solidFill>
+            <a:srgbClr val="1E7F4F"/>
           </a:solidFill>
           <a:ln>
             <a:noFill/>
@@ -17053,14 +17562,14 @@
       </p:sp>
       <p:sp>
         <p:nvSpPr>
-          <p:cNvPr id="16" name="TextBox 15"/>
+          <p:cNvPr id="27" name="TextBox 26"/>
           <p:cNvSpPr txBox="1"/>
           <p:nvPr/>
         </p:nvSpPr>
         <p:spPr>
           <a:xfrm>
-            <a:off x="6812280" y="4379976"/>
-            <a:ext cx="4572000" cy="548640"/>
+            <a:off x="886968" y="4261104"/>
+            <a:ext cx="420624" cy="420624"/>
           </a:xfrm>
           <a:prstGeom prst="rect">
             <a:avLst/>
@@ -17068,106 +17577,41 @@
           <a:noFill/>
         </p:spPr>
         <p:txBody>
-          <a:bodyPr wrap="square" anchor="t" lIns="0" rIns="0" tIns="0" bIns="0">
+          <a:bodyPr wrap="square" anchor="ctr" lIns="0" rIns="0" tIns="0" bIns="0">
             <a:spAutoFit/>
           </a:bodyPr>
           <a:lstStyle/>
           <a:p>
-            <a:pPr algn="l">
-              <a:spcBef>
-                <a:spcPts val="0"/>
-              </a:spcBef>
-              <a:spcAft>
-                <a:spcPts val="100"/>
-              </a:spcAft>
-            </a:pPr>
-            <a:r>
-              <a:rPr sz="1250" b="1" i="0">
-                <a:solidFill>
-                  <a:srgbClr val="09131B"/>
-                </a:solidFill>
-                <a:latin typeface="Calibri"/>
-              </a:rPr>
-              <a:t>Azure OpenAI</a:t>
-            </a:r>
-          </a:p>
-          <a:p>
-            <a:pPr algn="l">
-              <a:spcBef>
-                <a:spcPts val="0"/>
-              </a:spcBef>
-              <a:spcAft>
-                <a:spcPts val="0"/>
-              </a:spcAft>
-            </a:pPr>
-            <a:r>
-              <a:rPr sz="1080" b="0" i="0">
-                <a:solidFill>
-                  <a:srgbClr val="595959"/>
-                </a:solidFill>
-                <a:latin typeface="Calibri"/>
-              </a:rPr>
-              <a:t>The intelligence &amp; Ask Atlas layer</a:t>
-            </a:r>
-          </a:p>
-        </p:txBody>
-      </p:sp>
-      <p:sp>
-        <p:nvSpPr>
-          <p:cNvPr id="17" name="Rounded Rectangle 16"/>
-          <p:cNvSpPr/>
-          <p:nvPr/>
-        </p:nvSpPr>
-        <p:spPr>
-          <a:xfrm>
-            <a:off x="6583680" y="5038344"/>
-            <a:ext cx="91440" cy="457200"/>
-          </a:xfrm>
-          <a:prstGeom prst="roundRect">
-            <a:avLst>
-              <a:gd name="adj" fmla="val 50000"/>
-            </a:avLst>
-          </a:prstGeom>
-          <a:solidFill>
-            <a:srgbClr val="F89739"/>
-          </a:solidFill>
-          <a:ln>
-            <a:noFill/>
-          </a:ln>
-          <a:effectLst/>
-        </p:spPr>
-        <p:style>
-          <a:lnRef idx="1">
-            <a:schemeClr val="accent1"/>
-          </a:lnRef>
-          <a:fillRef idx="3">
-            <a:schemeClr val="accent1"/>
-          </a:fillRef>
-          <a:effectRef idx="2">
-            <a:schemeClr val="accent1"/>
-          </a:effectRef>
-          <a:fontRef idx="minor">
-            <a:schemeClr val="lt1"/>
-          </a:fontRef>
-        </p:style>
-        <p:txBody>
-          <a:bodyPr rtlCol="0" anchor="ctr"/>
-          <a:lstStyle/>
-          <a:p>
-            <a:pPr algn="ctr"/>
-          </a:p>
-        </p:txBody>
-      </p:sp>
-      <p:sp>
-        <p:nvSpPr>
-          <p:cNvPr id="18" name="TextBox 17"/>
+            <a:pPr algn="ctr">
+              <a:spcBef>
+                <a:spcPts val="0"/>
+              </a:spcBef>
+              <a:spcAft>
+                <a:spcPts val="0"/>
+              </a:spcAft>
+            </a:pPr>
+            <a:r>
+              <a:rPr sz="1400" b="1" i="0">
+                <a:solidFill>
+                  <a:srgbClr val="FFFFFF"/>
+                </a:solidFill>
+                <a:latin typeface="Calibri"/>
+              </a:rPr>
+              <a:t>5</a:t>
+            </a:r>
+          </a:p>
+        </p:txBody>
+      </p:sp>
+      <p:sp>
+        <p:nvSpPr>
+          <p:cNvPr id="28" name="TextBox 27"/>
           <p:cNvSpPr txBox="1"/>
           <p:nvPr/>
         </p:nvSpPr>
         <p:spPr>
           <a:xfrm>
-            <a:off x="6812280" y="5001768"/>
-            <a:ext cx="4572000" cy="548640"/>
+            <a:off x="1554480" y="4133088"/>
+            <a:ext cx="8229600" cy="731520"/>
           </a:xfrm>
           <a:prstGeom prst="rect">
             <a:avLst/>
@@ -17175,7 +17619,7 @@
           <a:noFill/>
         </p:spPr>
         <p:txBody>
-          <a:bodyPr wrap="square" anchor="t" lIns="0" rIns="0" tIns="0" bIns="0">
+          <a:bodyPr wrap="square" anchor="ctr" lIns="0" rIns="0" tIns="0" bIns="0">
             <a:spAutoFit/>
           </a:bodyPr>
           <a:lstStyle/>
@@ -17185,17 +17629,17 @@
                 <a:spcPts val="0"/>
               </a:spcBef>
               <a:spcAft>
-                <a:spcPts val="100"/>
-              </a:spcAft>
-            </a:pPr>
-            <a:r>
-              <a:rPr sz="1250" b="1" i="0">
+                <a:spcPts val="200"/>
+              </a:spcAft>
+            </a:pPr>
+            <a:r>
+              <a:rPr sz="1450" b="1" i="0">
                 <a:solidFill>
                   <a:srgbClr val="09131B"/>
                 </a:solidFill>
                 <a:latin typeface="Calibri"/>
               </a:rPr>
-              <a:t>Databricks / Model N / SAP</a:t>
+              <a:t>Faster, confident decisions</a:t>
             </a:r>
           </a:p>
           <a:p>
@@ -17208,20 +17652,62 @@
               </a:spcAft>
             </a:pPr>
             <a:r>
-              <a:rPr sz="1080" b="0" i="0">
+              <a:rPr sz="1130" b="0" i="0">
                 <a:solidFill>
                   <a:srgbClr val="595959"/>
                 </a:solidFill>
                 <a:latin typeface="Calibri"/>
               </a:rPr>
-              <a:t>Data, spend and contract feeds</a:t>
-            </a:r>
-          </a:p>
-        </p:txBody>
-      </p:sp>
-      <p:sp>
-        <p:nvSpPr>
-          <p:cNvPr id="19" name="Rectangle 18"/>
+              <a:t>One source of truth and a natural-language ask cut manual lookups and let teams trust the number.</a:t>
+            </a:r>
+          </a:p>
+        </p:txBody>
+      </p:sp>
+      <p:sp>
+        <p:nvSpPr>
+          <p:cNvPr id="29" name="TextBox 28"/>
+          <p:cNvSpPr txBox="1"/>
+          <p:nvPr/>
+        </p:nvSpPr>
+        <p:spPr>
+          <a:xfrm>
+            <a:off x="9921240" y="4261104"/>
+            <a:ext cx="1554480" cy="411480"/>
+          </a:xfrm>
+          <a:prstGeom prst="rect">
+            <a:avLst/>
+          </a:prstGeom>
+          <a:noFill/>
+        </p:spPr>
+        <p:txBody>
+          <a:bodyPr wrap="square" anchor="ctr" lIns="0" rIns="0" tIns="0" bIns="0">
+            <a:spAutoFit/>
+          </a:bodyPr>
+          <a:lstStyle/>
+          <a:p>
+            <a:pPr algn="r">
+              <a:spcBef>
+                <a:spcPts val="0"/>
+              </a:spcBef>
+              <a:spcAft>
+                <a:spcPts val="0"/>
+              </a:spcAft>
+            </a:pPr>
+            <a:r>
+              <a:rPr sz="950" b="1" i="0">
+                <a:solidFill>
+                  <a:srgbClr val="1E7F4F"/>
+                </a:solidFill>
+                <a:latin typeface="Calibri"/>
+              </a:rPr>
+              <a:t>COMMERCIAL INSIGHTS</a:t>
+            </a:r>
+          </a:p>
+        </p:txBody>
+      </p:sp>
+      <p:sp>
+        <p:nvSpPr>
+          <p:cNvPr id="30" name="Rectangle 29"/>
           <p:cNvSpPr/>
           <p:nvPr/>
         </p:nvSpPr>
@@ -17265,7 +17751,7 @@
       </p:sp>
       <p:sp>
         <p:nvSpPr>
-          <p:cNvPr id="20" name="TextBox 19"/>
+          <p:cNvPr id="31" name="TextBox 30"/>
           <p:cNvSpPr txBox="1"/>
           <p:nvPr/>
         </p:nvSpPr>
@@ -17307,7 +17793,7 @@
       </p:sp>
       <p:sp>
         <p:nvSpPr>
-          <p:cNvPr id="21" name="TextBox 20"/>
+          <p:cNvPr id="32" name="TextBox 31"/>
           <p:cNvSpPr txBox="1"/>
           <p:nvPr/>
         </p:nvSpPr>
@@ -18918,7 +19404,7 @@
                 </a:solidFill>
                 <a:latin typeface="Calibri"/>
               </a:rPr>
-              <a:t>DELIVERY ROADMAP</a:t>
+              <a:t>DESIGN &amp; ARCHITECTURE</a:t>
             </a:r>
           </a:p>
         </p:txBody>
@@ -18960,7 +19446,7 @@
                 </a:solidFill>
                 <a:latin typeface="Calibri"/>
               </a:rPr>
-              <a:t>A phased rollout — value at every step</a:t>
+              <a:t>Built to drop into your Microsoft estate — and the Cortex suite</a:t>
             </a:r>
           </a:p>
         </p:txBody>
@@ -18973,8 +19459,8 @@
         </p:nvSpPr>
         <p:spPr>
           <a:xfrm>
-            <a:off x="685800" y="2011680"/>
-            <a:ext cx="3502152" cy="2926080"/>
+            <a:off x="685800" y="1828800"/>
+            <a:ext cx="5349240" cy="4023360"/>
           </a:xfrm>
           <a:prstGeom prst="roundRect">
             <a:avLst>
@@ -19015,60 +19501,14 @@
       </p:sp>
       <p:sp>
         <p:nvSpPr>
-          <p:cNvPr id="6" name="Rounded Rectangle 5"/>
-          <p:cNvSpPr/>
-          <p:nvPr/>
-        </p:nvSpPr>
-        <p:spPr>
-          <a:xfrm>
-            <a:off x="685800" y="2011680"/>
-            <a:ext cx="3502152" cy="128016"/>
-          </a:xfrm>
-          <a:prstGeom prst="roundRect">
-            <a:avLst>
-              <a:gd name="adj" fmla="val 50000"/>
-            </a:avLst>
-          </a:prstGeom>
-          <a:solidFill>
-            <a:srgbClr val="0563C1"/>
-          </a:solidFill>
-          <a:ln>
-            <a:noFill/>
-          </a:ln>
-          <a:effectLst/>
-        </p:spPr>
-        <p:style>
-          <a:lnRef idx="1">
-            <a:schemeClr val="accent1"/>
-          </a:lnRef>
-          <a:fillRef idx="3">
-            <a:schemeClr val="accent1"/>
-          </a:fillRef>
-          <a:effectRef idx="2">
-            <a:schemeClr val="accent1"/>
-          </a:effectRef>
-          <a:fontRef idx="minor">
-            <a:schemeClr val="lt1"/>
-          </a:fontRef>
-        </p:style>
-        <p:txBody>
-          <a:bodyPr rtlCol="0" anchor="ctr"/>
-          <a:lstStyle/>
-          <a:p>
-            <a:pPr algn="ctr"/>
-          </a:p>
-        </p:txBody>
-      </p:sp>
-      <p:sp>
-        <p:nvSpPr>
-          <p:cNvPr id="7" name="TextBox 6"/>
+          <p:cNvPr id="6" name="TextBox 5"/>
           <p:cNvSpPr txBox="1"/>
           <p:nvPr/>
         </p:nvSpPr>
         <p:spPr>
           <a:xfrm>
-            <a:off x="914400" y="2377440"/>
-            <a:ext cx="3044952" cy="2468880"/>
+            <a:off x="960120" y="2011680"/>
+            <a:ext cx="4800600" cy="3657600"/>
           </a:xfrm>
           <a:prstGeom prst="rect">
             <a:avLst/>
@@ -19086,17 +19526,44 @@
                 <a:spcPts val="0"/>
               </a:spcBef>
               <a:spcAft>
-                <a:spcPts val="200"/>
-              </a:spcAft>
-            </a:pPr>
-            <a:r>
-              <a:rPr sz="1100" b="1" i="0">
-                <a:solidFill>
-                  <a:srgbClr val="0563C1"/>
-                </a:solidFill>
-                <a:latin typeface="Calibri"/>
-              </a:rPr>
-              <a:t>PHASE 1</a:t>
+                <a:spcPts val="700"/>
+              </a:spcAft>
+            </a:pPr>
+            <a:r>
+              <a:rPr sz="1500" b="1" i="0">
+                <a:solidFill>
+                  <a:srgbClr val="09131B"/>
+                </a:solidFill>
+                <a:latin typeface="Calibri"/>
+              </a:rPr>
+              <a:t>The prototype you're seeing</a:t>
+            </a:r>
+            <a:r>
+              <a:rPr sz="1250" b="1">
+                <a:solidFill>
+                  <a:srgbClr val="F89739"/>
+                </a:solidFill>
+                <a:latin typeface="Calibri"/>
+              </a:rPr>
+              <a:t>—  </a:t>
+            </a:r>
+            <a:r>
+              <a:rPr sz="1250" b="1">
+                <a:solidFill>
+                  <a:srgbClr val="09131B"/>
+                </a:solidFill>
+                <a:latin typeface="Calibri"/>
+              </a:rPr>
+              <a:t>One self-contained file.</a:t>
+            </a:r>
+            <a:r>
+              <a:rPr sz="1250">
+                <a:solidFill>
+                  <a:srgbClr val="595959"/>
+                </a:solidFill>
+                <a:latin typeface="Calibri"/>
+              </a:rPr>
+              <a:t> Runs in any browser, fully offline — no install to evaluate it.</a:t>
             </a:r>
           </a:p>
           <a:p>
@@ -19105,17 +19572,35 @@
                 <a:spcPts val="0"/>
               </a:spcBef>
               <a:spcAft>
-                <a:spcPts val="800"/>
-              </a:spcAft>
-            </a:pPr>
-            <a:r>
-              <a:rPr sz="1800" b="1" i="0">
+                <a:spcPts val="700"/>
+              </a:spcAft>
+            </a:pPr>
+            <a:r>
+              <a:rPr sz="1250" b="1">
+                <a:solidFill>
+                  <a:srgbClr val="F89739"/>
+                </a:solidFill>
+                <a:latin typeface="Calibri"/>
+              </a:rPr>
+              <a:t>—  </a:t>
+            </a:r>
+            <a:r>
+              <a:rPr sz="1250" b="1">
                 <a:solidFill>
                   <a:srgbClr val="09131B"/>
                 </a:solidFill>
                 <a:latin typeface="Calibri"/>
               </a:rPr>
-              <a:t>Foundation</a:t>
+              <a:t>Cortex design system.</a:t>
+            </a:r>
+            <a:r>
+              <a:rPr sz="1250">
+                <a:solidFill>
+                  <a:srgbClr val="595959"/>
+                </a:solidFill>
+                <a:latin typeface="Calibri"/>
+              </a:rPr>
+              <a:t> Same look and behaviour as Compass, Vantage and Meridian.</a:t>
             </a:r>
           </a:p>
           <a:p>
@@ -19124,73 +19609,86 @@
                 <a:spcPts val="0"/>
               </a:spcBef>
               <a:spcAft>
-                <a:spcPts val="0"/>
-              </a:spcAft>
-            </a:pPr>
-            <a:r>
-              <a:rPr sz="1200" b="0" i="0">
+                <a:spcPts val="700"/>
+              </a:spcAft>
+            </a:pPr>
+            <a:r>
+              <a:rPr sz="1250" b="1">
+                <a:solidFill>
+                  <a:srgbClr val="F89739"/>
+                </a:solidFill>
+                <a:latin typeface="Calibri"/>
+              </a:rPr>
+              <a:t>—  </a:t>
+            </a:r>
+            <a:r>
+              <a:rPr sz="1250" b="1">
+                <a:solidFill>
+                  <a:srgbClr val="09131B"/>
+                </a:solidFill>
+                <a:latin typeface="Calibri"/>
+              </a:rPr>
+              <a:t>Lift-and-shift ready.</a:t>
+            </a:r>
+            <a:r>
+              <a:rPr sz="1250">
                 <a:solidFill>
                   <a:srgbClr val="595959"/>
                 </a:solidFill>
                 <a:latin typeface="Calibri"/>
               </a:rPr>
-              <a:t>Migrate the five tools, the data model and the cross-links onto SharePoint. The as-is estate, connected and trustworthy.</a:t>
-            </a:r>
-          </a:p>
-        </p:txBody>
-      </p:sp>
-      <p:sp>
-        <p:nvSpPr>
-          <p:cNvPr id="8" name="TextBox 7"/>
-          <p:cNvSpPr txBox="1"/>
-          <p:nvPr/>
-        </p:nvSpPr>
-        <p:spPr>
-          <a:xfrm>
-            <a:off x="4169664" y="3291840"/>
-            <a:ext cx="146304" cy="457200"/>
-          </a:xfrm>
-          <a:prstGeom prst="rect">
-            <a:avLst/>
-          </a:prstGeom>
-          <a:noFill/>
-        </p:spPr>
-        <p:txBody>
-          <a:bodyPr wrap="square" anchor="ctr" lIns="0" rIns="0" tIns="0" bIns="0">
-            <a:spAutoFit/>
-          </a:bodyPr>
-          <a:lstStyle/>
-          <a:p>
-            <a:pPr algn="ctr">
-              <a:spcBef>
-                <a:spcPts val="0"/>
-              </a:spcBef>
-              <a:spcAft>
-                <a:spcPts val="0"/>
-              </a:spcAft>
-            </a:pPr>
-            <a:r>
-              <a:rPr sz="1600" b="1" i="0">
-                <a:solidFill>
-                  <a:srgbClr val="A9AFB6"/>
-                </a:solidFill>
-                <a:latin typeface="Calibri"/>
-              </a:rPr>
-              <a:t>→</a:t>
-            </a:r>
-          </a:p>
-        </p:txBody>
-      </p:sp>
-      <p:sp>
-        <p:nvSpPr>
-          <p:cNvPr id="9" name="Rounded Rectangle 8"/>
+              <a:t> Drops into the cortex-commercial-suite with near-zero rework.</a:t>
+            </a:r>
+          </a:p>
+          <a:p>
+            <a:pPr algn="l">
+              <a:spcBef>
+                <a:spcPts val="0"/>
+              </a:spcBef>
+              <a:spcAft>
+                <a:spcPts val="700"/>
+              </a:spcAft>
+            </a:pPr>
+            <a:r>
+              <a:rPr sz="1250" b="1">
+                <a:solidFill>
+                  <a:srgbClr val="F89739"/>
+                </a:solidFill>
+                <a:latin typeface="Calibri"/>
+              </a:rPr>
+              <a:t>—  </a:t>
+            </a:r>
+            <a:r>
+              <a:rPr sz="1250" b="1">
+                <a:solidFill>
+                  <a:srgbClr val="09131B"/>
+                </a:solidFill>
+                <a:latin typeface="Calibri"/>
+              </a:rPr>
+              <a:t>Synthetic data only.</a:t>
+            </a:r>
+            <a:r>
+              <a:rPr sz="1250">
+                <a:solidFill>
+                  <a:srgbClr val="595959"/>
+                </a:solidFill>
+                <a:latin typeface="Calibri"/>
+              </a:rPr>
+              <a:t> No real client or patient data anywhere in the prototype.</a:t>
+            </a:r>
+          </a:p>
+        </p:txBody>
+      </p:sp>
+      <p:sp>
+        <p:nvSpPr>
+          <p:cNvPr id="7" name="Rounded Rectangle 6"/>
           <p:cNvSpPr/>
           <p:nvPr/>
         </p:nvSpPr>
         <p:spPr>
           <a:xfrm>
-            <a:off x="4279392" y="2011680"/>
-            <a:ext cx="3502152" cy="2926080"/>
+            <a:off x="6309360" y="1828800"/>
+            <a:ext cx="5349240" cy="4023360"/>
           </a:xfrm>
           <a:prstGeom prst="roundRect">
             <a:avLst>
@@ -19231,14 +19729,56 @@
       </p:sp>
       <p:sp>
         <p:nvSpPr>
-          <p:cNvPr id="10" name="Rounded Rectangle 9"/>
+          <p:cNvPr id="8" name="TextBox 7"/>
+          <p:cNvSpPr txBox="1"/>
+          <p:nvPr/>
+        </p:nvSpPr>
+        <p:spPr>
+          <a:xfrm>
+            <a:off x="6583680" y="2011680"/>
+            <a:ext cx="4800600" cy="457200"/>
+          </a:xfrm>
+          <a:prstGeom prst="rect">
+            <a:avLst/>
+          </a:prstGeom>
+          <a:noFill/>
+        </p:spPr>
+        <p:txBody>
+          <a:bodyPr wrap="square" anchor="t" lIns="0" rIns="0" tIns="0" bIns="0">
+            <a:spAutoFit/>
+          </a:bodyPr>
+          <a:lstStyle/>
+          <a:p>
+            <a:pPr algn="l">
+              <a:spcBef>
+                <a:spcPts val="0"/>
+              </a:spcBef>
+              <a:spcAft>
+                <a:spcPts val="800"/>
+              </a:spcAft>
+            </a:pPr>
+            <a:r>
+              <a:rPr sz="1500" b="1" i="0">
+                <a:solidFill>
+                  <a:srgbClr val="09131B"/>
+                </a:solidFill>
+                <a:latin typeface="Calibri"/>
+              </a:rPr>
+              <a:t>Target production stack — Microsoft-native</a:t>
+            </a:r>
+          </a:p>
+        </p:txBody>
+      </p:sp>
+      <p:sp>
+        <p:nvSpPr>
+          <p:cNvPr id="9" name="Rounded Rectangle 8"/>
           <p:cNvSpPr/>
           <p:nvPr/>
         </p:nvSpPr>
         <p:spPr>
           <a:xfrm>
-            <a:off x="4279392" y="2011680"/>
-            <a:ext cx="3502152" cy="128016"/>
+            <a:off x="6583680" y="2551176"/>
+            <a:ext cx="91440" cy="457200"/>
           </a:xfrm>
           <a:prstGeom prst="roundRect">
             <a:avLst>
@@ -19277,14 +19817,14 @@
       </p:sp>
       <p:sp>
         <p:nvSpPr>
-          <p:cNvPr id="11" name="TextBox 10"/>
+          <p:cNvPr id="10" name="TextBox 9"/>
           <p:cNvSpPr txBox="1"/>
           <p:nvPr/>
         </p:nvSpPr>
         <p:spPr>
           <a:xfrm>
-            <a:off x="4507992" y="2377440"/>
-            <a:ext cx="3044952" cy="2468880"/>
+            <a:off x="6812280" y="2514600"/>
+            <a:ext cx="4572000" cy="548640"/>
           </a:xfrm>
           <a:prstGeom prst="rect">
             <a:avLst/>
@@ -19302,17 +19842,17 @@
                 <a:spcPts val="0"/>
               </a:spcBef>
               <a:spcAft>
-                <a:spcPts val="200"/>
-              </a:spcAft>
-            </a:pPr>
-            <a:r>
-              <a:rPr sz="1100" b="1" i="0">
-                <a:solidFill>
-                  <a:srgbClr val="9A5C12"/>
-                </a:solidFill>
-                <a:latin typeface="Calibri"/>
-              </a:rPr>
-              <a:t>PHASE 2</a:t>
+                <a:spcPts val="100"/>
+              </a:spcAft>
+            </a:pPr>
+            <a:r>
+              <a:rPr sz="1250" b="1" i="0">
+                <a:solidFill>
+                  <a:srgbClr val="09131B"/>
+                </a:solidFill>
+                <a:latin typeface="Calibri"/>
+              </a:rPr>
+              <a:t>SharePoint</a:t>
             </a:r>
           </a:p>
           <a:p>
@@ -19321,105 +19861,42 @@
                 <a:spcPts val="0"/>
               </a:spcBef>
               <a:spcAft>
-                <a:spcPts val="800"/>
-              </a:spcAft>
-            </a:pPr>
-            <a:r>
-              <a:rPr sz="1800" b="1" i="0">
-                <a:solidFill>
-                  <a:srgbClr val="09131B"/>
-                </a:solidFill>
-                <a:latin typeface="Calibri"/>
-              </a:rPr>
-              <a:t>Automation</a:t>
-            </a:r>
-          </a:p>
-          <a:p>
-            <a:pPr algn="l">
-              <a:spcBef>
-                <a:spcPts val="0"/>
-              </a:spcBef>
-              <a:spcAft>
-                <a:spcPts val="0"/>
-              </a:spcAft>
-            </a:pPr>
-            <a:r>
-              <a:rPr sz="1200" b="0" i="0">
+                <a:spcPts val="0"/>
+              </a:spcAft>
+            </a:pPr>
+            <a:r>
+              <a:rPr sz="1080" b="0" i="0">
                 <a:solidFill>
                   <a:srgbClr val="595959"/>
                 </a:solidFill>
                 <a:latin typeface="Calibri"/>
               </a:rPr>
-              <a:t>Power Automate reminders, approved-request → catalogue sync, renewal pre-fill, Purview PII/PHI classification, duplicate detection.</a:t>
-            </a:r>
-          </a:p>
-        </p:txBody>
-      </p:sp>
-      <p:sp>
-        <p:nvSpPr>
-          <p:cNvPr id="12" name="TextBox 11"/>
-          <p:cNvSpPr txBox="1"/>
-          <p:nvPr/>
-        </p:nvSpPr>
-        <p:spPr>
-          <a:xfrm>
-            <a:off x="7763256" y="3291840"/>
-            <a:ext cx="146304" cy="457200"/>
-          </a:xfrm>
-          <a:prstGeom prst="rect">
-            <a:avLst/>
-          </a:prstGeom>
-          <a:noFill/>
-        </p:spPr>
-        <p:txBody>
-          <a:bodyPr wrap="square" anchor="ctr" lIns="0" rIns="0" tIns="0" bIns="0">
-            <a:spAutoFit/>
-          </a:bodyPr>
-          <a:lstStyle/>
-          <a:p>
-            <a:pPr algn="ctr">
-              <a:spcBef>
-                <a:spcPts val="0"/>
-              </a:spcBef>
-              <a:spcAft>
-                <a:spcPts val="0"/>
-              </a:spcAft>
-            </a:pPr>
-            <a:r>
-              <a:rPr sz="1600" b="1" i="0">
-                <a:solidFill>
-                  <a:srgbClr val="A9AFB6"/>
-                </a:solidFill>
-                <a:latin typeface="Calibri"/>
-              </a:rPr>
-              <a:t>→</a:t>
-            </a:r>
-          </a:p>
-        </p:txBody>
-      </p:sp>
-      <p:sp>
-        <p:nvSpPr>
-          <p:cNvPr id="13" name="Rounded Rectangle 12"/>
+              <a:t>Storage &amp; lists — the records system</a:t>
+            </a:r>
+          </a:p>
+        </p:txBody>
+      </p:sp>
+      <p:sp>
+        <p:nvSpPr>
+          <p:cNvPr id="11" name="Rounded Rectangle 10"/>
           <p:cNvSpPr/>
           <p:nvPr/>
         </p:nvSpPr>
         <p:spPr>
           <a:xfrm>
-            <a:off x="7872984" y="2011680"/>
-            <a:ext cx="3502152" cy="2926080"/>
+            <a:off x="6583680" y="3172968"/>
+            <a:ext cx="91440" cy="457200"/>
           </a:xfrm>
           <a:prstGeom prst="roundRect">
             <a:avLst>
-              <a:gd name="adj" fmla="val 6000"/>
+              <a:gd name="adj" fmla="val 50000"/>
             </a:avLst>
           </a:prstGeom>
           <a:solidFill>
-            <a:srgbClr val="FFFFFF"/>
+            <a:srgbClr val="F89739"/>
           </a:solidFill>
-          <a:ln w="12700">
-            <a:solidFill>
-              <a:srgbClr val="D6DCE4"/>
-            </a:solidFill>
+          <a:ln>
+            <a:noFill/>
           </a:ln>
           <a:effectLst/>
         </p:spPr>
@@ -19447,14 +19924,75 @@
       </p:sp>
       <p:sp>
         <p:nvSpPr>
-          <p:cNvPr id="14" name="Rounded Rectangle 13"/>
+          <p:cNvPr id="12" name="TextBox 11"/>
+          <p:cNvSpPr txBox="1"/>
+          <p:nvPr/>
+        </p:nvSpPr>
+        <p:spPr>
+          <a:xfrm>
+            <a:off x="6812280" y="3136392"/>
+            <a:ext cx="4572000" cy="548640"/>
+          </a:xfrm>
+          <a:prstGeom prst="rect">
+            <a:avLst/>
+          </a:prstGeom>
+          <a:noFill/>
+        </p:spPr>
+        <p:txBody>
+          <a:bodyPr wrap="square" anchor="t" lIns="0" rIns="0" tIns="0" bIns="0">
+            <a:spAutoFit/>
+          </a:bodyPr>
+          <a:lstStyle/>
+          <a:p>
+            <a:pPr algn="l">
+              <a:spcBef>
+                <a:spcPts val="0"/>
+              </a:spcBef>
+              <a:spcAft>
+                <a:spcPts val="100"/>
+              </a:spcAft>
+            </a:pPr>
+            <a:r>
+              <a:rPr sz="1250" b="1" i="0">
+                <a:solidFill>
+                  <a:srgbClr val="09131B"/>
+                </a:solidFill>
+                <a:latin typeface="Calibri"/>
+              </a:rPr>
+              <a:t>Power Automate</a:t>
+            </a:r>
+          </a:p>
+          <a:p>
+            <a:pPr algn="l">
+              <a:spcBef>
+                <a:spcPts val="0"/>
+              </a:spcBef>
+              <a:spcAft>
+                <a:spcPts val="0"/>
+              </a:spcAft>
+            </a:pPr>
+            <a:r>
+              <a:rPr sz="1080" b="0" i="0">
+                <a:solidFill>
+                  <a:srgbClr val="595959"/>
+                </a:solidFill>
+                <a:latin typeface="Calibri"/>
+              </a:rPr>
+              <a:t>Workflow &amp; the 30/60/90 reminders</a:t>
+            </a:r>
+          </a:p>
+        </p:txBody>
+      </p:sp>
+      <p:sp>
+        <p:nvSpPr>
+          <p:cNvPr id="13" name="Rounded Rectangle 12"/>
           <p:cNvSpPr/>
           <p:nvPr/>
         </p:nvSpPr>
         <p:spPr>
           <a:xfrm>
-            <a:off x="7872984" y="2011680"/>
-            <a:ext cx="3502152" cy="128016"/>
+            <a:off x="6583680" y="3794760"/>
+            <a:ext cx="91440" cy="457200"/>
           </a:xfrm>
           <a:prstGeom prst="roundRect">
             <a:avLst>
@@ -19462,7 +20000,7 @@
             </a:avLst>
           </a:prstGeom>
           <a:solidFill>
-            <a:srgbClr val="1E7F4F"/>
+            <a:srgbClr val="F89739"/>
           </a:solidFill>
           <a:ln>
             <a:noFill/>
@@ -19493,14 +20031,14 @@
       </p:sp>
       <p:sp>
         <p:nvSpPr>
-          <p:cNvPr id="15" name="TextBox 14"/>
+          <p:cNvPr id="14" name="TextBox 13"/>
           <p:cNvSpPr txBox="1"/>
           <p:nvPr/>
         </p:nvSpPr>
         <p:spPr>
           <a:xfrm>
-            <a:off x="8101584" y="2377440"/>
-            <a:ext cx="3044952" cy="2468880"/>
+            <a:off x="6812280" y="3758184"/>
+            <a:ext cx="4572000" cy="548640"/>
           </a:xfrm>
           <a:prstGeom prst="rect">
             <a:avLst/>
@@ -19518,17 +20056,17 @@
                 <a:spcPts val="0"/>
               </a:spcBef>
               <a:spcAft>
-                <a:spcPts val="200"/>
-              </a:spcAft>
-            </a:pPr>
-            <a:r>
-              <a:rPr sz="1100" b="1" i="0">
-                <a:solidFill>
-                  <a:srgbClr val="1E7F4F"/>
-                </a:solidFill>
-                <a:latin typeface="Calibri"/>
-              </a:rPr>
-              <a:t>PHASE 3</a:t>
+                <a:spcPts val="100"/>
+              </a:spcAft>
+            </a:pPr>
+            <a:r>
+              <a:rPr sz="1250" b="1" i="0">
+                <a:solidFill>
+                  <a:srgbClr val="09131B"/>
+                </a:solidFill>
+                <a:latin typeface="Calibri"/>
+              </a:rPr>
+              <a:t>Microsoft Purview</a:t>
             </a:r>
           </a:p>
           <a:p>
@@ -19537,37 +20075,64 @@
                 <a:spcPts val="0"/>
               </a:spcBef>
               <a:spcAft>
-                <a:spcPts val="800"/>
-              </a:spcAft>
-            </a:pPr>
-            <a:r>
-              <a:rPr sz="1800" b="1" i="0">
-                <a:solidFill>
-                  <a:srgbClr val="09131B"/>
-                </a:solidFill>
-                <a:latin typeface="Calibri"/>
-              </a:rPr>
-              <a:t>Intelligence</a:t>
-            </a:r>
-          </a:p>
-          <a:p>
-            <a:pPr algn="l">
-              <a:spcBef>
-                <a:spcPts val="0"/>
-              </a:spcBef>
-              <a:spcAft>
-                <a:spcPts val="0"/>
-              </a:spcAft>
-            </a:pPr>
-            <a:r>
-              <a:rPr sz="1200" b="0" i="0">
+                <a:spcPts val="0"/>
+              </a:spcAft>
+            </a:pPr>
+            <a:r>
+              <a:rPr sz="1080" b="0" i="0">
                 <a:solidFill>
                   <a:srgbClr val="595959"/>
                 </a:solidFill>
                 <a:latin typeface="Calibri"/>
               </a:rPr>
-              <a:t>Vendor Hub Plus, renewal prediction, cross-tool signals and Ask Atlas on Azure OpenAI — the full decision layer.</a:t>
-            </a:r>
+              <a:t>Catalogue, classification &amp; lineage</a:t>
+            </a:r>
+          </a:p>
+        </p:txBody>
+      </p:sp>
+      <p:sp>
+        <p:nvSpPr>
+          <p:cNvPr id="15" name="Rounded Rectangle 14"/>
+          <p:cNvSpPr/>
+          <p:nvPr/>
+        </p:nvSpPr>
+        <p:spPr>
+          <a:xfrm>
+            <a:off x="6583680" y="4416552"/>
+            <a:ext cx="91440" cy="457200"/>
+          </a:xfrm>
+          <a:prstGeom prst="roundRect">
+            <a:avLst>
+              <a:gd name="adj" fmla="val 50000"/>
+            </a:avLst>
+          </a:prstGeom>
+          <a:solidFill>
+            <a:srgbClr val="F89739"/>
+          </a:solidFill>
+          <a:ln>
+            <a:noFill/>
+          </a:ln>
+          <a:effectLst/>
+        </p:spPr>
+        <p:style>
+          <a:lnRef idx="1">
+            <a:schemeClr val="accent1"/>
+          </a:lnRef>
+          <a:fillRef idx="3">
+            <a:schemeClr val="accent1"/>
+          </a:fillRef>
+          <a:effectRef idx="2">
+            <a:schemeClr val="accent1"/>
+          </a:effectRef>
+          <a:fontRef idx="minor">
+            <a:schemeClr val="lt1"/>
+          </a:fontRef>
+        </p:style>
+        <p:txBody>
+          <a:bodyPr rtlCol="0" anchor="ctr"/>
+          <a:lstStyle/>
+          <a:p>
+            <a:pPr algn="ctr"/>
           </a:p>
         </p:txBody>
       </p:sp>
@@ -19579,8 +20144,8 @@
         </p:nvSpPr>
         <p:spPr>
           <a:xfrm>
-            <a:off x="685800" y="5212080"/>
-            <a:ext cx="10820095" cy="731520"/>
+            <a:off x="6812280" y="4379976"/>
+            <a:ext cx="4572000" cy="548640"/>
           </a:xfrm>
           <a:prstGeom prst="rect">
             <a:avLst/>
@@ -19598,24 +20163,150 @@
                 <a:spcPts val="0"/>
               </a:spcBef>
               <a:spcAft>
-                <a:spcPts val="0"/>
-              </a:spcAft>
-            </a:pPr>
-            <a:r>
-              <a:rPr sz="1400" b="1" i="0">
+                <a:spcPts val="100"/>
+              </a:spcAft>
+            </a:pPr>
+            <a:r>
+              <a:rPr sz="1250" b="1" i="0">
                 <a:solidFill>
                   <a:srgbClr val="09131B"/>
                 </a:solidFill>
                 <a:latin typeface="Calibri"/>
               </a:rPr>
-              <a:t>The prototype already demonstrates all three layers — so each phase de-risks the next, and you see working value from Phase 1 onward.</a:t>
-            </a:r>
-          </a:p>
-        </p:txBody>
-      </p:sp>
-      <p:sp>
-        <p:nvSpPr>
-          <p:cNvPr id="17" name="Rectangle 16"/>
+              <a:t>Azure OpenAI</a:t>
+            </a:r>
+          </a:p>
+          <a:p>
+            <a:pPr algn="l">
+              <a:spcBef>
+                <a:spcPts val="0"/>
+              </a:spcBef>
+              <a:spcAft>
+                <a:spcPts val="0"/>
+              </a:spcAft>
+            </a:pPr>
+            <a:r>
+              <a:rPr sz="1080" b="0" i="0">
+                <a:solidFill>
+                  <a:srgbClr val="595959"/>
+                </a:solidFill>
+                <a:latin typeface="Calibri"/>
+              </a:rPr>
+              <a:t>The intelligence &amp; Ask Atlas layer</a:t>
+            </a:r>
+          </a:p>
+        </p:txBody>
+      </p:sp>
+      <p:sp>
+        <p:nvSpPr>
+          <p:cNvPr id="17" name="Rounded Rectangle 16"/>
+          <p:cNvSpPr/>
+          <p:nvPr/>
+        </p:nvSpPr>
+        <p:spPr>
+          <a:xfrm>
+            <a:off x="6583680" y="5038344"/>
+            <a:ext cx="91440" cy="457200"/>
+          </a:xfrm>
+          <a:prstGeom prst="roundRect">
+            <a:avLst>
+              <a:gd name="adj" fmla="val 50000"/>
+            </a:avLst>
+          </a:prstGeom>
+          <a:solidFill>
+            <a:srgbClr val="F89739"/>
+          </a:solidFill>
+          <a:ln>
+            <a:noFill/>
+          </a:ln>
+          <a:effectLst/>
+        </p:spPr>
+        <p:style>
+          <a:lnRef idx="1">
+            <a:schemeClr val="accent1"/>
+          </a:lnRef>
+          <a:fillRef idx="3">
+            <a:schemeClr val="accent1"/>
+          </a:fillRef>
+          <a:effectRef idx="2">
+            <a:schemeClr val="accent1"/>
+          </a:effectRef>
+          <a:fontRef idx="minor">
+            <a:schemeClr val="lt1"/>
+          </a:fontRef>
+        </p:style>
+        <p:txBody>
+          <a:bodyPr rtlCol="0" anchor="ctr"/>
+          <a:lstStyle/>
+          <a:p>
+            <a:pPr algn="ctr"/>
+          </a:p>
+        </p:txBody>
+      </p:sp>
+      <p:sp>
+        <p:nvSpPr>
+          <p:cNvPr id="18" name="TextBox 17"/>
+          <p:cNvSpPr txBox="1"/>
+          <p:nvPr/>
+        </p:nvSpPr>
+        <p:spPr>
+          <a:xfrm>
+            <a:off x="6812280" y="5001768"/>
+            <a:ext cx="4572000" cy="548640"/>
+          </a:xfrm>
+          <a:prstGeom prst="rect">
+            <a:avLst/>
+          </a:prstGeom>
+          <a:noFill/>
+        </p:spPr>
+        <p:txBody>
+          <a:bodyPr wrap="square" anchor="t" lIns="0" rIns="0" tIns="0" bIns="0">
+            <a:spAutoFit/>
+          </a:bodyPr>
+          <a:lstStyle/>
+          <a:p>
+            <a:pPr algn="l">
+              <a:spcBef>
+                <a:spcPts val="0"/>
+              </a:spcBef>
+              <a:spcAft>
+                <a:spcPts val="100"/>
+              </a:spcAft>
+            </a:pPr>
+            <a:r>
+              <a:rPr sz="1250" b="1" i="0">
+                <a:solidFill>
+                  <a:srgbClr val="09131B"/>
+                </a:solidFill>
+                <a:latin typeface="Calibri"/>
+              </a:rPr>
+              <a:t>Databricks / Model N / SAP</a:t>
+            </a:r>
+          </a:p>
+          <a:p>
+            <a:pPr algn="l">
+              <a:spcBef>
+                <a:spcPts val="0"/>
+              </a:spcBef>
+              <a:spcAft>
+                <a:spcPts val="0"/>
+              </a:spcAft>
+            </a:pPr>
+            <a:r>
+              <a:rPr sz="1080" b="0" i="0">
+                <a:solidFill>
+                  <a:srgbClr val="595959"/>
+                </a:solidFill>
+                <a:latin typeface="Calibri"/>
+              </a:rPr>
+              <a:t>Data, spend and contract feeds</a:t>
+            </a:r>
+          </a:p>
+        </p:txBody>
+      </p:sp>
+      <p:sp>
+        <p:nvSpPr>
+          <p:cNvPr id="19" name="Rectangle 18"/>
           <p:cNvSpPr/>
           <p:nvPr/>
         </p:nvSpPr>
@@ -19659,7 +20350,7 @@
       </p:sp>
       <p:sp>
         <p:nvSpPr>
-          <p:cNvPr id="18" name="TextBox 17"/>
+          <p:cNvPr id="20" name="TextBox 19"/>
           <p:cNvSpPr txBox="1"/>
           <p:nvPr/>
         </p:nvSpPr>
@@ -19701,7 +20392,7 @@
       </p:sp>
       <p:sp>
         <p:nvSpPr>
-          <p:cNvPr id="19" name="TextBox 18"/>
+          <p:cNvPr id="21" name="TextBox 20"/>
           <p:cNvSpPr txBox="1"/>
           <p:nvPr/>
         </p:nvSpPr>
@@ -19848,7 +20539,7 @@
                 </a:solidFill>
                 <a:latin typeface="Calibri"/>
               </a:rPr>
-              <a:t>WHY THIS APPROACH</a:t>
+              <a:t>DELIVERY ROADMAP</a:t>
             </a:r>
           </a:p>
         </p:txBody>
@@ -19890,7 +20581,7 @@
                 </a:solidFill>
                 <a:latin typeface="Calibri"/>
               </a:rPr>
-              <a:t>Lower risk, faster value, proven pattern</a:t>
+              <a:t>A phased rollout — value at every step</a:t>
             </a:r>
           </a:p>
         </p:txBody>
@@ -19903,8 +20594,8 @@
         </p:nvSpPr>
         <p:spPr>
           <a:xfrm>
-            <a:off x="685800" y="1920240"/>
-            <a:ext cx="5349240" cy="1691640"/>
+            <a:off x="685800" y="2011680"/>
+            <a:ext cx="3502152" cy="2926080"/>
           </a:xfrm>
           <a:prstGeom prst="roundRect">
             <a:avLst>
@@ -19951,16 +20642,16 @@
         </p:nvSpPr>
         <p:spPr>
           <a:xfrm>
-            <a:off x="941832" y="2194560"/>
-            <a:ext cx="457200" cy="457200"/>
+            <a:off x="685800" y="2011680"/>
+            <a:ext cx="3502152" cy="128016"/>
           </a:xfrm>
           <a:prstGeom prst="roundRect">
             <a:avLst>
-              <a:gd name="adj" fmla="val 25000"/>
+              <a:gd name="adj" fmla="val 50000"/>
             </a:avLst>
           </a:prstGeom>
           <a:solidFill>
-            <a:srgbClr val="1E7F4F"/>
+            <a:srgbClr val="0563C1"/>
           </a:solidFill>
           <a:ln>
             <a:noFill/>
@@ -19997,8 +20688,88 @@
         </p:nvSpPr>
         <p:spPr>
           <a:xfrm>
-            <a:off x="941832" y="2194560"/>
-            <a:ext cx="457200" cy="457200"/>
+            <a:off x="914400" y="2377440"/>
+            <a:ext cx="3044952" cy="2468880"/>
+          </a:xfrm>
+          <a:prstGeom prst="rect">
+            <a:avLst/>
+          </a:prstGeom>
+          <a:noFill/>
+        </p:spPr>
+        <p:txBody>
+          <a:bodyPr wrap="square" anchor="t" lIns="0" rIns="0" tIns="0" bIns="0">
+            <a:spAutoFit/>
+          </a:bodyPr>
+          <a:lstStyle/>
+          <a:p>
+            <a:pPr algn="l">
+              <a:spcBef>
+                <a:spcPts val="0"/>
+              </a:spcBef>
+              <a:spcAft>
+                <a:spcPts val="200"/>
+              </a:spcAft>
+            </a:pPr>
+            <a:r>
+              <a:rPr sz="1100" b="1" i="0">
+                <a:solidFill>
+                  <a:srgbClr val="0563C1"/>
+                </a:solidFill>
+                <a:latin typeface="Calibri"/>
+              </a:rPr>
+              <a:t>PHASE 1</a:t>
+            </a:r>
+          </a:p>
+          <a:p>
+            <a:pPr algn="l">
+              <a:spcBef>
+                <a:spcPts val="0"/>
+              </a:spcBef>
+              <a:spcAft>
+                <a:spcPts val="800"/>
+              </a:spcAft>
+            </a:pPr>
+            <a:r>
+              <a:rPr sz="1800" b="1" i="0">
+                <a:solidFill>
+                  <a:srgbClr val="09131B"/>
+                </a:solidFill>
+                <a:latin typeface="Calibri"/>
+              </a:rPr>
+              <a:t>Foundation</a:t>
+            </a:r>
+          </a:p>
+          <a:p>
+            <a:pPr algn="l">
+              <a:spcBef>
+                <a:spcPts val="0"/>
+              </a:spcBef>
+              <a:spcAft>
+                <a:spcPts val="0"/>
+              </a:spcAft>
+            </a:pPr>
+            <a:r>
+              <a:rPr sz="1200" b="0" i="0">
+                <a:solidFill>
+                  <a:srgbClr val="595959"/>
+                </a:solidFill>
+                <a:latin typeface="Calibri"/>
+              </a:rPr>
+              <a:t>Migrate the five tools, the data model and the cross-links onto SharePoint. The as-is estate, connected and trustworthy.</a:t>
+            </a:r>
+          </a:p>
+        </p:txBody>
+      </p:sp>
+      <p:sp>
+        <p:nvSpPr>
+          <p:cNvPr id="8" name="TextBox 7"/>
+          <p:cNvSpPr txBox="1"/>
+          <p:nvPr/>
+        </p:nvSpPr>
+        <p:spPr>
+          <a:xfrm>
+            <a:off x="4169664" y="3291840"/>
+            <a:ext cx="146304" cy="457200"/>
           </a:xfrm>
           <a:prstGeom prst="rect">
             <a:avLst/>
@@ -20020,74 +20791,13 @@
               </a:spcAft>
             </a:pPr>
             <a:r>
-              <a:rPr sz="1400" b="1" i="0">
-                <a:solidFill>
-                  <a:srgbClr val="FFFFFF"/>
-                </a:solidFill>
-                <a:latin typeface="Calibri"/>
-              </a:rPr>
-              <a:t>✓</a:t>
-            </a:r>
-          </a:p>
-        </p:txBody>
-      </p:sp>
-      <p:sp>
-        <p:nvSpPr>
-          <p:cNvPr id="8" name="TextBox 7"/>
-          <p:cNvSpPr txBox="1"/>
-          <p:nvPr/>
-        </p:nvSpPr>
-        <p:spPr>
-          <a:xfrm>
-            <a:off x="1600200" y="2176272"/>
-            <a:ext cx="4160520" cy="1188720"/>
-          </a:xfrm>
-          <a:prstGeom prst="rect">
-            <a:avLst/>
-          </a:prstGeom>
-          <a:noFill/>
-        </p:spPr>
-        <p:txBody>
-          <a:bodyPr wrap="square" anchor="t" lIns="0" rIns="0" tIns="0" bIns="0">
-            <a:spAutoFit/>
-          </a:bodyPr>
-          <a:lstStyle/>
-          <a:p>
-            <a:pPr algn="l">
-              <a:spcBef>
-                <a:spcPts val="0"/>
-              </a:spcBef>
-              <a:spcAft>
-                <a:spcPts val="600"/>
-              </a:spcAft>
-            </a:pPr>
-            <a:r>
               <a:rPr sz="1600" b="1" i="0">
                 <a:solidFill>
-                  <a:srgbClr val="09131B"/>
-                </a:solidFill>
-                <a:latin typeface="Calibri"/>
-              </a:rPr>
-              <a:t>Proven in the suite</a:t>
-            </a:r>
-          </a:p>
-          <a:p>
-            <a:pPr algn="l">
-              <a:spcBef>
-                <a:spcPts val="0"/>
-              </a:spcBef>
-              <a:spcAft>
-                <a:spcPts val="0"/>
-              </a:spcAft>
-            </a:pPr>
-            <a:r>
-              <a:rPr sz="1250" b="0" i="0">
-                <a:solidFill>
-                  <a:srgbClr val="595959"/>
-                </a:solidFill>
-                <a:latin typeface="Calibri"/>
-              </a:rPr>
-              <a:t>Atlas reuses the exact design and structure as Compass, Vantage and Meridian — a pattern already delivered, not invented here.</a:t>
+                  <a:srgbClr val="A9AFB6"/>
+                </a:solidFill>
+                <a:latin typeface="Calibri"/>
+              </a:rPr>
+              <a:t>→</a:t>
             </a:r>
           </a:p>
         </p:txBody>
@@ -20100,8 +20810,8 @@
         </p:nvSpPr>
         <p:spPr>
           <a:xfrm>
-            <a:off x="6309360" y="1920240"/>
-            <a:ext cx="5349240" cy="1691640"/>
+            <a:off x="4279392" y="2011680"/>
+            <a:ext cx="3502152" cy="2926080"/>
           </a:xfrm>
           <a:prstGeom prst="roundRect">
             <a:avLst>
@@ -20148,16 +20858,16 @@
         </p:nvSpPr>
         <p:spPr>
           <a:xfrm>
-            <a:off x="6565392" y="2194560"/>
-            <a:ext cx="457200" cy="457200"/>
+            <a:off x="4279392" y="2011680"/>
+            <a:ext cx="3502152" cy="128016"/>
           </a:xfrm>
           <a:prstGeom prst="roundRect">
             <a:avLst>
-              <a:gd name="adj" fmla="val 25000"/>
+              <a:gd name="adj" fmla="val 50000"/>
             </a:avLst>
           </a:prstGeom>
           <a:solidFill>
-            <a:srgbClr val="1E7F4F"/>
+            <a:srgbClr val="F89739"/>
           </a:solidFill>
           <a:ln>
             <a:noFill/>
@@ -20194,8 +20904,88 @@
         </p:nvSpPr>
         <p:spPr>
           <a:xfrm>
-            <a:off x="6565392" y="2194560"/>
-            <a:ext cx="457200" cy="457200"/>
+            <a:off x="4507992" y="2377440"/>
+            <a:ext cx="3044952" cy="2468880"/>
+          </a:xfrm>
+          <a:prstGeom prst="rect">
+            <a:avLst/>
+          </a:prstGeom>
+          <a:noFill/>
+        </p:spPr>
+        <p:txBody>
+          <a:bodyPr wrap="square" anchor="t" lIns="0" rIns="0" tIns="0" bIns="0">
+            <a:spAutoFit/>
+          </a:bodyPr>
+          <a:lstStyle/>
+          <a:p>
+            <a:pPr algn="l">
+              <a:spcBef>
+                <a:spcPts val="0"/>
+              </a:spcBef>
+              <a:spcAft>
+                <a:spcPts val="200"/>
+              </a:spcAft>
+            </a:pPr>
+            <a:r>
+              <a:rPr sz="1100" b="1" i="0">
+                <a:solidFill>
+                  <a:srgbClr val="9A5C12"/>
+                </a:solidFill>
+                <a:latin typeface="Calibri"/>
+              </a:rPr>
+              <a:t>PHASE 2</a:t>
+            </a:r>
+          </a:p>
+          <a:p>
+            <a:pPr algn="l">
+              <a:spcBef>
+                <a:spcPts val="0"/>
+              </a:spcBef>
+              <a:spcAft>
+                <a:spcPts val="800"/>
+              </a:spcAft>
+            </a:pPr>
+            <a:r>
+              <a:rPr sz="1800" b="1" i="0">
+                <a:solidFill>
+                  <a:srgbClr val="09131B"/>
+                </a:solidFill>
+                <a:latin typeface="Calibri"/>
+              </a:rPr>
+              <a:t>Automation</a:t>
+            </a:r>
+          </a:p>
+          <a:p>
+            <a:pPr algn="l">
+              <a:spcBef>
+                <a:spcPts val="0"/>
+              </a:spcBef>
+              <a:spcAft>
+                <a:spcPts val="0"/>
+              </a:spcAft>
+            </a:pPr>
+            <a:r>
+              <a:rPr sz="1200" b="0" i="0">
+                <a:solidFill>
+                  <a:srgbClr val="595959"/>
+                </a:solidFill>
+                <a:latin typeface="Calibri"/>
+              </a:rPr>
+              <a:t>Power Automate reminders, approved-request → catalogue sync, renewal pre-fill, Purview PII/PHI classification, duplicate detection.</a:t>
+            </a:r>
+          </a:p>
+        </p:txBody>
+      </p:sp>
+      <p:sp>
+        <p:nvSpPr>
+          <p:cNvPr id="12" name="TextBox 11"/>
+          <p:cNvSpPr txBox="1"/>
+          <p:nvPr/>
+        </p:nvSpPr>
+        <p:spPr>
+          <a:xfrm>
+            <a:off x="7763256" y="3291840"/>
+            <a:ext cx="146304" cy="457200"/>
           </a:xfrm>
           <a:prstGeom prst="rect">
             <a:avLst/>
@@ -20217,74 +21007,13 @@
               </a:spcAft>
             </a:pPr>
             <a:r>
-              <a:rPr sz="1400" b="1" i="0">
-                <a:solidFill>
-                  <a:srgbClr val="FFFFFF"/>
-                </a:solidFill>
-                <a:latin typeface="Calibri"/>
-              </a:rPr>
-              <a:t>✓</a:t>
-            </a:r>
-          </a:p>
-        </p:txBody>
-      </p:sp>
-      <p:sp>
-        <p:nvSpPr>
-          <p:cNvPr id="12" name="TextBox 11"/>
-          <p:cNvSpPr txBox="1"/>
-          <p:nvPr/>
-        </p:nvSpPr>
-        <p:spPr>
-          <a:xfrm>
-            <a:off x="7223760" y="2176272"/>
-            <a:ext cx="4160520" cy="1188720"/>
-          </a:xfrm>
-          <a:prstGeom prst="rect">
-            <a:avLst/>
-          </a:prstGeom>
-          <a:noFill/>
-        </p:spPr>
-        <p:txBody>
-          <a:bodyPr wrap="square" anchor="t" lIns="0" rIns="0" tIns="0" bIns="0">
-            <a:spAutoFit/>
-          </a:bodyPr>
-          <a:lstStyle/>
-          <a:p>
-            <a:pPr algn="l">
-              <a:spcBef>
-                <a:spcPts val="0"/>
-              </a:spcBef>
-              <a:spcAft>
-                <a:spcPts val="600"/>
-              </a:spcAft>
-            </a:pPr>
-            <a:r>
               <a:rPr sz="1600" b="1" i="0">
                 <a:solidFill>
-                  <a:srgbClr val="09131B"/>
-                </a:solidFill>
-                <a:latin typeface="Calibri"/>
-              </a:rPr>
-              <a:t>Your stack, orchestrated</a:t>
-            </a:r>
-          </a:p>
-          <a:p>
-            <a:pPr algn="l">
-              <a:spcBef>
-                <a:spcPts val="0"/>
-              </a:spcBef>
-              <a:spcAft>
-                <a:spcPts val="0"/>
-              </a:spcAft>
-            </a:pPr>
-            <a:r>
-              <a:rPr sz="1250" b="0" i="0">
-                <a:solidFill>
-                  <a:srgbClr val="595959"/>
-                </a:solidFill>
-                <a:latin typeface="Calibri"/>
-              </a:rPr>
-              <a:t>Built on Microsoft tools you already own — minimal new procurement, security or training overhead.</a:t>
+                  <a:srgbClr val="A9AFB6"/>
+                </a:solidFill>
+                <a:latin typeface="Calibri"/>
+              </a:rPr>
+              <a:t>→</a:t>
             </a:r>
           </a:p>
         </p:txBody>
@@ -20297,8 +21026,8 @@
         </p:nvSpPr>
         <p:spPr>
           <a:xfrm>
-            <a:off x="685800" y="3794759"/>
-            <a:ext cx="5349240" cy="1691640"/>
+            <a:off x="7872984" y="2011680"/>
+            <a:ext cx="3502152" cy="2926080"/>
           </a:xfrm>
           <a:prstGeom prst="roundRect">
             <a:avLst>
@@ -20345,12 +21074,12 @@
         </p:nvSpPr>
         <p:spPr>
           <a:xfrm>
-            <a:off x="941832" y="4069079"/>
-            <a:ext cx="457200" cy="457200"/>
+            <a:off x="7872984" y="2011680"/>
+            <a:ext cx="3502152" cy="128016"/>
           </a:xfrm>
           <a:prstGeom prst="roundRect">
             <a:avLst>
-              <a:gd name="adj" fmla="val 25000"/>
+              <a:gd name="adj" fmla="val 50000"/>
             </a:avLst>
           </a:prstGeom>
           <a:solidFill>
@@ -20391,50 +21120,8 @@
         </p:nvSpPr>
         <p:spPr>
           <a:xfrm>
-            <a:off x="941832" y="4069079"/>
-            <a:ext cx="457200" cy="457200"/>
-          </a:xfrm>
-          <a:prstGeom prst="rect">
-            <a:avLst/>
-          </a:prstGeom>
-          <a:noFill/>
-        </p:spPr>
-        <p:txBody>
-          <a:bodyPr wrap="square" anchor="ctr" lIns="0" rIns="0" tIns="0" bIns="0">
-            <a:spAutoFit/>
-          </a:bodyPr>
-          <a:lstStyle/>
-          <a:p>
-            <a:pPr algn="ctr">
-              <a:spcBef>
-                <a:spcPts val="0"/>
-              </a:spcBef>
-              <a:spcAft>
-                <a:spcPts val="0"/>
-              </a:spcAft>
-            </a:pPr>
-            <a:r>
-              <a:rPr sz="1400" b="1" i="0">
-                <a:solidFill>
-                  <a:srgbClr val="FFFFFF"/>
-                </a:solidFill>
-                <a:latin typeface="Calibri"/>
-              </a:rPr>
-              <a:t>✓</a:t>
-            </a:r>
-          </a:p>
-        </p:txBody>
-      </p:sp>
-      <p:sp>
-        <p:nvSpPr>
-          <p:cNvPr id="16" name="TextBox 15"/>
-          <p:cNvSpPr txBox="1"/>
-          <p:nvPr/>
-        </p:nvSpPr>
-        <p:spPr>
-          <a:xfrm>
-            <a:off x="1600200" y="4050791"/>
-            <a:ext cx="4160520" cy="1188720"/>
+            <a:off x="8101584" y="2377440"/>
+            <a:ext cx="3044952" cy="2468880"/>
           </a:xfrm>
           <a:prstGeom prst="rect">
             <a:avLst/>
@@ -20452,17 +21139,36 @@
                 <a:spcPts val="0"/>
               </a:spcBef>
               <a:spcAft>
-                <a:spcPts val="600"/>
-              </a:spcAft>
-            </a:pPr>
-            <a:r>
-              <a:rPr sz="1600" b="1" i="0">
+                <a:spcPts val="200"/>
+              </a:spcAft>
+            </a:pPr>
+            <a:r>
+              <a:rPr sz="1100" b="1" i="0">
+                <a:solidFill>
+                  <a:srgbClr val="1E7F4F"/>
+                </a:solidFill>
+                <a:latin typeface="Calibri"/>
+              </a:rPr>
+              <a:t>PHASE 3</a:t>
+            </a:r>
+          </a:p>
+          <a:p>
+            <a:pPr algn="l">
+              <a:spcBef>
+                <a:spcPts val="0"/>
+              </a:spcBef>
+              <a:spcAft>
+                <a:spcPts val="800"/>
+              </a:spcAft>
+            </a:pPr>
+            <a:r>
+              <a:rPr sz="1800" b="1" i="0">
                 <a:solidFill>
                   <a:srgbClr val="09131B"/>
                 </a:solidFill>
                 <a:latin typeface="Calibri"/>
               </a:rPr>
-              <a:t>Evaluate it today</a:t>
+              <a:t>Intelligence</a:t>
             </a:r>
           </a:p>
           <a:p>
@@ -20475,26 +21181,350 @@
               </a:spcAft>
             </a:pPr>
             <a:r>
-              <a:rPr sz="1250" b="0" i="0">
+              <a:rPr sz="1200" b="0" i="0">
                 <a:solidFill>
                   <a:srgbClr val="595959"/>
                 </a:solidFill>
                 <a:latin typeface="Calibri"/>
               </a:rPr>
-              <a:t>A working, offline prototype means stakeholders can click through and react now — no leap of faith.</a:t>
-            </a:r>
-          </a:p>
-        </p:txBody>
-      </p:sp>
-      <p:sp>
-        <p:nvSpPr>
-          <p:cNvPr id="17" name="Rounded Rectangle 16"/>
+              <a:t>Vendor Hub Plus, renewal prediction, cross-tool signals and Ask Atlas on Azure OpenAI — the full decision layer.</a:t>
+            </a:r>
+          </a:p>
+        </p:txBody>
+      </p:sp>
+      <p:sp>
+        <p:nvSpPr>
+          <p:cNvPr id="16" name="TextBox 15"/>
+          <p:cNvSpPr txBox="1"/>
+          <p:nvPr/>
+        </p:nvSpPr>
+        <p:spPr>
+          <a:xfrm>
+            <a:off x="685800" y="5212080"/>
+            <a:ext cx="10820095" cy="731520"/>
+          </a:xfrm>
+          <a:prstGeom prst="rect">
+            <a:avLst/>
+          </a:prstGeom>
+          <a:noFill/>
+        </p:spPr>
+        <p:txBody>
+          <a:bodyPr wrap="square" anchor="t" lIns="0" rIns="0" tIns="0" bIns="0">
+            <a:spAutoFit/>
+          </a:bodyPr>
+          <a:lstStyle/>
+          <a:p>
+            <a:pPr algn="l">
+              <a:spcBef>
+                <a:spcPts val="0"/>
+              </a:spcBef>
+              <a:spcAft>
+                <a:spcPts val="0"/>
+              </a:spcAft>
+            </a:pPr>
+            <a:r>
+              <a:rPr sz="1400" b="1" i="0">
+                <a:solidFill>
+                  <a:srgbClr val="09131B"/>
+                </a:solidFill>
+                <a:latin typeface="Calibri"/>
+              </a:rPr>
+              <a:t>The prototype already demonstrates all three layers — so each phase de-risks the next, and you see working value from Phase 1 onward.</a:t>
+            </a:r>
+          </a:p>
+        </p:txBody>
+      </p:sp>
+      <p:sp>
+        <p:nvSpPr>
+          <p:cNvPr id="17" name="Rectangle 16"/>
           <p:cNvSpPr/>
           <p:nvPr/>
         </p:nvSpPr>
         <p:spPr>
           <a:xfrm>
-            <a:off x="6309360" y="3794759"/>
+            <a:off x="685800" y="6419088"/>
+            <a:ext cx="10820095" cy="9525"/>
+          </a:xfrm>
+          <a:prstGeom prst="rect">
+            <a:avLst/>
+          </a:prstGeom>
+          <a:solidFill>
+            <a:srgbClr val="D6DCE4"/>
+          </a:solidFill>
+          <a:ln>
+            <a:noFill/>
+          </a:ln>
+          <a:effectLst/>
+        </p:spPr>
+        <p:style>
+          <a:lnRef idx="1">
+            <a:schemeClr val="accent1"/>
+          </a:lnRef>
+          <a:fillRef idx="3">
+            <a:schemeClr val="accent1"/>
+          </a:fillRef>
+          <a:effectRef idx="2">
+            <a:schemeClr val="accent1"/>
+          </a:effectRef>
+          <a:fontRef idx="minor">
+            <a:schemeClr val="lt1"/>
+          </a:fontRef>
+        </p:style>
+        <p:txBody>
+          <a:bodyPr rtlCol="0" anchor="ctr"/>
+          <a:lstStyle/>
+          <a:p>
+            <a:pPr algn="ctr"/>
+          </a:p>
+        </p:txBody>
+      </p:sp>
+      <p:sp>
+        <p:nvSpPr>
+          <p:cNvPr id="18" name="TextBox 17"/>
+          <p:cNvSpPr txBox="1"/>
+          <p:nvPr/>
+        </p:nvSpPr>
+        <p:spPr>
+          <a:xfrm>
+            <a:off x="685800" y="6473952"/>
+            <a:ext cx="7315200" cy="274320"/>
+          </a:xfrm>
+          <a:prstGeom prst="rect">
+            <a:avLst/>
+          </a:prstGeom>
+          <a:noFill/>
+        </p:spPr>
+        <p:txBody>
+          <a:bodyPr wrap="square" anchor="t" lIns="0" rIns="0" tIns="0" bIns="0">
+            <a:spAutoFit/>
+          </a:bodyPr>
+          <a:lstStyle/>
+          <a:p>
+            <a:pPr algn="l">
+              <a:spcBef>
+                <a:spcPts val="0"/>
+              </a:spcBef>
+              <a:spcAft>
+                <a:spcPts val="0"/>
+              </a:spcAft>
+            </a:pPr>
+            <a:r>
+              <a:rPr sz="900" b="0" i="0">
+                <a:solidFill>
+                  <a:srgbClr val="A9AFB6"/>
+                </a:solidFill>
+                <a:latin typeface="Calibri"/>
+              </a:rPr>
+              <a:t>Cortex Atlas  ·  Illustrative prototype, synthetic data  ·  Confidential</a:t>
+            </a:r>
+          </a:p>
+        </p:txBody>
+      </p:sp>
+      <p:sp>
+        <p:nvSpPr>
+          <p:cNvPr id="19" name="TextBox 18"/>
+          <p:cNvSpPr txBox="1"/>
+          <p:nvPr/>
+        </p:nvSpPr>
+        <p:spPr>
+          <a:xfrm>
+            <a:off x="10591495" y="6473952"/>
+            <a:ext cx="914400" cy="274320"/>
+          </a:xfrm>
+          <a:prstGeom prst="rect">
+            <a:avLst/>
+          </a:prstGeom>
+          <a:noFill/>
+        </p:spPr>
+        <p:txBody>
+          <a:bodyPr wrap="square" anchor="t" lIns="0" rIns="0" tIns="0" bIns="0">
+            <a:spAutoFit/>
+          </a:bodyPr>
+          <a:lstStyle/>
+          <a:p>
+            <a:pPr algn="r">
+              <a:spcBef>
+                <a:spcPts val="0"/>
+              </a:spcBef>
+              <a:spcAft>
+                <a:spcPts val="0"/>
+              </a:spcAft>
+            </a:pPr>
+            <a:r>
+              <a:rPr sz="900" b="0" i="0">
+                <a:solidFill>
+                  <a:srgbClr val="A9AFB6"/>
+                </a:solidFill>
+                <a:latin typeface="Calibri"/>
+              </a:rPr>
+              <a:t>16</a:t>
+            </a:r>
+          </a:p>
+        </p:txBody>
+      </p:sp>
+    </p:spTree>
+  </p:cSld>
+  <p:clrMapOvr>
+    <a:masterClrMapping/>
+  </p:clrMapOvr>
+</p:sld>
+</file>
+
+<file path=ppt/slides/slide22.xml><?xml version="1.0" encoding="utf-8"?>
+<p:sld xmlns:a="http://schemas.openxmlformats.org/drawingml/2006/main" xmlns:p="http://schemas.openxmlformats.org/presentationml/2006/main" xmlns:r="http://schemas.openxmlformats.org/officeDocument/2006/relationships">
+  <p:cSld>
+    <p:bg>
+      <p:bgPr>
+        <a:solidFill>
+          <a:srgbClr val="F4F4F4"/>
+        </a:solidFill>
+        <a:effectLst/>
+      </p:bgPr>
+    </p:bg>
+    <p:spTree>
+      <p:nvGrpSpPr>
+        <p:cNvPr id="1" name=""/>
+        <p:cNvGrpSpPr/>
+        <p:nvPr/>
+      </p:nvGrpSpPr>
+      <p:grpSpPr/>
+      <p:sp>
+        <p:nvSpPr>
+          <p:cNvPr id="2" name="Rectangle 1"/>
+          <p:cNvSpPr/>
+          <p:nvPr/>
+        </p:nvSpPr>
+        <p:spPr>
+          <a:xfrm>
+            <a:off x="685800" y="566928"/>
+            <a:ext cx="310896" cy="82296"/>
+          </a:xfrm>
+          <a:prstGeom prst="rect">
+            <a:avLst/>
+          </a:prstGeom>
+          <a:solidFill>
+            <a:srgbClr val="F89739"/>
+          </a:solidFill>
+          <a:ln>
+            <a:noFill/>
+          </a:ln>
+          <a:effectLst/>
+        </p:spPr>
+        <p:style>
+          <a:lnRef idx="1">
+            <a:schemeClr val="accent1"/>
+          </a:lnRef>
+          <a:fillRef idx="3">
+            <a:schemeClr val="accent1"/>
+          </a:fillRef>
+          <a:effectRef idx="2">
+            <a:schemeClr val="accent1"/>
+          </a:effectRef>
+          <a:fontRef idx="minor">
+            <a:schemeClr val="lt1"/>
+          </a:fontRef>
+        </p:style>
+        <p:txBody>
+          <a:bodyPr rtlCol="0" anchor="ctr"/>
+          <a:lstStyle/>
+          <a:p>
+            <a:pPr algn="ctr"/>
+          </a:p>
+        </p:txBody>
+      </p:sp>
+      <p:sp>
+        <p:nvSpPr>
+          <p:cNvPr id="3" name="TextBox 2"/>
+          <p:cNvSpPr txBox="1"/>
+          <p:nvPr/>
+        </p:nvSpPr>
+        <p:spPr>
+          <a:xfrm>
+            <a:off x="1097280" y="457200"/>
+            <a:ext cx="10408615" cy="320040"/>
+          </a:xfrm>
+          <a:prstGeom prst="rect">
+            <a:avLst/>
+          </a:prstGeom>
+          <a:noFill/>
+        </p:spPr>
+        <p:txBody>
+          <a:bodyPr wrap="square" anchor="t" lIns="0" rIns="0" tIns="0" bIns="0">
+            <a:spAutoFit/>
+          </a:bodyPr>
+          <a:lstStyle/>
+          <a:p>
+            <a:pPr algn="l">
+              <a:spcBef>
+                <a:spcPts val="0"/>
+              </a:spcBef>
+              <a:spcAft>
+                <a:spcPts val="0"/>
+              </a:spcAft>
+            </a:pPr>
+            <a:r>
+              <a:rPr sz="1250" b="1" i="0">
+                <a:solidFill>
+                  <a:srgbClr val="F89739"/>
+                </a:solidFill>
+                <a:latin typeface="Calibri"/>
+              </a:rPr>
+              <a:t>WHY THIS APPROACH</a:t>
+            </a:r>
+          </a:p>
+        </p:txBody>
+      </p:sp>
+      <p:sp>
+        <p:nvSpPr>
+          <p:cNvPr id="4" name="TextBox 3"/>
+          <p:cNvSpPr txBox="1"/>
+          <p:nvPr/>
+        </p:nvSpPr>
+        <p:spPr>
+          <a:xfrm>
+            <a:off x="685800" y="841248"/>
+            <a:ext cx="10820095" cy="640080"/>
+          </a:xfrm>
+          <a:prstGeom prst="rect">
+            <a:avLst/>
+          </a:prstGeom>
+          <a:noFill/>
+        </p:spPr>
+        <p:txBody>
+          <a:bodyPr wrap="square" anchor="t" lIns="0" rIns="0" tIns="0" bIns="0">
+            <a:spAutoFit/>
+          </a:bodyPr>
+          <a:lstStyle/>
+          <a:p>
+            <a:pPr algn="l">
+              <a:spcBef>
+                <a:spcPts val="0"/>
+              </a:spcBef>
+              <a:spcAft>
+                <a:spcPts val="0"/>
+              </a:spcAft>
+            </a:pPr>
+            <a:r>
+              <a:rPr sz="2900" b="1" i="0">
+                <a:solidFill>
+                  <a:srgbClr val="09131B"/>
+                </a:solidFill>
+                <a:latin typeface="Calibri"/>
+              </a:rPr>
+              <a:t>Lower risk, faster value, proven pattern</a:t>
+            </a:r>
+          </a:p>
+        </p:txBody>
+      </p:sp>
+      <p:sp>
+        <p:nvSpPr>
+          <p:cNvPr id="5" name="Rounded Rectangle 4"/>
+          <p:cNvSpPr/>
+          <p:nvPr/>
+        </p:nvSpPr>
+        <p:spPr>
+          <a:xfrm>
+            <a:off x="685800" y="1920240"/>
             <a:ext cx="5349240" cy="1691640"/>
           </a:xfrm>
           <a:prstGeom prst="roundRect">
@@ -20536,13 +21566,13 @@
       </p:sp>
       <p:sp>
         <p:nvSpPr>
-          <p:cNvPr id="18" name="Rounded Rectangle 17"/>
+          <p:cNvPr id="6" name="Rounded Rectangle 5"/>
           <p:cNvSpPr/>
           <p:nvPr/>
         </p:nvSpPr>
         <p:spPr>
           <a:xfrm>
-            <a:off x="6565392" y="4069079"/>
+            <a:off x="941832" y="2194560"/>
             <a:ext cx="457200" cy="457200"/>
           </a:xfrm>
           <a:prstGeom prst="roundRect">
@@ -20582,6 +21612,597 @@
       </p:sp>
       <p:sp>
         <p:nvSpPr>
+          <p:cNvPr id="7" name="TextBox 6"/>
+          <p:cNvSpPr txBox="1"/>
+          <p:nvPr/>
+        </p:nvSpPr>
+        <p:spPr>
+          <a:xfrm>
+            <a:off x="941832" y="2194560"/>
+            <a:ext cx="457200" cy="457200"/>
+          </a:xfrm>
+          <a:prstGeom prst="rect">
+            <a:avLst/>
+          </a:prstGeom>
+          <a:noFill/>
+        </p:spPr>
+        <p:txBody>
+          <a:bodyPr wrap="square" anchor="ctr" lIns="0" rIns="0" tIns="0" bIns="0">
+            <a:spAutoFit/>
+          </a:bodyPr>
+          <a:lstStyle/>
+          <a:p>
+            <a:pPr algn="ctr">
+              <a:spcBef>
+                <a:spcPts val="0"/>
+              </a:spcBef>
+              <a:spcAft>
+                <a:spcPts val="0"/>
+              </a:spcAft>
+            </a:pPr>
+            <a:r>
+              <a:rPr sz="1400" b="1" i="0">
+                <a:solidFill>
+                  <a:srgbClr val="FFFFFF"/>
+                </a:solidFill>
+                <a:latin typeface="Calibri"/>
+              </a:rPr>
+              <a:t>✓</a:t>
+            </a:r>
+          </a:p>
+        </p:txBody>
+      </p:sp>
+      <p:sp>
+        <p:nvSpPr>
+          <p:cNvPr id="8" name="TextBox 7"/>
+          <p:cNvSpPr txBox="1"/>
+          <p:nvPr/>
+        </p:nvSpPr>
+        <p:spPr>
+          <a:xfrm>
+            <a:off x="1600200" y="2176272"/>
+            <a:ext cx="4160520" cy="1188720"/>
+          </a:xfrm>
+          <a:prstGeom prst="rect">
+            <a:avLst/>
+          </a:prstGeom>
+          <a:noFill/>
+        </p:spPr>
+        <p:txBody>
+          <a:bodyPr wrap="square" anchor="t" lIns="0" rIns="0" tIns="0" bIns="0">
+            <a:spAutoFit/>
+          </a:bodyPr>
+          <a:lstStyle/>
+          <a:p>
+            <a:pPr algn="l">
+              <a:spcBef>
+                <a:spcPts val="0"/>
+              </a:spcBef>
+              <a:spcAft>
+                <a:spcPts val="600"/>
+              </a:spcAft>
+            </a:pPr>
+            <a:r>
+              <a:rPr sz="1600" b="1" i="0">
+                <a:solidFill>
+                  <a:srgbClr val="09131B"/>
+                </a:solidFill>
+                <a:latin typeface="Calibri"/>
+              </a:rPr>
+              <a:t>Proven in the suite</a:t>
+            </a:r>
+          </a:p>
+          <a:p>
+            <a:pPr algn="l">
+              <a:spcBef>
+                <a:spcPts val="0"/>
+              </a:spcBef>
+              <a:spcAft>
+                <a:spcPts val="0"/>
+              </a:spcAft>
+            </a:pPr>
+            <a:r>
+              <a:rPr sz="1250" b="0" i="0">
+                <a:solidFill>
+                  <a:srgbClr val="595959"/>
+                </a:solidFill>
+                <a:latin typeface="Calibri"/>
+              </a:rPr>
+              <a:t>Atlas reuses the exact design and structure as Compass, Vantage and Meridian — a pattern already delivered, not invented here.</a:t>
+            </a:r>
+          </a:p>
+        </p:txBody>
+      </p:sp>
+      <p:sp>
+        <p:nvSpPr>
+          <p:cNvPr id="9" name="Rounded Rectangle 8"/>
+          <p:cNvSpPr/>
+          <p:nvPr/>
+        </p:nvSpPr>
+        <p:spPr>
+          <a:xfrm>
+            <a:off x="6309360" y="1920240"/>
+            <a:ext cx="5349240" cy="1691640"/>
+          </a:xfrm>
+          <a:prstGeom prst="roundRect">
+            <a:avLst>
+              <a:gd name="adj" fmla="val 6000"/>
+            </a:avLst>
+          </a:prstGeom>
+          <a:solidFill>
+            <a:srgbClr val="FFFFFF"/>
+          </a:solidFill>
+          <a:ln w="12700">
+            <a:solidFill>
+              <a:srgbClr val="D6DCE4"/>
+            </a:solidFill>
+          </a:ln>
+          <a:effectLst/>
+        </p:spPr>
+        <p:style>
+          <a:lnRef idx="1">
+            <a:schemeClr val="accent1"/>
+          </a:lnRef>
+          <a:fillRef idx="3">
+            <a:schemeClr val="accent1"/>
+          </a:fillRef>
+          <a:effectRef idx="2">
+            <a:schemeClr val="accent1"/>
+          </a:effectRef>
+          <a:fontRef idx="minor">
+            <a:schemeClr val="lt1"/>
+          </a:fontRef>
+        </p:style>
+        <p:txBody>
+          <a:bodyPr rtlCol="0" anchor="ctr"/>
+          <a:lstStyle/>
+          <a:p>
+            <a:pPr algn="ctr"/>
+          </a:p>
+        </p:txBody>
+      </p:sp>
+      <p:sp>
+        <p:nvSpPr>
+          <p:cNvPr id="10" name="Rounded Rectangle 9"/>
+          <p:cNvSpPr/>
+          <p:nvPr/>
+        </p:nvSpPr>
+        <p:spPr>
+          <a:xfrm>
+            <a:off x="6565392" y="2194560"/>
+            <a:ext cx="457200" cy="457200"/>
+          </a:xfrm>
+          <a:prstGeom prst="roundRect">
+            <a:avLst>
+              <a:gd name="adj" fmla="val 25000"/>
+            </a:avLst>
+          </a:prstGeom>
+          <a:solidFill>
+            <a:srgbClr val="1E7F4F"/>
+          </a:solidFill>
+          <a:ln>
+            <a:noFill/>
+          </a:ln>
+          <a:effectLst/>
+        </p:spPr>
+        <p:style>
+          <a:lnRef idx="1">
+            <a:schemeClr val="accent1"/>
+          </a:lnRef>
+          <a:fillRef idx="3">
+            <a:schemeClr val="accent1"/>
+          </a:fillRef>
+          <a:effectRef idx="2">
+            <a:schemeClr val="accent1"/>
+          </a:effectRef>
+          <a:fontRef idx="minor">
+            <a:schemeClr val="lt1"/>
+          </a:fontRef>
+        </p:style>
+        <p:txBody>
+          <a:bodyPr rtlCol="0" anchor="ctr"/>
+          <a:lstStyle/>
+          <a:p>
+            <a:pPr algn="ctr"/>
+          </a:p>
+        </p:txBody>
+      </p:sp>
+      <p:sp>
+        <p:nvSpPr>
+          <p:cNvPr id="11" name="TextBox 10"/>
+          <p:cNvSpPr txBox="1"/>
+          <p:nvPr/>
+        </p:nvSpPr>
+        <p:spPr>
+          <a:xfrm>
+            <a:off x="6565392" y="2194560"/>
+            <a:ext cx="457200" cy="457200"/>
+          </a:xfrm>
+          <a:prstGeom prst="rect">
+            <a:avLst/>
+          </a:prstGeom>
+          <a:noFill/>
+        </p:spPr>
+        <p:txBody>
+          <a:bodyPr wrap="square" anchor="ctr" lIns="0" rIns="0" tIns="0" bIns="0">
+            <a:spAutoFit/>
+          </a:bodyPr>
+          <a:lstStyle/>
+          <a:p>
+            <a:pPr algn="ctr">
+              <a:spcBef>
+                <a:spcPts val="0"/>
+              </a:spcBef>
+              <a:spcAft>
+                <a:spcPts val="0"/>
+              </a:spcAft>
+            </a:pPr>
+            <a:r>
+              <a:rPr sz="1400" b="1" i="0">
+                <a:solidFill>
+                  <a:srgbClr val="FFFFFF"/>
+                </a:solidFill>
+                <a:latin typeface="Calibri"/>
+              </a:rPr>
+              <a:t>✓</a:t>
+            </a:r>
+          </a:p>
+        </p:txBody>
+      </p:sp>
+      <p:sp>
+        <p:nvSpPr>
+          <p:cNvPr id="12" name="TextBox 11"/>
+          <p:cNvSpPr txBox="1"/>
+          <p:nvPr/>
+        </p:nvSpPr>
+        <p:spPr>
+          <a:xfrm>
+            <a:off x="7223760" y="2176272"/>
+            <a:ext cx="4160520" cy="1188720"/>
+          </a:xfrm>
+          <a:prstGeom prst="rect">
+            <a:avLst/>
+          </a:prstGeom>
+          <a:noFill/>
+        </p:spPr>
+        <p:txBody>
+          <a:bodyPr wrap="square" anchor="t" lIns="0" rIns="0" tIns="0" bIns="0">
+            <a:spAutoFit/>
+          </a:bodyPr>
+          <a:lstStyle/>
+          <a:p>
+            <a:pPr algn="l">
+              <a:spcBef>
+                <a:spcPts val="0"/>
+              </a:spcBef>
+              <a:spcAft>
+                <a:spcPts val="600"/>
+              </a:spcAft>
+            </a:pPr>
+            <a:r>
+              <a:rPr sz="1600" b="1" i="0">
+                <a:solidFill>
+                  <a:srgbClr val="09131B"/>
+                </a:solidFill>
+                <a:latin typeface="Calibri"/>
+              </a:rPr>
+              <a:t>Your stack, orchestrated</a:t>
+            </a:r>
+          </a:p>
+          <a:p>
+            <a:pPr algn="l">
+              <a:spcBef>
+                <a:spcPts val="0"/>
+              </a:spcBef>
+              <a:spcAft>
+                <a:spcPts val="0"/>
+              </a:spcAft>
+            </a:pPr>
+            <a:r>
+              <a:rPr sz="1250" b="0" i="0">
+                <a:solidFill>
+                  <a:srgbClr val="595959"/>
+                </a:solidFill>
+                <a:latin typeface="Calibri"/>
+              </a:rPr>
+              <a:t>Built on Microsoft tools you already own — minimal new procurement, security or training overhead.</a:t>
+            </a:r>
+          </a:p>
+        </p:txBody>
+      </p:sp>
+      <p:sp>
+        <p:nvSpPr>
+          <p:cNvPr id="13" name="Rounded Rectangle 12"/>
+          <p:cNvSpPr/>
+          <p:nvPr/>
+        </p:nvSpPr>
+        <p:spPr>
+          <a:xfrm>
+            <a:off x="685800" y="3794759"/>
+            <a:ext cx="5349240" cy="1691640"/>
+          </a:xfrm>
+          <a:prstGeom prst="roundRect">
+            <a:avLst>
+              <a:gd name="adj" fmla="val 6000"/>
+            </a:avLst>
+          </a:prstGeom>
+          <a:solidFill>
+            <a:srgbClr val="FFFFFF"/>
+          </a:solidFill>
+          <a:ln w="12700">
+            <a:solidFill>
+              <a:srgbClr val="D6DCE4"/>
+            </a:solidFill>
+          </a:ln>
+          <a:effectLst/>
+        </p:spPr>
+        <p:style>
+          <a:lnRef idx="1">
+            <a:schemeClr val="accent1"/>
+          </a:lnRef>
+          <a:fillRef idx="3">
+            <a:schemeClr val="accent1"/>
+          </a:fillRef>
+          <a:effectRef idx="2">
+            <a:schemeClr val="accent1"/>
+          </a:effectRef>
+          <a:fontRef idx="minor">
+            <a:schemeClr val="lt1"/>
+          </a:fontRef>
+        </p:style>
+        <p:txBody>
+          <a:bodyPr rtlCol="0" anchor="ctr"/>
+          <a:lstStyle/>
+          <a:p>
+            <a:pPr algn="ctr"/>
+          </a:p>
+        </p:txBody>
+      </p:sp>
+      <p:sp>
+        <p:nvSpPr>
+          <p:cNvPr id="14" name="Rounded Rectangle 13"/>
+          <p:cNvSpPr/>
+          <p:nvPr/>
+        </p:nvSpPr>
+        <p:spPr>
+          <a:xfrm>
+            <a:off x="941832" y="4069079"/>
+            <a:ext cx="457200" cy="457200"/>
+          </a:xfrm>
+          <a:prstGeom prst="roundRect">
+            <a:avLst>
+              <a:gd name="adj" fmla="val 25000"/>
+            </a:avLst>
+          </a:prstGeom>
+          <a:solidFill>
+            <a:srgbClr val="1E7F4F"/>
+          </a:solidFill>
+          <a:ln>
+            <a:noFill/>
+          </a:ln>
+          <a:effectLst/>
+        </p:spPr>
+        <p:style>
+          <a:lnRef idx="1">
+            <a:schemeClr val="accent1"/>
+          </a:lnRef>
+          <a:fillRef idx="3">
+            <a:schemeClr val="accent1"/>
+          </a:fillRef>
+          <a:effectRef idx="2">
+            <a:schemeClr val="accent1"/>
+          </a:effectRef>
+          <a:fontRef idx="minor">
+            <a:schemeClr val="lt1"/>
+          </a:fontRef>
+        </p:style>
+        <p:txBody>
+          <a:bodyPr rtlCol="0" anchor="ctr"/>
+          <a:lstStyle/>
+          <a:p>
+            <a:pPr algn="ctr"/>
+          </a:p>
+        </p:txBody>
+      </p:sp>
+      <p:sp>
+        <p:nvSpPr>
+          <p:cNvPr id="15" name="TextBox 14"/>
+          <p:cNvSpPr txBox="1"/>
+          <p:nvPr/>
+        </p:nvSpPr>
+        <p:spPr>
+          <a:xfrm>
+            <a:off x="941832" y="4069079"/>
+            <a:ext cx="457200" cy="457200"/>
+          </a:xfrm>
+          <a:prstGeom prst="rect">
+            <a:avLst/>
+          </a:prstGeom>
+          <a:noFill/>
+        </p:spPr>
+        <p:txBody>
+          <a:bodyPr wrap="square" anchor="ctr" lIns="0" rIns="0" tIns="0" bIns="0">
+            <a:spAutoFit/>
+          </a:bodyPr>
+          <a:lstStyle/>
+          <a:p>
+            <a:pPr algn="ctr">
+              <a:spcBef>
+                <a:spcPts val="0"/>
+              </a:spcBef>
+              <a:spcAft>
+                <a:spcPts val="0"/>
+              </a:spcAft>
+            </a:pPr>
+            <a:r>
+              <a:rPr sz="1400" b="1" i="0">
+                <a:solidFill>
+                  <a:srgbClr val="FFFFFF"/>
+                </a:solidFill>
+                <a:latin typeface="Calibri"/>
+              </a:rPr>
+              <a:t>✓</a:t>
+            </a:r>
+          </a:p>
+        </p:txBody>
+      </p:sp>
+      <p:sp>
+        <p:nvSpPr>
+          <p:cNvPr id="16" name="TextBox 15"/>
+          <p:cNvSpPr txBox="1"/>
+          <p:nvPr/>
+        </p:nvSpPr>
+        <p:spPr>
+          <a:xfrm>
+            <a:off x="1600200" y="4050791"/>
+            <a:ext cx="4160520" cy="1188720"/>
+          </a:xfrm>
+          <a:prstGeom prst="rect">
+            <a:avLst/>
+          </a:prstGeom>
+          <a:noFill/>
+        </p:spPr>
+        <p:txBody>
+          <a:bodyPr wrap="square" anchor="t" lIns="0" rIns="0" tIns="0" bIns="0">
+            <a:spAutoFit/>
+          </a:bodyPr>
+          <a:lstStyle/>
+          <a:p>
+            <a:pPr algn="l">
+              <a:spcBef>
+                <a:spcPts val="0"/>
+              </a:spcBef>
+              <a:spcAft>
+                <a:spcPts val="600"/>
+              </a:spcAft>
+            </a:pPr>
+            <a:r>
+              <a:rPr sz="1600" b="1" i="0">
+                <a:solidFill>
+                  <a:srgbClr val="09131B"/>
+                </a:solidFill>
+                <a:latin typeface="Calibri"/>
+              </a:rPr>
+              <a:t>Evaluate it today</a:t>
+            </a:r>
+          </a:p>
+          <a:p>
+            <a:pPr algn="l">
+              <a:spcBef>
+                <a:spcPts val="0"/>
+              </a:spcBef>
+              <a:spcAft>
+                <a:spcPts val="0"/>
+              </a:spcAft>
+            </a:pPr>
+            <a:r>
+              <a:rPr sz="1250" b="0" i="0">
+                <a:solidFill>
+                  <a:srgbClr val="595959"/>
+                </a:solidFill>
+                <a:latin typeface="Calibri"/>
+              </a:rPr>
+              <a:t>A working, offline prototype means stakeholders can click through and react now — no leap of faith.</a:t>
+            </a:r>
+          </a:p>
+        </p:txBody>
+      </p:sp>
+      <p:sp>
+        <p:nvSpPr>
+          <p:cNvPr id="17" name="Rounded Rectangle 16"/>
+          <p:cNvSpPr/>
+          <p:nvPr/>
+        </p:nvSpPr>
+        <p:spPr>
+          <a:xfrm>
+            <a:off x="6309360" y="3794759"/>
+            <a:ext cx="5349240" cy="1691640"/>
+          </a:xfrm>
+          <a:prstGeom prst="roundRect">
+            <a:avLst>
+              <a:gd name="adj" fmla="val 6000"/>
+            </a:avLst>
+          </a:prstGeom>
+          <a:solidFill>
+            <a:srgbClr val="FFFFFF"/>
+          </a:solidFill>
+          <a:ln w="12700">
+            <a:solidFill>
+              <a:srgbClr val="D6DCE4"/>
+            </a:solidFill>
+          </a:ln>
+          <a:effectLst/>
+        </p:spPr>
+        <p:style>
+          <a:lnRef idx="1">
+            <a:schemeClr val="accent1"/>
+          </a:lnRef>
+          <a:fillRef idx="3">
+            <a:schemeClr val="accent1"/>
+          </a:fillRef>
+          <a:effectRef idx="2">
+            <a:schemeClr val="accent1"/>
+          </a:effectRef>
+          <a:fontRef idx="minor">
+            <a:schemeClr val="lt1"/>
+          </a:fontRef>
+        </p:style>
+        <p:txBody>
+          <a:bodyPr rtlCol="0" anchor="ctr"/>
+          <a:lstStyle/>
+          <a:p>
+            <a:pPr algn="ctr"/>
+          </a:p>
+        </p:txBody>
+      </p:sp>
+      <p:sp>
+        <p:nvSpPr>
+          <p:cNvPr id="18" name="Rounded Rectangle 17"/>
+          <p:cNvSpPr/>
+          <p:nvPr/>
+        </p:nvSpPr>
+        <p:spPr>
+          <a:xfrm>
+            <a:off x="6565392" y="4069079"/>
+            <a:ext cx="457200" cy="457200"/>
+          </a:xfrm>
+          <a:prstGeom prst="roundRect">
+            <a:avLst>
+              <a:gd name="adj" fmla="val 25000"/>
+            </a:avLst>
+          </a:prstGeom>
+          <a:solidFill>
+            <a:srgbClr val="1E7F4F"/>
+          </a:solidFill>
+          <a:ln>
+            <a:noFill/>
+          </a:ln>
+          <a:effectLst/>
+        </p:spPr>
+        <p:style>
+          <a:lnRef idx="1">
+            <a:schemeClr val="accent1"/>
+          </a:lnRef>
+          <a:fillRef idx="3">
+            <a:schemeClr val="accent1"/>
+          </a:fillRef>
+          <a:effectRef idx="2">
+            <a:schemeClr val="accent1"/>
+          </a:effectRef>
+          <a:fontRef idx="minor">
+            <a:schemeClr val="lt1"/>
+          </a:fontRef>
+        </p:style>
+        <p:txBody>
+          <a:bodyPr rtlCol="0" anchor="ctr"/>
+          <a:lstStyle/>
+          <a:p>
+            <a:pPr algn="ctr"/>
+          </a:p>
+        </p:txBody>
+      </p:sp>
+      <p:sp>
+        <p:nvSpPr>
           <p:cNvPr id="19" name="TextBox 18"/>
           <p:cNvSpPr txBox="1"/>
           <p:nvPr/>
@@ -20806,7 +22427,7 @@
                 </a:solidFill>
                 <a:latin typeface="Calibri"/>
               </a:rPr>
-              <a:t>16</a:t>
+              <a:t>17</a:t>
             </a:r>
           </a:p>
         </p:txBody>
@@ -20819,7 +22440,7 @@
 </p:sld>
 </file>
 
-<file path=ppt/slides/slide22.xml><?xml version="1.0" encoding="utf-8"?>
+<file path=ppt/slides/slide23.xml><?xml version="1.0" encoding="utf-8"?>
 <p:sld xmlns:a="http://schemas.openxmlformats.org/drawingml/2006/main" xmlns:p="http://schemas.openxmlformats.org/presentationml/2006/main" xmlns:r="http://schemas.openxmlformats.org/officeDocument/2006/relationships">
   <p:cSld>
     <p:bg>
@@ -21611,7 +23232,7 @@
 </p:sld>
 </file>
 
-<file path=ppt/slides/slide23.xml><?xml version="1.0" encoding="utf-8"?>
+<file path=ppt/slides/slide24.xml><?xml version="1.0" encoding="utf-8"?>
 <p:sld xmlns:a="http://schemas.openxmlformats.org/drawingml/2006/main" xmlns:p="http://schemas.openxmlformats.org/presentationml/2006/main" xmlns:r="http://schemas.openxmlformats.org/officeDocument/2006/relationships">
   <p:cSld>
     <p:bg>
@@ -22017,7 +23638,7 @@
                 </a:solidFill>
                 <a:latin typeface="Calibri"/>
               </a:rPr>
-              <a:t>17</a:t>
+              <a:t>18</a:t>
             </a:r>
           </a:p>
         </p:txBody>
